--- a/slides/layout.pptx
+++ b/slides/layout.pptx
@@ -5,8 +5,8 @@
     <p:sldMasterId id="2147483648" r:id="rId1"/>
   </p:sldMasterIdLst>
   <p:sldIdLst>
-    <p:sldId id="319" r:id="rId2"/>
-    <p:sldId id="320" r:id="rId3"/>
+    <p:sldId id="320" r:id="rId2"/>
+    <p:sldId id="319" r:id="rId3"/>
     <p:sldId id="321" r:id="rId4"/>
   </p:sldIdLst>
   <p:sldSz cx="12192000" cy="6858000"/>
@@ -106,6 +106,11 @@
       </a:defRPr>
     </a:lvl9pPr>
   </p:defaultTextStyle>
+  <p:extLst>
+    <p:ext uri="{EFAFB233-063F-42B5-8137-9DF3F51BA10A}">
+      <p15:sldGuideLst xmlns:p15="http://schemas.microsoft.com/office/powerpoint/2012/main"/>
+    </p:ext>
+  </p:extLst>
 </p:presentation>
 </file>
 
@@ -258,7 +263,7 @@
           <a:p>
             <a:fld id="{730695CF-0371-4FED-818D-977EF1A1FE29}" type="datetimeFigureOut">
               <a:rPr lang="it-IT" smtClean="0"/>
-              <a:t>12/08/2026</a:t>
+              <a:t>13/08/2026</a:t>
             </a:fld>
             <a:endParaRPr lang="it-IT"/>
           </a:p>
@@ -458,7 +463,7 @@
           <a:p>
             <a:fld id="{730695CF-0371-4FED-818D-977EF1A1FE29}" type="datetimeFigureOut">
               <a:rPr lang="it-IT" smtClean="0"/>
-              <a:t>12/08/2026</a:t>
+              <a:t>13/08/2026</a:t>
             </a:fld>
             <a:endParaRPr lang="it-IT"/>
           </a:p>
@@ -668,7 +673,7 @@
           <a:p>
             <a:fld id="{730695CF-0371-4FED-818D-977EF1A1FE29}" type="datetimeFigureOut">
               <a:rPr lang="it-IT" smtClean="0"/>
-              <a:t>12/08/2026</a:t>
+              <a:t>13/08/2026</a:t>
             </a:fld>
             <a:endParaRPr lang="it-IT"/>
           </a:p>
@@ -868,7 +873,7 @@
           <a:p>
             <a:fld id="{730695CF-0371-4FED-818D-977EF1A1FE29}" type="datetimeFigureOut">
               <a:rPr lang="it-IT" smtClean="0"/>
-              <a:t>12/08/2026</a:t>
+              <a:t>13/08/2026</a:t>
             </a:fld>
             <a:endParaRPr lang="it-IT"/>
           </a:p>
@@ -1144,7 +1149,7 @@
           <a:p>
             <a:fld id="{730695CF-0371-4FED-818D-977EF1A1FE29}" type="datetimeFigureOut">
               <a:rPr lang="it-IT" smtClean="0"/>
-              <a:t>12/08/2026</a:t>
+              <a:t>13/08/2026</a:t>
             </a:fld>
             <a:endParaRPr lang="it-IT"/>
           </a:p>
@@ -1412,7 +1417,7 @@
           <a:p>
             <a:fld id="{730695CF-0371-4FED-818D-977EF1A1FE29}" type="datetimeFigureOut">
               <a:rPr lang="it-IT" smtClean="0"/>
-              <a:t>12/08/2026</a:t>
+              <a:t>13/08/2026</a:t>
             </a:fld>
             <a:endParaRPr lang="it-IT"/>
           </a:p>
@@ -1827,7 +1832,7 @@
           <a:p>
             <a:fld id="{730695CF-0371-4FED-818D-977EF1A1FE29}" type="datetimeFigureOut">
               <a:rPr lang="it-IT" smtClean="0"/>
-              <a:t>12/08/2026</a:t>
+              <a:t>13/08/2026</a:t>
             </a:fld>
             <a:endParaRPr lang="it-IT"/>
           </a:p>
@@ -1969,7 +1974,7 @@
           <a:p>
             <a:fld id="{730695CF-0371-4FED-818D-977EF1A1FE29}" type="datetimeFigureOut">
               <a:rPr lang="it-IT" smtClean="0"/>
-              <a:t>12/08/2026</a:t>
+              <a:t>13/08/2026</a:t>
             </a:fld>
             <a:endParaRPr lang="it-IT"/>
           </a:p>
@@ -2082,7 +2087,7 @@
           <a:p>
             <a:fld id="{730695CF-0371-4FED-818D-977EF1A1FE29}" type="datetimeFigureOut">
               <a:rPr lang="it-IT" smtClean="0"/>
-              <a:t>12/08/2026</a:t>
+              <a:t>13/08/2026</a:t>
             </a:fld>
             <a:endParaRPr lang="it-IT"/>
           </a:p>
@@ -2395,7 +2400,7 @@
           <a:p>
             <a:fld id="{730695CF-0371-4FED-818D-977EF1A1FE29}" type="datetimeFigureOut">
               <a:rPr lang="it-IT" smtClean="0"/>
-              <a:t>12/08/2026</a:t>
+              <a:t>13/08/2026</a:t>
             </a:fld>
             <a:endParaRPr lang="it-IT"/>
           </a:p>
@@ -2684,7 +2689,7 @@
           <a:p>
             <a:fld id="{730695CF-0371-4FED-818D-977EF1A1FE29}" type="datetimeFigureOut">
               <a:rPr lang="it-IT" smtClean="0"/>
-              <a:t>12/08/2026</a:t>
+              <a:t>13/08/2026</a:t>
             </a:fld>
             <a:endParaRPr lang="it-IT"/>
           </a:p>
@@ -2927,7 +2932,7 @@
           <a:p>
             <a:fld id="{730695CF-0371-4FED-818D-977EF1A1FE29}" type="datetimeFigureOut">
               <a:rPr lang="it-IT" smtClean="0"/>
-              <a:t>12/08/2026</a:t>
+              <a:t>13/08/2026</a:t>
             </a:fld>
             <a:endParaRPr lang="it-IT"/>
           </a:p>
@@ -3335,668 +3340,6 @@
         <p:cNvPr id="1" name="">
           <a:extLst>
             <a:ext uri="{FF2B5EF4-FFF2-40B4-BE49-F238E27FC236}">
-              <a16:creationId xmlns:a16="http://schemas.microsoft.com/office/drawing/2014/main" id="{29C1A478-2C97-10B4-34B5-10A734949A4E}"/>
-            </a:ext>
-          </a:extLst>
-        </p:cNvPr>
-        <p:cNvGrpSpPr/>
-        <p:nvPr/>
-      </p:nvGrpSpPr>
-      <p:grpSpPr>
-        <a:xfrm>
-          <a:off x="0" y="0"/>
-          <a:ext cx="0" cy="0"/>
-          <a:chOff x="0" y="0"/>
-          <a:chExt cx="0" cy="0"/>
-        </a:xfrm>
-      </p:grpSpPr>
-      <p:sp>
-        <p:nvSpPr>
-          <p:cNvPr id="2" name="Titolo 1">
-            <a:extLst>
-              <a:ext uri="{FF2B5EF4-FFF2-40B4-BE49-F238E27FC236}">
-                <a16:creationId xmlns:a16="http://schemas.microsoft.com/office/drawing/2014/main" id="{A0AC2323-4074-7D2D-42E4-448B5D17288B}"/>
-              </a:ext>
-            </a:extLst>
-          </p:cNvPr>
-          <p:cNvSpPr>
-            <a:spLocks noGrp="1"/>
-          </p:cNvSpPr>
-          <p:nvPr>
-            <p:ph type="title"/>
-          </p:nvPr>
-        </p:nvSpPr>
-        <p:spPr>
-          <a:xfrm>
-            <a:off x="38100" y="69651"/>
-            <a:ext cx="12114000" cy="1153094"/>
-          </a:xfrm>
-          <a:prstGeom prst="roundRect">
-            <a:avLst>
-              <a:gd name="adj" fmla="val 36459"/>
-            </a:avLst>
-          </a:prstGeom>
-          <a:noFill/>
-        </p:spPr>
-        <p:txBody>
-          <a:bodyPr>
-            <a:normAutofit/>
-          </a:bodyPr>
-          <a:lstStyle/>
-          <a:p>
-            <a:r>
-              <a:rPr lang="it-IT" b="1" dirty="0">
-                <a:solidFill>
-                  <a:srgbClr val="002060"/>
-                </a:solidFill>
-              </a:rPr>
-              <a:t>	1. SCHEMATIC LAYOUT</a:t>
-            </a:r>
-          </a:p>
-        </p:txBody>
-      </p:sp>
-      <p:sp>
-        <p:nvSpPr>
-          <p:cNvPr id="4" name="Segnaposto data 3">
-            <a:extLst>
-              <a:ext uri="{FF2B5EF4-FFF2-40B4-BE49-F238E27FC236}">
-                <a16:creationId xmlns:a16="http://schemas.microsoft.com/office/drawing/2014/main" id="{C8305303-D450-DE41-FD4D-E965DB4B9962}"/>
-              </a:ext>
-            </a:extLst>
-          </p:cNvPr>
-          <p:cNvSpPr>
-            <a:spLocks noGrp="1"/>
-          </p:cNvSpPr>
-          <p:nvPr>
-            <p:ph type="dt" sz="half" idx="10"/>
-          </p:nvPr>
-        </p:nvSpPr>
-        <p:spPr>
-          <a:xfrm>
-            <a:off x="838200" y="6356349"/>
-            <a:ext cx="2743200" cy="432000"/>
-          </a:xfrm>
-        </p:spPr>
-        <p:txBody>
-          <a:bodyPr/>
-          <a:lstStyle/>
-          <a:p>
-            <a:r>
-              <a:rPr lang="it-IT" sz="1500" b="1" dirty="0">
-                <a:solidFill>
-                  <a:srgbClr val="002060"/>
-                </a:solidFill>
-              </a:rPr>
-              <a:t>August 2026</a:t>
-            </a:r>
-          </a:p>
-        </p:txBody>
-      </p:sp>
-      <p:sp>
-        <p:nvSpPr>
-          <p:cNvPr id="5" name="Segnaposto piè di pagina 4">
-            <a:extLst>
-              <a:ext uri="{FF2B5EF4-FFF2-40B4-BE49-F238E27FC236}">
-                <a16:creationId xmlns:a16="http://schemas.microsoft.com/office/drawing/2014/main" id="{B932D726-6862-785A-B00C-19309D53BB9C}"/>
-              </a:ext>
-            </a:extLst>
-          </p:cNvPr>
-          <p:cNvSpPr>
-            <a:spLocks noGrp="1"/>
-          </p:cNvSpPr>
-          <p:nvPr>
-            <p:ph type="ftr" sz="quarter" idx="11"/>
-          </p:nvPr>
-        </p:nvSpPr>
-        <p:spPr>
-          <a:xfrm>
-            <a:off x="0" y="6356349"/>
-            <a:ext cx="12192000" cy="432000"/>
-          </a:xfrm>
-        </p:spPr>
-        <p:txBody>
-          <a:bodyPr/>
-          <a:lstStyle/>
-          <a:p>
-            <a:r>
-              <a:rPr lang="it-IT" sz="1500" b="1" dirty="0">
-                <a:solidFill>
-                  <a:srgbClr val="002060"/>
-                </a:solidFill>
-              </a:rPr>
-              <a:t>Anna Sofia Moro</a:t>
-            </a:r>
-          </a:p>
-        </p:txBody>
-      </p:sp>
-      <p:sp>
-        <p:nvSpPr>
-          <p:cNvPr id="6" name="Segnaposto numero diapositiva 5">
-            <a:extLst>
-              <a:ext uri="{FF2B5EF4-FFF2-40B4-BE49-F238E27FC236}">
-                <a16:creationId xmlns:a16="http://schemas.microsoft.com/office/drawing/2014/main" id="{1318A926-43E2-8B1A-948C-DD69E1680453}"/>
-              </a:ext>
-            </a:extLst>
-          </p:cNvPr>
-          <p:cNvSpPr>
-            <a:spLocks noGrp="1"/>
-          </p:cNvSpPr>
-          <p:nvPr>
-            <p:ph type="sldNum" sz="quarter" idx="12"/>
-          </p:nvPr>
-        </p:nvSpPr>
-        <p:spPr>
-          <a:xfrm>
-            <a:off x="8610600" y="6356349"/>
-            <a:ext cx="2743200" cy="432000"/>
-          </a:xfrm>
-        </p:spPr>
-        <p:txBody>
-          <a:bodyPr/>
-          <a:lstStyle/>
-          <a:p>
-            <a:fld id="{0A318BD9-CA14-4A83-ACF0-03D5918EB402}" type="slidenum">
-              <a:rPr lang="it-IT" sz="1500" b="1" smtClean="0">
-                <a:solidFill>
-                  <a:srgbClr val="002060"/>
-                </a:solidFill>
-              </a:rPr>
-              <a:t>1</a:t>
-            </a:fld>
-            <a:endParaRPr lang="it-IT" sz="1500" b="1" dirty="0">
-              <a:solidFill>
-                <a:srgbClr val="002060"/>
-              </a:solidFill>
-            </a:endParaRPr>
-          </a:p>
-        </p:txBody>
-      </p:sp>
-      <p:cxnSp>
-        <p:nvCxnSpPr>
-          <p:cNvPr id="10" name="Connettore diritto 9">
-            <a:extLst>
-              <a:ext uri="{FF2B5EF4-FFF2-40B4-BE49-F238E27FC236}">
-                <a16:creationId xmlns:a16="http://schemas.microsoft.com/office/drawing/2014/main" id="{2EB45A51-E901-915B-0293-EC5A0957C2FE}"/>
-              </a:ext>
-            </a:extLst>
-          </p:cNvPr>
-          <p:cNvCxnSpPr>
-            <a:cxnSpLocks/>
-          </p:cNvCxnSpPr>
-          <p:nvPr/>
-        </p:nvCxnSpPr>
-        <p:spPr>
-          <a:xfrm>
-            <a:off x="696000" y="1155368"/>
-            <a:ext cx="10800000" cy="0"/>
-          </a:xfrm>
-          <a:prstGeom prst="line">
-            <a:avLst/>
-          </a:prstGeom>
-          <a:ln w="38100">
-            <a:solidFill>
-              <a:srgbClr val="002060"/>
-            </a:solidFill>
-          </a:ln>
-        </p:spPr>
-        <p:style>
-          <a:lnRef idx="2">
-            <a:schemeClr val="accent1"/>
-          </a:lnRef>
-          <a:fillRef idx="0">
-            <a:schemeClr val="accent1"/>
-          </a:fillRef>
-          <a:effectRef idx="1">
-            <a:schemeClr val="accent1"/>
-          </a:effectRef>
-          <a:fontRef idx="minor">
-            <a:schemeClr val="tx1"/>
-          </a:fontRef>
-        </p:style>
-      </p:cxnSp>
-      <p:sp>
-        <p:nvSpPr>
-          <p:cNvPr id="13" name="CasellaDiTesto 12">
-            <a:extLst>
-              <a:ext uri="{FF2B5EF4-FFF2-40B4-BE49-F238E27FC236}">
-                <a16:creationId xmlns:a16="http://schemas.microsoft.com/office/drawing/2014/main" id="{523A421A-CF34-DE89-C38E-406198ECC43D}"/>
-              </a:ext>
-            </a:extLst>
-          </p:cNvPr>
-          <p:cNvSpPr txBox="1"/>
-          <p:nvPr/>
-        </p:nvSpPr>
-        <p:spPr>
-          <a:xfrm>
-            <a:off x="3048886" y="3244334"/>
-            <a:ext cx="6097772" cy="369332"/>
-          </a:xfrm>
-          <a:prstGeom prst="rect">
-            <a:avLst/>
-          </a:prstGeom>
-          <a:noFill/>
-        </p:spPr>
-        <p:txBody>
-          <a:bodyPr wrap="square">
-            <a:spAutoFit/>
-          </a:bodyPr>
-          <a:lstStyle/>
-          <a:p>
-            <a:endParaRPr lang="it-IT" dirty="0"/>
-          </a:p>
-        </p:txBody>
-      </p:sp>
-      <p:sp>
-        <p:nvSpPr>
-          <p:cNvPr id="15" name="CasellaDiTesto 14">
-            <a:extLst>
-              <a:ext uri="{FF2B5EF4-FFF2-40B4-BE49-F238E27FC236}">
-                <a16:creationId xmlns:a16="http://schemas.microsoft.com/office/drawing/2014/main" id="{5A3A2D6F-A325-D7E7-DEFD-6EE799EFE079}"/>
-              </a:ext>
-            </a:extLst>
-          </p:cNvPr>
-          <p:cNvSpPr txBox="1"/>
-          <p:nvPr/>
-        </p:nvSpPr>
-        <p:spPr>
-          <a:xfrm>
-            <a:off x="3048886" y="3244334"/>
-            <a:ext cx="6097772" cy="369332"/>
-          </a:xfrm>
-          <a:prstGeom prst="rect">
-            <a:avLst/>
-          </a:prstGeom>
-          <a:noFill/>
-        </p:spPr>
-        <p:txBody>
-          <a:bodyPr wrap="square">
-            <a:spAutoFit/>
-          </a:bodyPr>
-          <a:lstStyle/>
-          <a:p>
-            <a:endParaRPr lang="it-IT" dirty="0"/>
-          </a:p>
-        </p:txBody>
-      </p:sp>
-      <p:pic>
-        <p:nvPicPr>
-          <p:cNvPr id="7" name="Immagine 6">
-            <a:extLst>
-              <a:ext uri="{FF2B5EF4-FFF2-40B4-BE49-F238E27FC236}">
-                <a16:creationId xmlns:a16="http://schemas.microsoft.com/office/drawing/2014/main" id="{3F38F614-6004-D72E-11CB-6711FB5ABE56}"/>
-              </a:ext>
-            </a:extLst>
-          </p:cNvPr>
-          <p:cNvPicPr>
-            <a:picLocks noChangeAspect="1"/>
-          </p:cNvPicPr>
-          <p:nvPr/>
-        </p:nvPicPr>
-        <p:blipFill>
-          <a:blip r:embed="rId2">
-            <a:extLst>
-              <a:ext uri="{28A0092B-C50C-407E-A947-70E740481C1C}">
-                <a14:useLocalDpi xmlns:a14="http://schemas.microsoft.com/office/drawing/2010/main" val="0"/>
-              </a:ext>
-            </a:extLst>
-          </a:blip>
-          <a:srcRect/>
-          <a:stretch/>
-        </p:blipFill>
-        <p:spPr>
-          <a:xfrm>
-            <a:off x="1899247" y="1546325"/>
-            <a:ext cx="8757821" cy="4165439"/>
-          </a:xfrm>
-          <a:prstGeom prst="rect">
-            <a:avLst/>
-          </a:prstGeom>
-        </p:spPr>
-      </p:pic>
-      <p:sp>
-        <p:nvSpPr>
-          <p:cNvPr id="14" name="CasellaDiTesto 13">
-            <a:extLst>
-              <a:ext uri="{FF2B5EF4-FFF2-40B4-BE49-F238E27FC236}">
-                <a16:creationId xmlns:a16="http://schemas.microsoft.com/office/drawing/2014/main" id="{8761CFF4-1AA7-7DBA-C7AD-C4C417735B36}"/>
-              </a:ext>
-            </a:extLst>
-          </p:cNvPr>
-          <p:cNvSpPr txBox="1"/>
-          <p:nvPr/>
-        </p:nvSpPr>
-        <p:spPr>
-          <a:xfrm>
-            <a:off x="2819400" y="1671629"/>
-            <a:ext cx="679450" cy="400110"/>
-          </a:xfrm>
-          <a:prstGeom prst="rect">
-            <a:avLst/>
-          </a:prstGeom>
-          <a:noFill/>
-        </p:spPr>
-        <p:txBody>
-          <a:bodyPr wrap="square" rtlCol="0">
-            <a:spAutoFit/>
-          </a:bodyPr>
-          <a:lstStyle/>
-          <a:p>
-            <a:pPr algn="ctr"/>
-            <a:r>
-              <a:rPr lang="it-IT" sz="2000" b="1" dirty="0"/>
-              <a:t>T1</a:t>
-            </a:r>
-          </a:p>
-        </p:txBody>
-      </p:sp>
-      <p:sp>
-        <p:nvSpPr>
-          <p:cNvPr id="17" name="CasellaDiTesto 16">
-            <a:extLst>
-              <a:ext uri="{FF2B5EF4-FFF2-40B4-BE49-F238E27FC236}">
-                <a16:creationId xmlns:a16="http://schemas.microsoft.com/office/drawing/2014/main" id="{D3769F19-49FA-6A86-4E43-EE9B9FCF5335}"/>
-              </a:ext>
-            </a:extLst>
-          </p:cNvPr>
-          <p:cNvSpPr txBox="1"/>
-          <p:nvPr/>
-        </p:nvSpPr>
-        <p:spPr>
-          <a:xfrm>
-            <a:off x="3498850" y="1671629"/>
-            <a:ext cx="679450" cy="400110"/>
-          </a:xfrm>
-          <a:prstGeom prst="rect">
-            <a:avLst/>
-          </a:prstGeom>
-          <a:noFill/>
-        </p:spPr>
-        <p:txBody>
-          <a:bodyPr wrap="square" rtlCol="0">
-            <a:spAutoFit/>
-          </a:bodyPr>
-          <a:lstStyle/>
-          <a:p>
-            <a:pPr algn="ctr"/>
-            <a:r>
-              <a:rPr lang="it-IT" sz="2000" b="1" dirty="0"/>
-              <a:t>T2</a:t>
-            </a:r>
-          </a:p>
-        </p:txBody>
-      </p:sp>
-      <p:sp>
-        <p:nvSpPr>
-          <p:cNvPr id="19" name="CasellaDiTesto 18">
-            <a:extLst>
-              <a:ext uri="{FF2B5EF4-FFF2-40B4-BE49-F238E27FC236}">
-                <a16:creationId xmlns:a16="http://schemas.microsoft.com/office/drawing/2014/main" id="{E6613190-54C0-7766-BE53-A88A0928D029}"/>
-              </a:ext>
-            </a:extLst>
-          </p:cNvPr>
-          <p:cNvSpPr txBox="1"/>
-          <p:nvPr/>
-        </p:nvSpPr>
-        <p:spPr>
-          <a:xfrm>
-            <a:off x="6146800" y="1671629"/>
-            <a:ext cx="679450" cy="400110"/>
-          </a:xfrm>
-          <a:prstGeom prst="rect">
-            <a:avLst/>
-          </a:prstGeom>
-          <a:noFill/>
-        </p:spPr>
-        <p:txBody>
-          <a:bodyPr wrap="square" rtlCol="0">
-            <a:spAutoFit/>
-          </a:bodyPr>
-          <a:lstStyle/>
-          <a:p>
-            <a:pPr algn="ctr"/>
-            <a:r>
-              <a:rPr lang="it-IT" sz="2000" b="1" dirty="0"/>
-              <a:t>T3</a:t>
-            </a:r>
-          </a:p>
-        </p:txBody>
-      </p:sp>
-      <p:sp>
-        <p:nvSpPr>
-          <p:cNvPr id="21" name="CasellaDiTesto 20">
-            <a:extLst>
-              <a:ext uri="{FF2B5EF4-FFF2-40B4-BE49-F238E27FC236}">
-                <a16:creationId xmlns:a16="http://schemas.microsoft.com/office/drawing/2014/main" id="{91ABB6A2-0253-F61C-3A3B-B5D48ED67530}"/>
-              </a:ext>
-            </a:extLst>
-          </p:cNvPr>
-          <p:cNvSpPr txBox="1"/>
-          <p:nvPr/>
-        </p:nvSpPr>
-        <p:spPr>
-          <a:xfrm>
-            <a:off x="8455025" y="1671629"/>
-            <a:ext cx="679450" cy="400110"/>
-          </a:xfrm>
-          <a:prstGeom prst="rect">
-            <a:avLst/>
-          </a:prstGeom>
-          <a:noFill/>
-        </p:spPr>
-        <p:txBody>
-          <a:bodyPr wrap="square" rtlCol="0">
-            <a:spAutoFit/>
-          </a:bodyPr>
-          <a:lstStyle/>
-          <a:p>
-            <a:pPr algn="ctr"/>
-            <a:r>
-              <a:rPr lang="it-IT" sz="2000" b="1" dirty="0"/>
-              <a:t>C4</a:t>
-            </a:r>
-          </a:p>
-        </p:txBody>
-      </p:sp>
-      <p:sp>
-        <p:nvSpPr>
-          <p:cNvPr id="23" name="CasellaDiTesto 22">
-            <a:extLst>
-              <a:ext uri="{FF2B5EF4-FFF2-40B4-BE49-F238E27FC236}">
-                <a16:creationId xmlns:a16="http://schemas.microsoft.com/office/drawing/2014/main" id="{5EF31BC2-B06C-C19F-8B82-234E7051B99F}"/>
-              </a:ext>
-            </a:extLst>
-          </p:cNvPr>
-          <p:cNvSpPr txBox="1"/>
-          <p:nvPr/>
-        </p:nvSpPr>
-        <p:spPr>
-          <a:xfrm>
-            <a:off x="4914900" y="4911565"/>
-            <a:ext cx="1047750" cy="400110"/>
-          </a:xfrm>
-          <a:prstGeom prst="rect">
-            <a:avLst/>
-          </a:prstGeom>
-          <a:noFill/>
-        </p:spPr>
-        <p:txBody>
-          <a:bodyPr wrap="square" rtlCol="0">
-            <a:spAutoFit/>
-          </a:bodyPr>
-          <a:lstStyle/>
-          <a:p>
-            <a:pPr algn="ctr"/>
-            <a:r>
-              <a:rPr lang="it-IT" sz="2000" b="1" dirty="0" err="1">
-                <a:solidFill>
-                  <a:srgbClr val="FFC000"/>
-                </a:solidFill>
-              </a:rPr>
-              <a:t>crystal</a:t>
-            </a:r>
-            <a:endParaRPr lang="it-IT" sz="2000" b="1" dirty="0">
-              <a:solidFill>
-                <a:srgbClr val="FFC000"/>
-              </a:solidFill>
-            </a:endParaRPr>
-          </a:p>
-        </p:txBody>
-      </p:sp>
-      <p:sp>
-        <p:nvSpPr>
-          <p:cNvPr id="25" name="CasellaDiTesto 24">
-            <a:extLst>
-              <a:ext uri="{FF2B5EF4-FFF2-40B4-BE49-F238E27FC236}">
-                <a16:creationId xmlns:a16="http://schemas.microsoft.com/office/drawing/2014/main" id="{DC516CBA-691F-320E-81BE-67B07E92F0CB}"/>
-              </a:ext>
-            </a:extLst>
-          </p:cNvPr>
-          <p:cNvSpPr txBox="1"/>
-          <p:nvPr/>
-        </p:nvSpPr>
-        <p:spPr>
-          <a:xfrm>
-            <a:off x="10402009" y="4315824"/>
-            <a:ext cx="679450" cy="369332"/>
-          </a:xfrm>
-          <a:prstGeom prst="rect">
-            <a:avLst/>
-          </a:prstGeom>
-          <a:noFill/>
-        </p:spPr>
-        <p:txBody>
-          <a:bodyPr wrap="square" rtlCol="0">
-            <a:spAutoFit/>
-          </a:bodyPr>
-          <a:lstStyle/>
-          <a:p>
-            <a:pPr algn="ctr"/>
-            <a:r>
-              <a:rPr lang="it-IT" dirty="0"/>
-              <a:t>[m]</a:t>
-            </a:r>
-          </a:p>
-        </p:txBody>
-      </p:sp>
-      <p:pic>
-        <p:nvPicPr>
-          <p:cNvPr id="8" name="Immagine 7">
-            <a:extLst>
-              <a:ext uri="{FF2B5EF4-FFF2-40B4-BE49-F238E27FC236}">
-                <a16:creationId xmlns:a16="http://schemas.microsoft.com/office/drawing/2014/main" id="{8C19DACC-8BF8-944F-AFBE-0BF9ECAB5793}"/>
-              </a:ext>
-            </a:extLst>
-          </p:cNvPr>
-          <p:cNvPicPr>
-            <a:picLocks noChangeAspect="1"/>
-          </p:cNvPicPr>
-          <p:nvPr/>
-        </p:nvPicPr>
-        <p:blipFill>
-          <a:blip r:embed="rId3">
-            <a:extLst>
-              <a:ext uri="{28A0092B-C50C-407E-A947-70E740481C1C}">
-                <a14:useLocalDpi xmlns:a14="http://schemas.microsoft.com/office/drawing/2010/main" val="0"/>
-              </a:ext>
-            </a:extLst>
-          </a:blip>
-          <a:stretch>
-            <a:fillRect/>
-          </a:stretch>
-        </p:blipFill>
-        <p:spPr>
-          <a:xfrm>
-            <a:off x="8945151" y="151052"/>
-            <a:ext cx="3098753" cy="1585607"/>
-          </a:xfrm>
-          <a:prstGeom prst="roundRect">
-            <a:avLst>
-              <a:gd name="adj" fmla="val 16667"/>
-            </a:avLst>
-          </a:prstGeom>
-          <a:ln w="38100">
-            <a:solidFill>
-              <a:srgbClr val="FFC000"/>
-            </a:solidFill>
-          </a:ln>
-          <a:effectLst/>
-        </p:spPr>
-      </p:pic>
-      <p:sp>
-        <p:nvSpPr>
-          <p:cNvPr id="11" name="Arco 10">
-            <a:extLst>
-              <a:ext uri="{FF2B5EF4-FFF2-40B4-BE49-F238E27FC236}">
-                <a16:creationId xmlns:a16="http://schemas.microsoft.com/office/drawing/2014/main" id="{10E620A4-10A1-BF2A-CF11-1DF7063FF5AD}"/>
-              </a:ext>
-            </a:extLst>
-          </p:cNvPr>
-          <p:cNvSpPr/>
-          <p:nvPr/>
-        </p:nvSpPr>
-        <p:spPr>
-          <a:xfrm rot="5881670">
-            <a:off x="1003504" y="-5711251"/>
-            <a:ext cx="6975242" cy="13219817"/>
-          </a:xfrm>
-          <a:prstGeom prst="arc">
-            <a:avLst>
-              <a:gd name="adj1" fmla="val 16162446"/>
-              <a:gd name="adj2" fmla="val 19464192"/>
-            </a:avLst>
-          </a:prstGeom>
-          <a:ln w="38100">
-            <a:solidFill>
-              <a:srgbClr val="FFC000"/>
-            </a:solidFill>
-            <a:headEnd type="none" w="med" len="med"/>
-            <a:tailEnd type="arrow" w="med" len="med"/>
-          </a:ln>
-        </p:spPr>
-        <p:style>
-          <a:lnRef idx="2">
-            <a:schemeClr val="accent1"/>
-          </a:lnRef>
-          <a:fillRef idx="0">
-            <a:schemeClr val="accent1"/>
-          </a:fillRef>
-          <a:effectRef idx="1">
-            <a:schemeClr val="accent1"/>
-          </a:effectRef>
-          <a:fontRef idx="minor">
-            <a:schemeClr val="tx1"/>
-          </a:fontRef>
-        </p:style>
-        <p:txBody>
-          <a:bodyPr rtlCol="0" anchor="ctr"/>
-          <a:lstStyle/>
-          <a:p>
-            <a:pPr algn="ctr"/>
-            <a:endParaRPr lang="it-IT"/>
-          </a:p>
-        </p:txBody>
-      </p:sp>
-    </p:spTree>
-    <p:extLst>
-      <p:ext uri="{BB962C8B-B14F-4D97-AF65-F5344CB8AC3E}">
-        <p14:creationId xmlns:p14="http://schemas.microsoft.com/office/powerpoint/2010/main" val="1879365236"/>
-      </p:ext>
-    </p:extLst>
-  </p:cSld>
-  <p:clrMapOvr>
-    <a:masterClrMapping/>
-  </p:clrMapOvr>
-</p:sld>
-</file>
-
-<file path=ppt/slides/slide2.xml><?xml version="1.0" encoding="utf-8"?>
-<p:sld xmlns:a="http://schemas.openxmlformats.org/drawingml/2006/main" xmlns:r="http://schemas.openxmlformats.org/officeDocument/2006/relationships" xmlns:p="http://schemas.openxmlformats.org/presentationml/2006/main">
-  <p:cSld>
-    <p:spTree>
-      <p:nvGrpSpPr>
-        <p:cNvPr id="1" name="">
-          <a:extLst>
-            <a:ext uri="{FF2B5EF4-FFF2-40B4-BE49-F238E27FC236}">
               <a16:creationId xmlns:a16="http://schemas.microsoft.com/office/drawing/2014/main" id="{E91418D0-178A-C93A-FF92-79CB238846E6}"/>
             </a:ext>
           </a:extLst>
@@ -4163,7 +3506,7 @@
                   <a:srgbClr val="002060"/>
                 </a:solidFill>
               </a:rPr>
-              <a:t>2</a:t>
+              <a:t>1</a:t>
             </a:fld>
             <a:endParaRPr lang="it-IT" sz="1500" b="1" dirty="0">
               <a:solidFill>
@@ -4571,6 +3914,668 @@
     <p:extLst>
       <p:ext uri="{BB962C8B-B14F-4D97-AF65-F5344CB8AC3E}">
         <p14:creationId xmlns:p14="http://schemas.microsoft.com/office/powerpoint/2010/main" val="382366125"/>
+      </p:ext>
+    </p:extLst>
+  </p:cSld>
+  <p:clrMapOvr>
+    <a:masterClrMapping/>
+  </p:clrMapOvr>
+</p:sld>
+</file>
+
+<file path=ppt/slides/slide2.xml><?xml version="1.0" encoding="utf-8"?>
+<p:sld xmlns:a="http://schemas.openxmlformats.org/drawingml/2006/main" xmlns:r="http://schemas.openxmlformats.org/officeDocument/2006/relationships" xmlns:p="http://schemas.openxmlformats.org/presentationml/2006/main">
+  <p:cSld>
+    <p:spTree>
+      <p:nvGrpSpPr>
+        <p:cNvPr id="1" name="">
+          <a:extLst>
+            <a:ext uri="{FF2B5EF4-FFF2-40B4-BE49-F238E27FC236}">
+              <a16:creationId xmlns:a16="http://schemas.microsoft.com/office/drawing/2014/main" id="{29C1A478-2C97-10B4-34B5-10A734949A4E}"/>
+            </a:ext>
+          </a:extLst>
+        </p:cNvPr>
+        <p:cNvGrpSpPr/>
+        <p:nvPr/>
+      </p:nvGrpSpPr>
+      <p:grpSpPr>
+        <a:xfrm>
+          <a:off x="0" y="0"/>
+          <a:ext cx="0" cy="0"/>
+          <a:chOff x="0" y="0"/>
+          <a:chExt cx="0" cy="0"/>
+        </a:xfrm>
+      </p:grpSpPr>
+      <p:sp>
+        <p:nvSpPr>
+          <p:cNvPr id="2" name="Titolo 1">
+            <a:extLst>
+              <a:ext uri="{FF2B5EF4-FFF2-40B4-BE49-F238E27FC236}">
+                <a16:creationId xmlns:a16="http://schemas.microsoft.com/office/drawing/2014/main" id="{A0AC2323-4074-7D2D-42E4-448B5D17288B}"/>
+              </a:ext>
+            </a:extLst>
+          </p:cNvPr>
+          <p:cNvSpPr>
+            <a:spLocks noGrp="1"/>
+          </p:cNvSpPr>
+          <p:nvPr>
+            <p:ph type="title"/>
+          </p:nvPr>
+        </p:nvSpPr>
+        <p:spPr>
+          <a:xfrm>
+            <a:off x="38100" y="69651"/>
+            <a:ext cx="12114000" cy="1153094"/>
+          </a:xfrm>
+          <a:prstGeom prst="roundRect">
+            <a:avLst>
+              <a:gd name="adj" fmla="val 36459"/>
+            </a:avLst>
+          </a:prstGeom>
+          <a:noFill/>
+        </p:spPr>
+        <p:txBody>
+          <a:bodyPr>
+            <a:normAutofit/>
+          </a:bodyPr>
+          <a:lstStyle/>
+          <a:p>
+            <a:r>
+              <a:rPr lang="it-IT" b="1" dirty="0">
+                <a:solidFill>
+                  <a:srgbClr val="002060"/>
+                </a:solidFill>
+              </a:rPr>
+              <a:t>	1. SCHEMATIC LAYOUT</a:t>
+            </a:r>
+          </a:p>
+        </p:txBody>
+      </p:sp>
+      <p:sp>
+        <p:nvSpPr>
+          <p:cNvPr id="4" name="Segnaposto data 3">
+            <a:extLst>
+              <a:ext uri="{FF2B5EF4-FFF2-40B4-BE49-F238E27FC236}">
+                <a16:creationId xmlns:a16="http://schemas.microsoft.com/office/drawing/2014/main" id="{C8305303-D450-DE41-FD4D-E965DB4B9962}"/>
+              </a:ext>
+            </a:extLst>
+          </p:cNvPr>
+          <p:cNvSpPr>
+            <a:spLocks noGrp="1"/>
+          </p:cNvSpPr>
+          <p:nvPr>
+            <p:ph type="dt" sz="half" idx="10"/>
+          </p:nvPr>
+        </p:nvSpPr>
+        <p:spPr>
+          <a:xfrm>
+            <a:off x="838200" y="6356349"/>
+            <a:ext cx="2743200" cy="432000"/>
+          </a:xfrm>
+        </p:spPr>
+        <p:txBody>
+          <a:bodyPr/>
+          <a:lstStyle/>
+          <a:p>
+            <a:r>
+              <a:rPr lang="it-IT" sz="1500" b="1" dirty="0">
+                <a:solidFill>
+                  <a:srgbClr val="002060"/>
+                </a:solidFill>
+              </a:rPr>
+              <a:t>August 2026</a:t>
+            </a:r>
+          </a:p>
+        </p:txBody>
+      </p:sp>
+      <p:sp>
+        <p:nvSpPr>
+          <p:cNvPr id="5" name="Segnaposto piè di pagina 4">
+            <a:extLst>
+              <a:ext uri="{FF2B5EF4-FFF2-40B4-BE49-F238E27FC236}">
+                <a16:creationId xmlns:a16="http://schemas.microsoft.com/office/drawing/2014/main" id="{B932D726-6862-785A-B00C-19309D53BB9C}"/>
+              </a:ext>
+            </a:extLst>
+          </p:cNvPr>
+          <p:cNvSpPr>
+            <a:spLocks noGrp="1"/>
+          </p:cNvSpPr>
+          <p:nvPr>
+            <p:ph type="ftr" sz="quarter" idx="11"/>
+          </p:nvPr>
+        </p:nvSpPr>
+        <p:spPr>
+          <a:xfrm>
+            <a:off x="0" y="6356349"/>
+            <a:ext cx="12192000" cy="432000"/>
+          </a:xfrm>
+        </p:spPr>
+        <p:txBody>
+          <a:bodyPr/>
+          <a:lstStyle/>
+          <a:p>
+            <a:r>
+              <a:rPr lang="it-IT" sz="1500" b="1" dirty="0">
+                <a:solidFill>
+                  <a:srgbClr val="002060"/>
+                </a:solidFill>
+              </a:rPr>
+              <a:t>Anna Sofia Moro</a:t>
+            </a:r>
+          </a:p>
+        </p:txBody>
+      </p:sp>
+      <p:sp>
+        <p:nvSpPr>
+          <p:cNvPr id="6" name="Segnaposto numero diapositiva 5">
+            <a:extLst>
+              <a:ext uri="{FF2B5EF4-FFF2-40B4-BE49-F238E27FC236}">
+                <a16:creationId xmlns:a16="http://schemas.microsoft.com/office/drawing/2014/main" id="{1318A926-43E2-8B1A-948C-DD69E1680453}"/>
+              </a:ext>
+            </a:extLst>
+          </p:cNvPr>
+          <p:cNvSpPr>
+            <a:spLocks noGrp="1"/>
+          </p:cNvSpPr>
+          <p:nvPr>
+            <p:ph type="sldNum" sz="quarter" idx="12"/>
+          </p:nvPr>
+        </p:nvSpPr>
+        <p:spPr>
+          <a:xfrm>
+            <a:off x="8610600" y="6356349"/>
+            <a:ext cx="2743200" cy="432000"/>
+          </a:xfrm>
+        </p:spPr>
+        <p:txBody>
+          <a:bodyPr/>
+          <a:lstStyle/>
+          <a:p>
+            <a:fld id="{0A318BD9-CA14-4A83-ACF0-03D5918EB402}" type="slidenum">
+              <a:rPr lang="it-IT" sz="1500" b="1" smtClean="0">
+                <a:solidFill>
+                  <a:srgbClr val="002060"/>
+                </a:solidFill>
+              </a:rPr>
+              <a:t>2</a:t>
+            </a:fld>
+            <a:endParaRPr lang="it-IT" sz="1500" b="1" dirty="0">
+              <a:solidFill>
+                <a:srgbClr val="002060"/>
+              </a:solidFill>
+            </a:endParaRPr>
+          </a:p>
+        </p:txBody>
+      </p:sp>
+      <p:cxnSp>
+        <p:nvCxnSpPr>
+          <p:cNvPr id="10" name="Connettore diritto 9">
+            <a:extLst>
+              <a:ext uri="{FF2B5EF4-FFF2-40B4-BE49-F238E27FC236}">
+                <a16:creationId xmlns:a16="http://schemas.microsoft.com/office/drawing/2014/main" id="{2EB45A51-E901-915B-0293-EC5A0957C2FE}"/>
+              </a:ext>
+            </a:extLst>
+          </p:cNvPr>
+          <p:cNvCxnSpPr>
+            <a:cxnSpLocks/>
+          </p:cNvCxnSpPr>
+          <p:nvPr/>
+        </p:nvCxnSpPr>
+        <p:spPr>
+          <a:xfrm>
+            <a:off x="696000" y="1155368"/>
+            <a:ext cx="10800000" cy="0"/>
+          </a:xfrm>
+          <a:prstGeom prst="line">
+            <a:avLst/>
+          </a:prstGeom>
+          <a:ln w="38100">
+            <a:solidFill>
+              <a:srgbClr val="002060"/>
+            </a:solidFill>
+          </a:ln>
+        </p:spPr>
+        <p:style>
+          <a:lnRef idx="2">
+            <a:schemeClr val="accent1"/>
+          </a:lnRef>
+          <a:fillRef idx="0">
+            <a:schemeClr val="accent1"/>
+          </a:fillRef>
+          <a:effectRef idx="1">
+            <a:schemeClr val="accent1"/>
+          </a:effectRef>
+          <a:fontRef idx="minor">
+            <a:schemeClr val="tx1"/>
+          </a:fontRef>
+        </p:style>
+      </p:cxnSp>
+      <p:sp>
+        <p:nvSpPr>
+          <p:cNvPr id="13" name="CasellaDiTesto 12">
+            <a:extLst>
+              <a:ext uri="{FF2B5EF4-FFF2-40B4-BE49-F238E27FC236}">
+                <a16:creationId xmlns:a16="http://schemas.microsoft.com/office/drawing/2014/main" id="{523A421A-CF34-DE89-C38E-406198ECC43D}"/>
+              </a:ext>
+            </a:extLst>
+          </p:cNvPr>
+          <p:cNvSpPr txBox="1"/>
+          <p:nvPr/>
+        </p:nvSpPr>
+        <p:spPr>
+          <a:xfrm>
+            <a:off x="3048886" y="3244334"/>
+            <a:ext cx="6097772" cy="369332"/>
+          </a:xfrm>
+          <a:prstGeom prst="rect">
+            <a:avLst/>
+          </a:prstGeom>
+          <a:noFill/>
+        </p:spPr>
+        <p:txBody>
+          <a:bodyPr wrap="square">
+            <a:spAutoFit/>
+          </a:bodyPr>
+          <a:lstStyle/>
+          <a:p>
+            <a:endParaRPr lang="it-IT" dirty="0"/>
+          </a:p>
+        </p:txBody>
+      </p:sp>
+      <p:sp>
+        <p:nvSpPr>
+          <p:cNvPr id="15" name="CasellaDiTesto 14">
+            <a:extLst>
+              <a:ext uri="{FF2B5EF4-FFF2-40B4-BE49-F238E27FC236}">
+                <a16:creationId xmlns:a16="http://schemas.microsoft.com/office/drawing/2014/main" id="{5A3A2D6F-A325-D7E7-DEFD-6EE799EFE079}"/>
+              </a:ext>
+            </a:extLst>
+          </p:cNvPr>
+          <p:cNvSpPr txBox="1"/>
+          <p:nvPr/>
+        </p:nvSpPr>
+        <p:spPr>
+          <a:xfrm>
+            <a:off x="3048886" y="3244334"/>
+            <a:ext cx="6097772" cy="369332"/>
+          </a:xfrm>
+          <a:prstGeom prst="rect">
+            <a:avLst/>
+          </a:prstGeom>
+          <a:noFill/>
+        </p:spPr>
+        <p:txBody>
+          <a:bodyPr wrap="square">
+            <a:spAutoFit/>
+          </a:bodyPr>
+          <a:lstStyle/>
+          <a:p>
+            <a:endParaRPr lang="it-IT" dirty="0"/>
+          </a:p>
+        </p:txBody>
+      </p:sp>
+      <p:pic>
+        <p:nvPicPr>
+          <p:cNvPr id="7" name="Immagine 6">
+            <a:extLst>
+              <a:ext uri="{FF2B5EF4-FFF2-40B4-BE49-F238E27FC236}">
+                <a16:creationId xmlns:a16="http://schemas.microsoft.com/office/drawing/2014/main" id="{3F38F614-6004-D72E-11CB-6711FB5ABE56}"/>
+              </a:ext>
+            </a:extLst>
+          </p:cNvPr>
+          <p:cNvPicPr>
+            <a:picLocks noChangeAspect="1"/>
+          </p:cNvPicPr>
+          <p:nvPr/>
+        </p:nvPicPr>
+        <p:blipFill>
+          <a:blip r:embed="rId2">
+            <a:extLst>
+              <a:ext uri="{28A0092B-C50C-407E-A947-70E740481C1C}">
+                <a14:useLocalDpi xmlns:a14="http://schemas.microsoft.com/office/drawing/2010/main" val="0"/>
+              </a:ext>
+            </a:extLst>
+          </a:blip>
+          <a:srcRect/>
+          <a:stretch/>
+        </p:blipFill>
+        <p:spPr>
+          <a:xfrm>
+            <a:off x="1899247" y="1546325"/>
+            <a:ext cx="8757821" cy="4165439"/>
+          </a:xfrm>
+          <a:prstGeom prst="rect">
+            <a:avLst/>
+          </a:prstGeom>
+        </p:spPr>
+      </p:pic>
+      <p:sp>
+        <p:nvSpPr>
+          <p:cNvPr id="14" name="CasellaDiTesto 13">
+            <a:extLst>
+              <a:ext uri="{FF2B5EF4-FFF2-40B4-BE49-F238E27FC236}">
+                <a16:creationId xmlns:a16="http://schemas.microsoft.com/office/drawing/2014/main" id="{8761CFF4-1AA7-7DBA-C7AD-C4C417735B36}"/>
+              </a:ext>
+            </a:extLst>
+          </p:cNvPr>
+          <p:cNvSpPr txBox="1"/>
+          <p:nvPr/>
+        </p:nvSpPr>
+        <p:spPr>
+          <a:xfrm>
+            <a:off x="2819400" y="1671629"/>
+            <a:ext cx="679450" cy="400110"/>
+          </a:xfrm>
+          <a:prstGeom prst="rect">
+            <a:avLst/>
+          </a:prstGeom>
+          <a:noFill/>
+        </p:spPr>
+        <p:txBody>
+          <a:bodyPr wrap="square" rtlCol="0">
+            <a:spAutoFit/>
+          </a:bodyPr>
+          <a:lstStyle/>
+          <a:p>
+            <a:pPr algn="ctr"/>
+            <a:r>
+              <a:rPr lang="it-IT" sz="2000" b="1" dirty="0"/>
+              <a:t>T1</a:t>
+            </a:r>
+          </a:p>
+        </p:txBody>
+      </p:sp>
+      <p:sp>
+        <p:nvSpPr>
+          <p:cNvPr id="17" name="CasellaDiTesto 16">
+            <a:extLst>
+              <a:ext uri="{FF2B5EF4-FFF2-40B4-BE49-F238E27FC236}">
+                <a16:creationId xmlns:a16="http://schemas.microsoft.com/office/drawing/2014/main" id="{D3769F19-49FA-6A86-4E43-EE9B9FCF5335}"/>
+              </a:ext>
+            </a:extLst>
+          </p:cNvPr>
+          <p:cNvSpPr txBox="1"/>
+          <p:nvPr/>
+        </p:nvSpPr>
+        <p:spPr>
+          <a:xfrm>
+            <a:off x="3498850" y="1671629"/>
+            <a:ext cx="679450" cy="400110"/>
+          </a:xfrm>
+          <a:prstGeom prst="rect">
+            <a:avLst/>
+          </a:prstGeom>
+          <a:noFill/>
+        </p:spPr>
+        <p:txBody>
+          <a:bodyPr wrap="square" rtlCol="0">
+            <a:spAutoFit/>
+          </a:bodyPr>
+          <a:lstStyle/>
+          <a:p>
+            <a:pPr algn="ctr"/>
+            <a:r>
+              <a:rPr lang="it-IT" sz="2000" b="1" dirty="0"/>
+              <a:t>T2</a:t>
+            </a:r>
+          </a:p>
+        </p:txBody>
+      </p:sp>
+      <p:sp>
+        <p:nvSpPr>
+          <p:cNvPr id="19" name="CasellaDiTesto 18">
+            <a:extLst>
+              <a:ext uri="{FF2B5EF4-FFF2-40B4-BE49-F238E27FC236}">
+                <a16:creationId xmlns:a16="http://schemas.microsoft.com/office/drawing/2014/main" id="{E6613190-54C0-7766-BE53-A88A0928D029}"/>
+              </a:ext>
+            </a:extLst>
+          </p:cNvPr>
+          <p:cNvSpPr txBox="1"/>
+          <p:nvPr/>
+        </p:nvSpPr>
+        <p:spPr>
+          <a:xfrm>
+            <a:off x="6146800" y="1671629"/>
+            <a:ext cx="679450" cy="400110"/>
+          </a:xfrm>
+          <a:prstGeom prst="rect">
+            <a:avLst/>
+          </a:prstGeom>
+          <a:noFill/>
+        </p:spPr>
+        <p:txBody>
+          <a:bodyPr wrap="square" rtlCol="0">
+            <a:spAutoFit/>
+          </a:bodyPr>
+          <a:lstStyle/>
+          <a:p>
+            <a:pPr algn="ctr"/>
+            <a:r>
+              <a:rPr lang="it-IT" sz="2000" b="1" dirty="0"/>
+              <a:t>T3</a:t>
+            </a:r>
+          </a:p>
+        </p:txBody>
+      </p:sp>
+      <p:sp>
+        <p:nvSpPr>
+          <p:cNvPr id="21" name="CasellaDiTesto 20">
+            <a:extLst>
+              <a:ext uri="{FF2B5EF4-FFF2-40B4-BE49-F238E27FC236}">
+                <a16:creationId xmlns:a16="http://schemas.microsoft.com/office/drawing/2014/main" id="{91ABB6A2-0253-F61C-3A3B-B5D48ED67530}"/>
+              </a:ext>
+            </a:extLst>
+          </p:cNvPr>
+          <p:cNvSpPr txBox="1"/>
+          <p:nvPr/>
+        </p:nvSpPr>
+        <p:spPr>
+          <a:xfrm>
+            <a:off x="8455025" y="1671629"/>
+            <a:ext cx="679450" cy="400110"/>
+          </a:xfrm>
+          <a:prstGeom prst="rect">
+            <a:avLst/>
+          </a:prstGeom>
+          <a:noFill/>
+        </p:spPr>
+        <p:txBody>
+          <a:bodyPr wrap="square" rtlCol="0">
+            <a:spAutoFit/>
+          </a:bodyPr>
+          <a:lstStyle/>
+          <a:p>
+            <a:pPr algn="ctr"/>
+            <a:r>
+              <a:rPr lang="it-IT" sz="2000" b="1" dirty="0"/>
+              <a:t>C4</a:t>
+            </a:r>
+          </a:p>
+        </p:txBody>
+      </p:sp>
+      <p:sp>
+        <p:nvSpPr>
+          <p:cNvPr id="23" name="CasellaDiTesto 22">
+            <a:extLst>
+              <a:ext uri="{FF2B5EF4-FFF2-40B4-BE49-F238E27FC236}">
+                <a16:creationId xmlns:a16="http://schemas.microsoft.com/office/drawing/2014/main" id="{5EF31BC2-B06C-C19F-8B82-234E7051B99F}"/>
+              </a:ext>
+            </a:extLst>
+          </p:cNvPr>
+          <p:cNvSpPr txBox="1"/>
+          <p:nvPr/>
+        </p:nvSpPr>
+        <p:spPr>
+          <a:xfrm>
+            <a:off x="4914900" y="4911565"/>
+            <a:ext cx="1047750" cy="400110"/>
+          </a:xfrm>
+          <a:prstGeom prst="rect">
+            <a:avLst/>
+          </a:prstGeom>
+          <a:noFill/>
+        </p:spPr>
+        <p:txBody>
+          <a:bodyPr wrap="square" rtlCol="0">
+            <a:spAutoFit/>
+          </a:bodyPr>
+          <a:lstStyle/>
+          <a:p>
+            <a:pPr algn="ctr"/>
+            <a:r>
+              <a:rPr lang="it-IT" sz="2000" b="1" dirty="0" err="1">
+                <a:solidFill>
+                  <a:srgbClr val="FFC000"/>
+                </a:solidFill>
+              </a:rPr>
+              <a:t>crystal</a:t>
+            </a:r>
+            <a:endParaRPr lang="it-IT" sz="2000" b="1" dirty="0">
+              <a:solidFill>
+                <a:srgbClr val="FFC000"/>
+              </a:solidFill>
+            </a:endParaRPr>
+          </a:p>
+        </p:txBody>
+      </p:sp>
+      <p:sp>
+        <p:nvSpPr>
+          <p:cNvPr id="25" name="CasellaDiTesto 24">
+            <a:extLst>
+              <a:ext uri="{FF2B5EF4-FFF2-40B4-BE49-F238E27FC236}">
+                <a16:creationId xmlns:a16="http://schemas.microsoft.com/office/drawing/2014/main" id="{DC516CBA-691F-320E-81BE-67B07E92F0CB}"/>
+              </a:ext>
+            </a:extLst>
+          </p:cNvPr>
+          <p:cNvSpPr txBox="1"/>
+          <p:nvPr/>
+        </p:nvSpPr>
+        <p:spPr>
+          <a:xfrm>
+            <a:off x="10402009" y="4315824"/>
+            <a:ext cx="679450" cy="369332"/>
+          </a:xfrm>
+          <a:prstGeom prst="rect">
+            <a:avLst/>
+          </a:prstGeom>
+          <a:noFill/>
+        </p:spPr>
+        <p:txBody>
+          <a:bodyPr wrap="square" rtlCol="0">
+            <a:spAutoFit/>
+          </a:bodyPr>
+          <a:lstStyle/>
+          <a:p>
+            <a:pPr algn="ctr"/>
+            <a:r>
+              <a:rPr lang="it-IT" dirty="0"/>
+              <a:t>[m]</a:t>
+            </a:r>
+          </a:p>
+        </p:txBody>
+      </p:sp>
+      <p:pic>
+        <p:nvPicPr>
+          <p:cNvPr id="8" name="Immagine 7">
+            <a:extLst>
+              <a:ext uri="{FF2B5EF4-FFF2-40B4-BE49-F238E27FC236}">
+                <a16:creationId xmlns:a16="http://schemas.microsoft.com/office/drawing/2014/main" id="{8C19DACC-8BF8-944F-AFBE-0BF9ECAB5793}"/>
+              </a:ext>
+            </a:extLst>
+          </p:cNvPr>
+          <p:cNvPicPr>
+            <a:picLocks noChangeAspect="1"/>
+          </p:cNvPicPr>
+          <p:nvPr/>
+        </p:nvPicPr>
+        <p:blipFill>
+          <a:blip r:embed="rId3">
+            <a:extLst>
+              <a:ext uri="{28A0092B-C50C-407E-A947-70E740481C1C}">
+                <a14:useLocalDpi xmlns:a14="http://schemas.microsoft.com/office/drawing/2010/main" val="0"/>
+              </a:ext>
+            </a:extLst>
+          </a:blip>
+          <a:stretch>
+            <a:fillRect/>
+          </a:stretch>
+        </p:blipFill>
+        <p:spPr>
+          <a:xfrm>
+            <a:off x="8945151" y="151052"/>
+            <a:ext cx="3098753" cy="1585607"/>
+          </a:xfrm>
+          <a:prstGeom prst="roundRect">
+            <a:avLst>
+              <a:gd name="adj" fmla="val 16667"/>
+            </a:avLst>
+          </a:prstGeom>
+          <a:ln w="38100">
+            <a:solidFill>
+              <a:srgbClr val="FFC000"/>
+            </a:solidFill>
+          </a:ln>
+          <a:effectLst/>
+        </p:spPr>
+      </p:pic>
+      <p:sp>
+        <p:nvSpPr>
+          <p:cNvPr id="11" name="Arco 10">
+            <a:extLst>
+              <a:ext uri="{FF2B5EF4-FFF2-40B4-BE49-F238E27FC236}">
+                <a16:creationId xmlns:a16="http://schemas.microsoft.com/office/drawing/2014/main" id="{10E620A4-10A1-BF2A-CF11-1DF7063FF5AD}"/>
+              </a:ext>
+            </a:extLst>
+          </p:cNvPr>
+          <p:cNvSpPr/>
+          <p:nvPr/>
+        </p:nvSpPr>
+        <p:spPr>
+          <a:xfrm rot="5881670">
+            <a:off x="1003504" y="-5711251"/>
+            <a:ext cx="6975242" cy="13219817"/>
+          </a:xfrm>
+          <a:prstGeom prst="arc">
+            <a:avLst>
+              <a:gd name="adj1" fmla="val 16162446"/>
+              <a:gd name="adj2" fmla="val 19464192"/>
+            </a:avLst>
+          </a:prstGeom>
+          <a:ln w="38100">
+            <a:solidFill>
+              <a:srgbClr val="FFC000"/>
+            </a:solidFill>
+            <a:headEnd type="none" w="med" len="med"/>
+            <a:tailEnd type="arrow" w="med" len="med"/>
+          </a:ln>
+        </p:spPr>
+        <p:style>
+          <a:lnRef idx="2">
+            <a:schemeClr val="accent1"/>
+          </a:lnRef>
+          <a:fillRef idx="0">
+            <a:schemeClr val="accent1"/>
+          </a:fillRef>
+          <a:effectRef idx="1">
+            <a:schemeClr val="accent1"/>
+          </a:effectRef>
+          <a:fontRef idx="minor">
+            <a:schemeClr val="tx1"/>
+          </a:fontRef>
+        </p:style>
+        <p:txBody>
+          <a:bodyPr rtlCol="0" anchor="ctr"/>
+          <a:lstStyle/>
+          <a:p>
+            <a:pPr algn="ctr"/>
+            <a:endParaRPr lang="it-IT"/>
+          </a:p>
+        </p:txBody>
+      </p:sp>
+    </p:spTree>
+    <p:extLst>
+      <p:ext uri="{BB962C8B-B14F-4D97-AF65-F5344CB8AC3E}">
+        <p14:creationId xmlns:p14="http://schemas.microsoft.com/office/powerpoint/2010/main" val="1879365236"/>
       </p:ext>
     </p:extLst>
   </p:cSld>

--- a/slides/layout.pptx
+++ b/slides/layout.pptx
@@ -4,10 +4,16 @@
   <p:sldMasterIdLst>
     <p:sldMasterId id="2147483648" r:id="rId1"/>
   </p:sldMasterIdLst>
+  <p:notesMasterIdLst>
+    <p:notesMasterId r:id="rId8"/>
+  </p:notesMasterIdLst>
   <p:sldIdLst>
     <p:sldId id="320" r:id="rId2"/>
-    <p:sldId id="319" r:id="rId3"/>
-    <p:sldId id="321" r:id="rId4"/>
+    <p:sldId id="335" r:id="rId3"/>
+    <p:sldId id="319" r:id="rId4"/>
+    <p:sldId id="331" r:id="rId5"/>
+    <p:sldId id="332" r:id="rId6"/>
+    <p:sldId id="333" r:id="rId7"/>
   </p:sldIdLst>
   <p:sldSz cx="12192000" cy="6858000"/>
   <p:notesSz cx="6858000" cy="9144000"/>
@@ -112,6 +118,680 @@
     </p:ext>
   </p:extLst>
 </p:presentation>
+</file>
+
+<file path=ppt/notesMasters/notesMaster1.xml><?xml version="1.0" encoding="utf-8"?>
+<p:notesMaster xmlns:a="http://schemas.openxmlformats.org/drawingml/2006/main" xmlns:r="http://schemas.openxmlformats.org/officeDocument/2006/relationships" xmlns:p="http://schemas.openxmlformats.org/presentationml/2006/main">
+  <p:cSld>
+    <p:bg>
+      <p:bgRef idx="1001">
+        <a:schemeClr val="bg1"/>
+      </p:bgRef>
+    </p:bg>
+    <p:spTree>
+      <p:nvGrpSpPr>
+        <p:cNvPr id="1" name=""/>
+        <p:cNvGrpSpPr/>
+        <p:nvPr/>
+      </p:nvGrpSpPr>
+      <p:grpSpPr>
+        <a:xfrm>
+          <a:off x="0" y="0"/>
+          <a:ext cx="0" cy="0"/>
+          <a:chOff x="0" y="0"/>
+          <a:chExt cx="0" cy="0"/>
+        </a:xfrm>
+      </p:grpSpPr>
+      <p:sp>
+        <p:nvSpPr>
+          <p:cNvPr id="2" name="Header Placeholder 1"/>
+          <p:cNvSpPr>
+            <a:spLocks noGrp="1"/>
+          </p:cNvSpPr>
+          <p:nvPr>
+            <p:ph type="hdr" sz="quarter"/>
+          </p:nvPr>
+        </p:nvSpPr>
+        <p:spPr>
+          <a:xfrm>
+            <a:off x="0" y="0"/>
+            <a:ext cx="2971800" cy="458788"/>
+          </a:xfrm>
+          <a:prstGeom prst="rect">
+            <a:avLst/>
+          </a:prstGeom>
+        </p:spPr>
+        <p:txBody>
+          <a:bodyPr vert="horz" lIns="91440" tIns="45720" rIns="91440" bIns="45720" rtlCol="0"/>
+          <a:lstStyle>
+            <a:lvl1pPr algn="l">
+              <a:defRPr sz="1200"/>
+            </a:lvl1pPr>
+          </a:lstStyle>
+          <a:p>
+            <a:endParaRPr lang="it-IT"/>
+          </a:p>
+        </p:txBody>
+      </p:sp>
+      <p:sp>
+        <p:nvSpPr>
+          <p:cNvPr id="3" name="Date Placeholder 2"/>
+          <p:cNvSpPr>
+            <a:spLocks noGrp="1"/>
+          </p:cNvSpPr>
+          <p:nvPr>
+            <p:ph type="dt" idx="1"/>
+          </p:nvPr>
+        </p:nvSpPr>
+        <p:spPr>
+          <a:xfrm>
+            <a:off x="3884613" y="0"/>
+            <a:ext cx="2971800" cy="458788"/>
+          </a:xfrm>
+          <a:prstGeom prst="rect">
+            <a:avLst/>
+          </a:prstGeom>
+        </p:spPr>
+        <p:txBody>
+          <a:bodyPr vert="horz" lIns="91440" tIns="45720" rIns="91440" bIns="45720" rtlCol="0"/>
+          <a:lstStyle>
+            <a:lvl1pPr algn="r">
+              <a:defRPr sz="1200"/>
+            </a:lvl1pPr>
+          </a:lstStyle>
+          <a:p>
+            <a:fld id="{7EA1DC66-512F-4560-8FAD-7D75B50290D4}" type="datetimeFigureOut">
+              <a:rPr lang="it-IT" smtClean="0"/>
+              <a:t>13/08/2026</a:t>
+            </a:fld>
+            <a:endParaRPr lang="it-IT"/>
+          </a:p>
+        </p:txBody>
+      </p:sp>
+      <p:sp>
+        <p:nvSpPr>
+          <p:cNvPr id="4" name="Slide Image Placeholder 3"/>
+          <p:cNvSpPr>
+            <a:spLocks noGrp="1" noRot="1" noChangeAspect="1"/>
+          </p:cNvSpPr>
+          <p:nvPr>
+            <p:ph type="sldImg" idx="2"/>
+          </p:nvPr>
+        </p:nvSpPr>
+        <p:spPr>
+          <a:xfrm>
+            <a:off x="685800" y="1143000"/>
+            <a:ext cx="5486400" cy="3086100"/>
+          </a:xfrm>
+          <a:prstGeom prst="rect">
+            <a:avLst/>
+          </a:prstGeom>
+          <a:noFill/>
+          <a:ln w="12700">
+            <a:solidFill>
+              <a:prstClr val="black"/>
+            </a:solidFill>
+          </a:ln>
+        </p:spPr>
+        <p:txBody>
+          <a:bodyPr vert="horz" lIns="91440" tIns="45720" rIns="91440" bIns="45720" rtlCol="0" anchor="ctr"/>
+          <a:lstStyle/>
+          <a:p>
+            <a:endParaRPr lang="it-IT"/>
+          </a:p>
+        </p:txBody>
+      </p:sp>
+      <p:sp>
+        <p:nvSpPr>
+          <p:cNvPr id="5" name="Notes Placeholder 4"/>
+          <p:cNvSpPr>
+            <a:spLocks noGrp="1"/>
+          </p:cNvSpPr>
+          <p:nvPr>
+            <p:ph type="body" sz="quarter" idx="3"/>
+          </p:nvPr>
+        </p:nvSpPr>
+        <p:spPr>
+          <a:xfrm>
+            <a:off x="685800" y="4400550"/>
+            <a:ext cx="5486400" cy="3600450"/>
+          </a:xfrm>
+          <a:prstGeom prst="rect">
+            <a:avLst/>
+          </a:prstGeom>
+        </p:spPr>
+        <p:txBody>
+          <a:bodyPr vert="horz" lIns="91440" tIns="45720" rIns="91440" bIns="45720" rtlCol="0"/>
+          <a:lstStyle/>
+          <a:p>
+            <a:pPr lvl="0"/>
+            <a:r>
+              <a:rPr lang="en-US"/>
+              <a:t>Click to edit Master text styles</a:t>
+            </a:r>
+          </a:p>
+          <a:p>
+            <a:pPr lvl="1"/>
+            <a:r>
+              <a:rPr lang="en-US"/>
+              <a:t>Second level</a:t>
+            </a:r>
+          </a:p>
+          <a:p>
+            <a:pPr lvl="2"/>
+            <a:r>
+              <a:rPr lang="en-US"/>
+              <a:t>Third level</a:t>
+            </a:r>
+          </a:p>
+          <a:p>
+            <a:pPr lvl="3"/>
+            <a:r>
+              <a:rPr lang="en-US"/>
+              <a:t>Fourth level</a:t>
+            </a:r>
+          </a:p>
+          <a:p>
+            <a:pPr lvl="4"/>
+            <a:r>
+              <a:rPr lang="en-US"/>
+              <a:t>Fifth level</a:t>
+            </a:r>
+            <a:endParaRPr lang="it-IT"/>
+          </a:p>
+        </p:txBody>
+      </p:sp>
+      <p:sp>
+        <p:nvSpPr>
+          <p:cNvPr id="6" name="Footer Placeholder 5"/>
+          <p:cNvSpPr>
+            <a:spLocks noGrp="1"/>
+          </p:cNvSpPr>
+          <p:nvPr>
+            <p:ph type="ftr" sz="quarter" idx="4"/>
+          </p:nvPr>
+        </p:nvSpPr>
+        <p:spPr>
+          <a:xfrm>
+            <a:off x="0" y="8685213"/>
+            <a:ext cx="2971800" cy="458787"/>
+          </a:xfrm>
+          <a:prstGeom prst="rect">
+            <a:avLst/>
+          </a:prstGeom>
+        </p:spPr>
+        <p:txBody>
+          <a:bodyPr vert="horz" lIns="91440" tIns="45720" rIns="91440" bIns="45720" rtlCol="0" anchor="b"/>
+          <a:lstStyle>
+            <a:lvl1pPr algn="l">
+              <a:defRPr sz="1200"/>
+            </a:lvl1pPr>
+          </a:lstStyle>
+          <a:p>
+            <a:endParaRPr lang="it-IT"/>
+          </a:p>
+        </p:txBody>
+      </p:sp>
+      <p:sp>
+        <p:nvSpPr>
+          <p:cNvPr id="7" name="Slide Number Placeholder 6"/>
+          <p:cNvSpPr>
+            <a:spLocks noGrp="1"/>
+          </p:cNvSpPr>
+          <p:nvPr>
+            <p:ph type="sldNum" sz="quarter" idx="5"/>
+          </p:nvPr>
+        </p:nvSpPr>
+        <p:spPr>
+          <a:xfrm>
+            <a:off x="3884613" y="8685213"/>
+            <a:ext cx="2971800" cy="458787"/>
+          </a:xfrm>
+          <a:prstGeom prst="rect">
+            <a:avLst/>
+          </a:prstGeom>
+        </p:spPr>
+        <p:txBody>
+          <a:bodyPr vert="horz" lIns="91440" tIns="45720" rIns="91440" bIns="45720" rtlCol="0" anchor="b"/>
+          <a:lstStyle>
+            <a:lvl1pPr algn="r">
+              <a:defRPr sz="1200"/>
+            </a:lvl1pPr>
+          </a:lstStyle>
+          <a:p>
+            <a:fld id="{CED4C7ED-4709-4D2D-849C-860F7F274AE9}" type="slidenum">
+              <a:rPr lang="it-IT" smtClean="0"/>
+              <a:t>‹#›</a:t>
+            </a:fld>
+            <a:endParaRPr lang="it-IT"/>
+          </a:p>
+        </p:txBody>
+      </p:sp>
+    </p:spTree>
+    <p:extLst>
+      <p:ext uri="{BB962C8B-B14F-4D97-AF65-F5344CB8AC3E}">
+        <p14:creationId xmlns:p14="http://schemas.microsoft.com/office/powerpoint/2010/main" val="1855458414"/>
+      </p:ext>
+    </p:extLst>
+  </p:cSld>
+  <p:clrMap bg1="lt1" tx1="dk1" bg2="lt2" tx2="dk2" accent1="accent1" accent2="accent2" accent3="accent3" accent4="accent4" accent5="accent5" accent6="accent6" hlink="hlink" folHlink="folHlink"/>
+  <p:notesStyle>
+    <a:lvl1pPr marL="0" algn="l" defTabSz="914400" rtl="0" eaLnBrk="1" latinLnBrk="0" hangingPunct="1">
+      <a:defRPr sz="1200" kern="1200">
+        <a:solidFill>
+          <a:schemeClr val="tx1"/>
+        </a:solidFill>
+        <a:latin typeface="+mn-lt"/>
+        <a:ea typeface="+mn-ea"/>
+        <a:cs typeface="+mn-cs"/>
+      </a:defRPr>
+    </a:lvl1pPr>
+    <a:lvl2pPr marL="457200" algn="l" defTabSz="914400" rtl="0" eaLnBrk="1" latinLnBrk="0" hangingPunct="1">
+      <a:defRPr sz="1200" kern="1200">
+        <a:solidFill>
+          <a:schemeClr val="tx1"/>
+        </a:solidFill>
+        <a:latin typeface="+mn-lt"/>
+        <a:ea typeface="+mn-ea"/>
+        <a:cs typeface="+mn-cs"/>
+      </a:defRPr>
+    </a:lvl2pPr>
+    <a:lvl3pPr marL="914400" algn="l" defTabSz="914400" rtl="0" eaLnBrk="1" latinLnBrk="0" hangingPunct="1">
+      <a:defRPr sz="1200" kern="1200">
+        <a:solidFill>
+          <a:schemeClr val="tx1"/>
+        </a:solidFill>
+        <a:latin typeface="+mn-lt"/>
+        <a:ea typeface="+mn-ea"/>
+        <a:cs typeface="+mn-cs"/>
+      </a:defRPr>
+    </a:lvl3pPr>
+    <a:lvl4pPr marL="1371600" algn="l" defTabSz="914400" rtl="0" eaLnBrk="1" latinLnBrk="0" hangingPunct="1">
+      <a:defRPr sz="1200" kern="1200">
+        <a:solidFill>
+          <a:schemeClr val="tx1"/>
+        </a:solidFill>
+        <a:latin typeface="+mn-lt"/>
+        <a:ea typeface="+mn-ea"/>
+        <a:cs typeface="+mn-cs"/>
+      </a:defRPr>
+    </a:lvl4pPr>
+    <a:lvl5pPr marL="1828800" algn="l" defTabSz="914400" rtl="0" eaLnBrk="1" latinLnBrk="0" hangingPunct="1">
+      <a:defRPr sz="1200" kern="1200">
+        <a:solidFill>
+          <a:schemeClr val="tx1"/>
+        </a:solidFill>
+        <a:latin typeface="+mn-lt"/>
+        <a:ea typeface="+mn-ea"/>
+        <a:cs typeface="+mn-cs"/>
+      </a:defRPr>
+    </a:lvl5pPr>
+    <a:lvl6pPr marL="2286000" algn="l" defTabSz="914400" rtl="0" eaLnBrk="1" latinLnBrk="0" hangingPunct="1">
+      <a:defRPr sz="1200" kern="1200">
+        <a:solidFill>
+          <a:schemeClr val="tx1"/>
+        </a:solidFill>
+        <a:latin typeface="+mn-lt"/>
+        <a:ea typeface="+mn-ea"/>
+        <a:cs typeface="+mn-cs"/>
+      </a:defRPr>
+    </a:lvl6pPr>
+    <a:lvl7pPr marL="2743200" algn="l" defTabSz="914400" rtl="0" eaLnBrk="1" latinLnBrk="0" hangingPunct="1">
+      <a:defRPr sz="1200" kern="1200">
+        <a:solidFill>
+          <a:schemeClr val="tx1"/>
+        </a:solidFill>
+        <a:latin typeface="+mn-lt"/>
+        <a:ea typeface="+mn-ea"/>
+        <a:cs typeface="+mn-cs"/>
+      </a:defRPr>
+    </a:lvl7pPr>
+    <a:lvl8pPr marL="3200400" algn="l" defTabSz="914400" rtl="0" eaLnBrk="1" latinLnBrk="0" hangingPunct="1">
+      <a:defRPr sz="1200" kern="1200">
+        <a:solidFill>
+          <a:schemeClr val="tx1"/>
+        </a:solidFill>
+        <a:latin typeface="+mn-lt"/>
+        <a:ea typeface="+mn-ea"/>
+        <a:cs typeface="+mn-cs"/>
+      </a:defRPr>
+    </a:lvl8pPr>
+    <a:lvl9pPr marL="3657600" algn="l" defTabSz="914400" rtl="0" eaLnBrk="1" latinLnBrk="0" hangingPunct="1">
+      <a:defRPr sz="1200" kern="1200">
+        <a:solidFill>
+          <a:schemeClr val="tx1"/>
+        </a:solidFill>
+        <a:latin typeface="+mn-lt"/>
+        <a:ea typeface="+mn-ea"/>
+        <a:cs typeface="+mn-cs"/>
+      </a:defRPr>
+    </a:lvl9pPr>
+  </p:notesStyle>
+</p:notesMaster>
+</file>
+
+<file path=ppt/notesSlides/notesSlide1.xml><?xml version="1.0" encoding="utf-8"?>
+<p:notes xmlns:a="http://schemas.openxmlformats.org/drawingml/2006/main" xmlns:r="http://schemas.openxmlformats.org/officeDocument/2006/relationships" xmlns:p="http://schemas.openxmlformats.org/presentationml/2006/main">
+  <p:cSld>
+    <p:spTree>
+      <p:nvGrpSpPr>
+        <p:cNvPr id="1" name="">
+          <a:extLst>
+            <a:ext uri="{FF2B5EF4-FFF2-40B4-BE49-F238E27FC236}">
+              <a16:creationId xmlns:a16="http://schemas.microsoft.com/office/drawing/2014/main" id="{62853D2B-C14B-C923-E666-2BE98336C7E9}"/>
+            </a:ext>
+          </a:extLst>
+        </p:cNvPr>
+        <p:cNvGrpSpPr/>
+        <p:nvPr/>
+      </p:nvGrpSpPr>
+      <p:grpSpPr>
+        <a:xfrm>
+          <a:off x="0" y="0"/>
+          <a:ext cx="0" cy="0"/>
+          <a:chOff x="0" y="0"/>
+          <a:chExt cx="0" cy="0"/>
+        </a:xfrm>
+      </p:grpSpPr>
+      <p:sp>
+        <p:nvSpPr>
+          <p:cNvPr id="2" name="Segnaposto immagine diapositiva 1">
+            <a:extLst>
+              <a:ext uri="{FF2B5EF4-FFF2-40B4-BE49-F238E27FC236}">
+                <a16:creationId xmlns:a16="http://schemas.microsoft.com/office/drawing/2014/main" id="{41E73501-4C4F-7EA7-F309-EC9432A82AE5}"/>
+              </a:ext>
+            </a:extLst>
+          </p:cNvPr>
+          <p:cNvSpPr>
+            <a:spLocks noGrp="1" noRot="1" noChangeAspect="1"/>
+          </p:cNvSpPr>
+          <p:nvPr>
+            <p:ph type="sldImg"/>
+          </p:nvPr>
+        </p:nvSpPr>
+        <p:spPr/>
+      </p:sp>
+      <p:sp>
+        <p:nvSpPr>
+          <p:cNvPr id="3" name="Segnaposto note 2">
+            <a:extLst>
+              <a:ext uri="{FF2B5EF4-FFF2-40B4-BE49-F238E27FC236}">
+                <a16:creationId xmlns:a16="http://schemas.microsoft.com/office/drawing/2014/main" id="{5102C8D8-9566-F6BA-2D4C-09E243EDED39}"/>
+              </a:ext>
+            </a:extLst>
+          </p:cNvPr>
+          <p:cNvSpPr>
+            <a:spLocks noGrp="1"/>
+          </p:cNvSpPr>
+          <p:nvPr>
+            <p:ph type="body" idx="1"/>
+          </p:nvPr>
+        </p:nvSpPr>
+        <p:spPr/>
+        <p:txBody>
+          <a:bodyPr/>
+          <a:lstStyle/>
+          <a:p>
+            <a:endParaRPr lang="it-IT" dirty="0"/>
+          </a:p>
+        </p:txBody>
+      </p:sp>
+      <p:sp>
+        <p:nvSpPr>
+          <p:cNvPr id="4" name="Segnaposto numero diapositiva 3">
+            <a:extLst>
+              <a:ext uri="{FF2B5EF4-FFF2-40B4-BE49-F238E27FC236}">
+                <a16:creationId xmlns:a16="http://schemas.microsoft.com/office/drawing/2014/main" id="{0A1D6B02-C167-B05C-9F5F-29D88237B72E}"/>
+              </a:ext>
+            </a:extLst>
+          </p:cNvPr>
+          <p:cNvSpPr>
+            <a:spLocks noGrp="1"/>
+          </p:cNvSpPr>
+          <p:nvPr>
+            <p:ph type="sldNum" sz="quarter" idx="5"/>
+          </p:nvPr>
+        </p:nvSpPr>
+        <p:spPr/>
+        <p:txBody>
+          <a:bodyPr/>
+          <a:lstStyle/>
+          <a:p>
+            <a:fld id="{C205392F-55BF-4B8E-AF01-45F81C88C286}" type="slidenum">
+              <a:rPr lang="it-IT" smtClean="0"/>
+              <a:t>4</a:t>
+            </a:fld>
+            <a:endParaRPr lang="it-IT"/>
+          </a:p>
+        </p:txBody>
+      </p:sp>
+    </p:spTree>
+    <p:extLst>
+      <p:ext uri="{BB962C8B-B14F-4D97-AF65-F5344CB8AC3E}">
+        <p14:creationId xmlns:p14="http://schemas.microsoft.com/office/powerpoint/2010/main" val="1306429062"/>
+      </p:ext>
+    </p:extLst>
+  </p:cSld>
+  <p:clrMapOvr>
+    <a:masterClrMapping/>
+  </p:clrMapOvr>
+</p:notes>
+</file>
+
+<file path=ppt/notesSlides/notesSlide2.xml><?xml version="1.0" encoding="utf-8"?>
+<p:notes xmlns:a="http://schemas.openxmlformats.org/drawingml/2006/main" xmlns:r="http://schemas.openxmlformats.org/officeDocument/2006/relationships" xmlns:p="http://schemas.openxmlformats.org/presentationml/2006/main">
+  <p:cSld>
+    <p:spTree>
+      <p:nvGrpSpPr>
+        <p:cNvPr id="1" name="">
+          <a:extLst>
+            <a:ext uri="{FF2B5EF4-FFF2-40B4-BE49-F238E27FC236}">
+              <a16:creationId xmlns:a16="http://schemas.microsoft.com/office/drawing/2014/main" id="{DA1B391E-D5FB-AAE5-E380-070C93046344}"/>
+            </a:ext>
+          </a:extLst>
+        </p:cNvPr>
+        <p:cNvGrpSpPr/>
+        <p:nvPr/>
+      </p:nvGrpSpPr>
+      <p:grpSpPr>
+        <a:xfrm>
+          <a:off x="0" y="0"/>
+          <a:ext cx="0" cy="0"/>
+          <a:chOff x="0" y="0"/>
+          <a:chExt cx="0" cy="0"/>
+        </a:xfrm>
+      </p:grpSpPr>
+      <p:sp>
+        <p:nvSpPr>
+          <p:cNvPr id="2" name="Segnaposto immagine diapositiva 1">
+            <a:extLst>
+              <a:ext uri="{FF2B5EF4-FFF2-40B4-BE49-F238E27FC236}">
+                <a16:creationId xmlns:a16="http://schemas.microsoft.com/office/drawing/2014/main" id="{B5500384-8FBC-2FBA-6ECE-1CFBC1380E92}"/>
+              </a:ext>
+            </a:extLst>
+          </p:cNvPr>
+          <p:cNvSpPr>
+            <a:spLocks noGrp="1" noRot="1" noChangeAspect="1"/>
+          </p:cNvSpPr>
+          <p:nvPr>
+            <p:ph type="sldImg"/>
+          </p:nvPr>
+        </p:nvSpPr>
+        <p:spPr/>
+      </p:sp>
+      <p:sp>
+        <p:nvSpPr>
+          <p:cNvPr id="3" name="Segnaposto note 2">
+            <a:extLst>
+              <a:ext uri="{FF2B5EF4-FFF2-40B4-BE49-F238E27FC236}">
+                <a16:creationId xmlns:a16="http://schemas.microsoft.com/office/drawing/2014/main" id="{70C0D2B3-188B-333F-FC81-9815499EECEA}"/>
+              </a:ext>
+            </a:extLst>
+          </p:cNvPr>
+          <p:cNvSpPr>
+            <a:spLocks noGrp="1"/>
+          </p:cNvSpPr>
+          <p:nvPr>
+            <p:ph type="body" idx="1"/>
+          </p:nvPr>
+        </p:nvSpPr>
+        <p:spPr/>
+        <p:txBody>
+          <a:bodyPr/>
+          <a:lstStyle/>
+          <a:p>
+            <a:endParaRPr lang="it-IT" dirty="0"/>
+          </a:p>
+        </p:txBody>
+      </p:sp>
+      <p:sp>
+        <p:nvSpPr>
+          <p:cNvPr id="4" name="Segnaposto numero diapositiva 3">
+            <a:extLst>
+              <a:ext uri="{FF2B5EF4-FFF2-40B4-BE49-F238E27FC236}">
+                <a16:creationId xmlns:a16="http://schemas.microsoft.com/office/drawing/2014/main" id="{1F852DF3-3BB9-FB2D-7195-553F884E85C8}"/>
+              </a:ext>
+            </a:extLst>
+          </p:cNvPr>
+          <p:cNvSpPr>
+            <a:spLocks noGrp="1"/>
+          </p:cNvSpPr>
+          <p:nvPr>
+            <p:ph type="sldNum" sz="quarter" idx="5"/>
+          </p:nvPr>
+        </p:nvSpPr>
+        <p:spPr/>
+        <p:txBody>
+          <a:bodyPr/>
+          <a:lstStyle/>
+          <a:p>
+            <a:fld id="{C205392F-55BF-4B8E-AF01-45F81C88C286}" type="slidenum">
+              <a:rPr lang="it-IT" smtClean="0"/>
+              <a:t>5</a:t>
+            </a:fld>
+            <a:endParaRPr lang="it-IT"/>
+          </a:p>
+        </p:txBody>
+      </p:sp>
+    </p:spTree>
+    <p:extLst>
+      <p:ext uri="{BB962C8B-B14F-4D97-AF65-F5344CB8AC3E}">
+        <p14:creationId xmlns:p14="http://schemas.microsoft.com/office/powerpoint/2010/main" val="3116480061"/>
+      </p:ext>
+    </p:extLst>
+  </p:cSld>
+  <p:clrMapOvr>
+    <a:masterClrMapping/>
+  </p:clrMapOvr>
+</p:notes>
+</file>
+
+<file path=ppt/notesSlides/notesSlide3.xml><?xml version="1.0" encoding="utf-8"?>
+<p:notes xmlns:a="http://schemas.openxmlformats.org/drawingml/2006/main" xmlns:r="http://schemas.openxmlformats.org/officeDocument/2006/relationships" xmlns:p="http://schemas.openxmlformats.org/presentationml/2006/main">
+  <p:cSld>
+    <p:spTree>
+      <p:nvGrpSpPr>
+        <p:cNvPr id="1" name="">
+          <a:extLst>
+            <a:ext uri="{FF2B5EF4-FFF2-40B4-BE49-F238E27FC236}">
+              <a16:creationId xmlns:a16="http://schemas.microsoft.com/office/drawing/2014/main" id="{C4F5FC3A-F0FE-EC84-97F8-E62C4C0E2783}"/>
+            </a:ext>
+          </a:extLst>
+        </p:cNvPr>
+        <p:cNvGrpSpPr/>
+        <p:nvPr/>
+      </p:nvGrpSpPr>
+      <p:grpSpPr>
+        <a:xfrm>
+          <a:off x="0" y="0"/>
+          <a:ext cx="0" cy="0"/>
+          <a:chOff x="0" y="0"/>
+          <a:chExt cx="0" cy="0"/>
+        </a:xfrm>
+      </p:grpSpPr>
+      <p:sp>
+        <p:nvSpPr>
+          <p:cNvPr id="2" name="Segnaposto immagine diapositiva 1">
+            <a:extLst>
+              <a:ext uri="{FF2B5EF4-FFF2-40B4-BE49-F238E27FC236}">
+                <a16:creationId xmlns:a16="http://schemas.microsoft.com/office/drawing/2014/main" id="{CA23B2D4-13DD-E2E4-6AB4-344F22CD0A2F}"/>
+              </a:ext>
+            </a:extLst>
+          </p:cNvPr>
+          <p:cNvSpPr>
+            <a:spLocks noGrp="1" noRot="1" noChangeAspect="1"/>
+          </p:cNvSpPr>
+          <p:nvPr>
+            <p:ph type="sldImg"/>
+          </p:nvPr>
+        </p:nvSpPr>
+        <p:spPr/>
+      </p:sp>
+      <p:sp>
+        <p:nvSpPr>
+          <p:cNvPr id="3" name="Segnaposto note 2">
+            <a:extLst>
+              <a:ext uri="{FF2B5EF4-FFF2-40B4-BE49-F238E27FC236}">
+                <a16:creationId xmlns:a16="http://schemas.microsoft.com/office/drawing/2014/main" id="{4606AD30-4A8B-D84A-3E5E-A26EC8DF53BD}"/>
+              </a:ext>
+            </a:extLst>
+          </p:cNvPr>
+          <p:cNvSpPr>
+            <a:spLocks noGrp="1"/>
+          </p:cNvSpPr>
+          <p:nvPr>
+            <p:ph type="body" idx="1"/>
+          </p:nvPr>
+        </p:nvSpPr>
+        <p:spPr/>
+        <p:txBody>
+          <a:bodyPr/>
+          <a:lstStyle/>
+          <a:p>
+            <a:endParaRPr lang="it-IT" dirty="0"/>
+          </a:p>
+        </p:txBody>
+      </p:sp>
+      <p:sp>
+        <p:nvSpPr>
+          <p:cNvPr id="4" name="Segnaposto numero diapositiva 3">
+            <a:extLst>
+              <a:ext uri="{FF2B5EF4-FFF2-40B4-BE49-F238E27FC236}">
+                <a16:creationId xmlns:a16="http://schemas.microsoft.com/office/drawing/2014/main" id="{885FF3C4-B83C-EC61-DB64-AABB4BE3D9FA}"/>
+              </a:ext>
+            </a:extLst>
+          </p:cNvPr>
+          <p:cNvSpPr>
+            <a:spLocks noGrp="1"/>
+          </p:cNvSpPr>
+          <p:nvPr>
+            <p:ph type="sldNum" sz="quarter" idx="5"/>
+          </p:nvPr>
+        </p:nvSpPr>
+        <p:spPr/>
+        <p:txBody>
+          <a:bodyPr/>
+          <a:lstStyle/>
+          <a:p>
+            <a:fld id="{C205392F-55BF-4B8E-AF01-45F81C88C286}" type="slidenum">
+              <a:rPr lang="it-IT" smtClean="0"/>
+              <a:t>6</a:t>
+            </a:fld>
+            <a:endParaRPr lang="it-IT"/>
+          </a:p>
+        </p:txBody>
+      </p:sp>
+    </p:spTree>
+    <p:extLst>
+      <p:ext uri="{BB962C8B-B14F-4D97-AF65-F5344CB8AC3E}">
+        <p14:creationId xmlns:p14="http://schemas.microsoft.com/office/powerpoint/2010/main" val="3845939350"/>
+      </p:ext>
+    </p:extLst>
+  </p:cSld>
+  <p:clrMapOvr>
+    <a:masterClrMapping/>
+  </p:clrMapOvr>
+</p:notes>
 </file>
 
 <file path=ppt/slideLayouts/slideLayout1.xml><?xml version="1.0" encoding="utf-8"?>
@@ -3395,7 +4075,7 @@
                   <a:srgbClr val="002060"/>
                 </a:solidFill>
               </a:rPr>
-              <a:t>	BACKUP SLIDES: SCHEMATIC LAYOUT</a:t>
+              <a:t>	SCHEMATIC LAYOUT</a:t>
             </a:r>
           </a:p>
         </p:txBody>
@@ -3924,6 +4604,1299 @@
 </file>
 
 <file path=ppt/slides/slide2.xml><?xml version="1.0" encoding="utf-8"?>
+<p:sld xmlns:a="http://schemas.openxmlformats.org/drawingml/2006/main" xmlns:r="http://schemas.openxmlformats.org/officeDocument/2006/relationships" xmlns:p="http://schemas.openxmlformats.org/presentationml/2006/main">
+  <p:cSld>
+    <p:spTree>
+      <p:nvGrpSpPr>
+        <p:cNvPr id="1" name="">
+          <a:extLst>
+            <a:ext uri="{FF2B5EF4-FFF2-40B4-BE49-F238E27FC236}">
+              <a16:creationId xmlns:a16="http://schemas.microsoft.com/office/drawing/2014/main" id="{94064030-A8AB-756E-7B6F-E15ADDA9E938}"/>
+            </a:ext>
+          </a:extLst>
+        </p:cNvPr>
+        <p:cNvGrpSpPr/>
+        <p:nvPr/>
+      </p:nvGrpSpPr>
+      <p:grpSpPr>
+        <a:xfrm>
+          <a:off x="0" y="0"/>
+          <a:ext cx="0" cy="0"/>
+          <a:chOff x="0" y="0"/>
+          <a:chExt cx="0" cy="0"/>
+        </a:xfrm>
+      </p:grpSpPr>
+      <p:sp>
+        <p:nvSpPr>
+          <p:cNvPr id="2" name="Titolo 1">
+            <a:extLst>
+              <a:ext uri="{FF2B5EF4-FFF2-40B4-BE49-F238E27FC236}">
+                <a16:creationId xmlns:a16="http://schemas.microsoft.com/office/drawing/2014/main" id="{3059094B-98B8-79C6-D910-E49A6676953A}"/>
+              </a:ext>
+            </a:extLst>
+          </p:cNvPr>
+          <p:cNvSpPr>
+            <a:spLocks noGrp="1"/>
+          </p:cNvSpPr>
+          <p:nvPr>
+            <p:ph type="title"/>
+          </p:nvPr>
+        </p:nvSpPr>
+        <p:spPr>
+          <a:xfrm>
+            <a:off x="38100" y="69651"/>
+            <a:ext cx="12114000" cy="1153094"/>
+          </a:xfrm>
+          <a:prstGeom prst="roundRect">
+            <a:avLst>
+              <a:gd name="adj" fmla="val 36459"/>
+            </a:avLst>
+          </a:prstGeom>
+          <a:noFill/>
+        </p:spPr>
+        <p:txBody>
+          <a:bodyPr>
+            <a:normAutofit/>
+          </a:bodyPr>
+          <a:lstStyle/>
+          <a:p>
+            <a:r>
+              <a:rPr lang="it-IT" b="1" dirty="0">
+                <a:solidFill>
+                  <a:srgbClr val="002060"/>
+                </a:solidFill>
+              </a:rPr>
+              <a:t>	SCHEMATIC LAYOUT</a:t>
+            </a:r>
+          </a:p>
+        </p:txBody>
+      </p:sp>
+      <p:sp>
+        <p:nvSpPr>
+          <p:cNvPr id="4" name="Segnaposto data 3">
+            <a:extLst>
+              <a:ext uri="{FF2B5EF4-FFF2-40B4-BE49-F238E27FC236}">
+                <a16:creationId xmlns:a16="http://schemas.microsoft.com/office/drawing/2014/main" id="{5FD001E6-BE12-0E1C-E34E-F8F3589F2108}"/>
+              </a:ext>
+            </a:extLst>
+          </p:cNvPr>
+          <p:cNvSpPr>
+            <a:spLocks noGrp="1"/>
+          </p:cNvSpPr>
+          <p:nvPr>
+            <p:ph type="dt" sz="half" idx="10"/>
+          </p:nvPr>
+        </p:nvSpPr>
+        <p:spPr>
+          <a:xfrm>
+            <a:off x="838200" y="6356349"/>
+            <a:ext cx="2743200" cy="432000"/>
+          </a:xfrm>
+        </p:spPr>
+        <p:txBody>
+          <a:bodyPr/>
+          <a:lstStyle/>
+          <a:p>
+            <a:r>
+              <a:rPr lang="it-IT" sz="1500" b="1" dirty="0">
+                <a:solidFill>
+                  <a:srgbClr val="002060"/>
+                </a:solidFill>
+              </a:rPr>
+              <a:t>August 2026</a:t>
+            </a:r>
+          </a:p>
+        </p:txBody>
+      </p:sp>
+      <p:sp>
+        <p:nvSpPr>
+          <p:cNvPr id="5" name="Segnaposto piè di pagina 4">
+            <a:extLst>
+              <a:ext uri="{FF2B5EF4-FFF2-40B4-BE49-F238E27FC236}">
+                <a16:creationId xmlns:a16="http://schemas.microsoft.com/office/drawing/2014/main" id="{97936A48-A600-E3BE-4414-86FAF9CF8150}"/>
+              </a:ext>
+            </a:extLst>
+          </p:cNvPr>
+          <p:cNvSpPr>
+            <a:spLocks noGrp="1"/>
+          </p:cNvSpPr>
+          <p:nvPr>
+            <p:ph type="ftr" sz="quarter" idx="11"/>
+          </p:nvPr>
+        </p:nvSpPr>
+        <p:spPr>
+          <a:xfrm>
+            <a:off x="0" y="6356349"/>
+            <a:ext cx="12192000" cy="432000"/>
+          </a:xfrm>
+        </p:spPr>
+        <p:txBody>
+          <a:bodyPr/>
+          <a:lstStyle/>
+          <a:p>
+            <a:r>
+              <a:rPr lang="it-IT" sz="1500" b="1" dirty="0">
+                <a:solidFill>
+                  <a:srgbClr val="002060"/>
+                </a:solidFill>
+              </a:rPr>
+              <a:t>Anna Sofia Moro</a:t>
+            </a:r>
+          </a:p>
+        </p:txBody>
+      </p:sp>
+      <p:sp>
+        <p:nvSpPr>
+          <p:cNvPr id="6" name="Segnaposto numero diapositiva 5">
+            <a:extLst>
+              <a:ext uri="{FF2B5EF4-FFF2-40B4-BE49-F238E27FC236}">
+                <a16:creationId xmlns:a16="http://schemas.microsoft.com/office/drawing/2014/main" id="{FBD475C3-3B66-B577-42F5-6585EDDD6309}"/>
+              </a:ext>
+            </a:extLst>
+          </p:cNvPr>
+          <p:cNvSpPr>
+            <a:spLocks noGrp="1"/>
+          </p:cNvSpPr>
+          <p:nvPr>
+            <p:ph type="sldNum" sz="quarter" idx="12"/>
+          </p:nvPr>
+        </p:nvSpPr>
+        <p:spPr>
+          <a:xfrm>
+            <a:off x="8610600" y="6356349"/>
+            <a:ext cx="2743200" cy="432000"/>
+          </a:xfrm>
+        </p:spPr>
+        <p:txBody>
+          <a:bodyPr/>
+          <a:lstStyle/>
+          <a:p>
+            <a:fld id="{0A318BD9-CA14-4A83-ACF0-03D5918EB402}" type="slidenum">
+              <a:rPr lang="it-IT" sz="1500" b="1" smtClean="0">
+                <a:solidFill>
+                  <a:srgbClr val="002060"/>
+                </a:solidFill>
+              </a:rPr>
+              <a:t>2</a:t>
+            </a:fld>
+            <a:endParaRPr lang="it-IT" sz="1500" b="1" dirty="0">
+              <a:solidFill>
+                <a:srgbClr val="002060"/>
+              </a:solidFill>
+            </a:endParaRPr>
+          </a:p>
+        </p:txBody>
+      </p:sp>
+      <p:cxnSp>
+        <p:nvCxnSpPr>
+          <p:cNvPr id="10" name="Connettore diritto 9">
+            <a:extLst>
+              <a:ext uri="{FF2B5EF4-FFF2-40B4-BE49-F238E27FC236}">
+                <a16:creationId xmlns:a16="http://schemas.microsoft.com/office/drawing/2014/main" id="{3B26D157-5346-067C-2B45-7F428AF580FB}"/>
+              </a:ext>
+            </a:extLst>
+          </p:cNvPr>
+          <p:cNvCxnSpPr>
+            <a:cxnSpLocks/>
+          </p:cNvCxnSpPr>
+          <p:nvPr/>
+        </p:nvCxnSpPr>
+        <p:spPr>
+          <a:xfrm>
+            <a:off x="696000" y="1155368"/>
+            <a:ext cx="10800000" cy="0"/>
+          </a:xfrm>
+          <a:prstGeom prst="line">
+            <a:avLst/>
+          </a:prstGeom>
+          <a:ln w="38100">
+            <a:solidFill>
+              <a:srgbClr val="002060"/>
+            </a:solidFill>
+          </a:ln>
+        </p:spPr>
+        <p:style>
+          <a:lnRef idx="2">
+            <a:schemeClr val="accent1"/>
+          </a:lnRef>
+          <a:fillRef idx="0">
+            <a:schemeClr val="accent1"/>
+          </a:fillRef>
+          <a:effectRef idx="1">
+            <a:schemeClr val="accent1"/>
+          </a:effectRef>
+          <a:fontRef idx="minor">
+            <a:schemeClr val="tx1"/>
+          </a:fontRef>
+        </p:style>
+      </p:cxnSp>
+      <p:sp>
+        <p:nvSpPr>
+          <p:cNvPr id="13" name="CasellaDiTesto 12">
+            <a:extLst>
+              <a:ext uri="{FF2B5EF4-FFF2-40B4-BE49-F238E27FC236}">
+                <a16:creationId xmlns:a16="http://schemas.microsoft.com/office/drawing/2014/main" id="{4B1B2EDD-5C24-17A1-EC00-F4E9170F2D61}"/>
+              </a:ext>
+            </a:extLst>
+          </p:cNvPr>
+          <p:cNvSpPr txBox="1"/>
+          <p:nvPr/>
+        </p:nvSpPr>
+        <p:spPr>
+          <a:xfrm>
+            <a:off x="3048886" y="3244334"/>
+            <a:ext cx="6097772" cy="369332"/>
+          </a:xfrm>
+          <a:prstGeom prst="rect">
+            <a:avLst/>
+          </a:prstGeom>
+          <a:noFill/>
+        </p:spPr>
+        <p:txBody>
+          <a:bodyPr wrap="square">
+            <a:spAutoFit/>
+          </a:bodyPr>
+          <a:lstStyle/>
+          <a:p>
+            <a:endParaRPr lang="it-IT" dirty="0"/>
+          </a:p>
+        </p:txBody>
+      </p:sp>
+      <p:sp>
+        <p:nvSpPr>
+          <p:cNvPr id="15" name="CasellaDiTesto 14">
+            <a:extLst>
+              <a:ext uri="{FF2B5EF4-FFF2-40B4-BE49-F238E27FC236}">
+                <a16:creationId xmlns:a16="http://schemas.microsoft.com/office/drawing/2014/main" id="{50351722-4EA8-0597-4ABC-52AA3FC95A0A}"/>
+              </a:ext>
+            </a:extLst>
+          </p:cNvPr>
+          <p:cNvSpPr txBox="1"/>
+          <p:nvPr/>
+        </p:nvSpPr>
+        <p:spPr>
+          <a:xfrm>
+            <a:off x="3048886" y="3244334"/>
+            <a:ext cx="6097772" cy="369332"/>
+          </a:xfrm>
+          <a:prstGeom prst="rect">
+            <a:avLst/>
+          </a:prstGeom>
+          <a:noFill/>
+        </p:spPr>
+        <p:txBody>
+          <a:bodyPr wrap="square">
+            <a:spAutoFit/>
+          </a:bodyPr>
+          <a:lstStyle/>
+          <a:p>
+            <a:endParaRPr lang="it-IT" dirty="0"/>
+          </a:p>
+        </p:txBody>
+      </p:sp>
+      <p:sp>
+        <p:nvSpPr>
+          <p:cNvPr id="3" name="Rectangle: Rounded Corners 2">
+            <a:extLst>
+              <a:ext uri="{FF2B5EF4-FFF2-40B4-BE49-F238E27FC236}">
+                <a16:creationId xmlns:a16="http://schemas.microsoft.com/office/drawing/2014/main" id="{F750D853-3E25-ECC8-09EE-F01F4D7525D7}"/>
+              </a:ext>
+            </a:extLst>
+          </p:cNvPr>
+          <p:cNvSpPr/>
+          <p:nvPr/>
+        </p:nvSpPr>
+        <p:spPr>
+          <a:xfrm>
+            <a:off x="696000" y="2152137"/>
+            <a:ext cx="1785943" cy="1074067"/>
+          </a:xfrm>
+          <a:prstGeom prst="roundRect">
+            <a:avLst/>
+          </a:prstGeom>
+          <a:noFill/>
+          <a:ln w="38100">
+            <a:solidFill>
+              <a:srgbClr val="FFC000"/>
+            </a:solidFill>
+          </a:ln>
+        </p:spPr>
+        <p:style>
+          <a:lnRef idx="2">
+            <a:schemeClr val="accent1">
+              <a:shade val="15000"/>
+            </a:schemeClr>
+          </a:lnRef>
+          <a:fillRef idx="1">
+            <a:schemeClr val="accent1"/>
+          </a:fillRef>
+          <a:effectRef idx="0">
+            <a:schemeClr val="accent1"/>
+          </a:effectRef>
+          <a:fontRef idx="minor">
+            <a:schemeClr val="lt1"/>
+          </a:fontRef>
+        </p:style>
+        <p:txBody>
+          <a:bodyPr rtlCol="0" anchor="ctr"/>
+          <a:lstStyle/>
+          <a:p>
+            <a:pPr algn="ctr"/>
+            <a:r>
+              <a:rPr lang="en-US" dirty="0">
+                <a:solidFill>
+                  <a:schemeClr val="tx1"/>
+                </a:solidFill>
+              </a:rPr>
+              <a:t>Station 1</a:t>
+            </a:r>
+          </a:p>
+          <a:p>
+            <a:pPr algn="ctr"/>
+            <a:r>
+              <a:rPr lang="it-IT" dirty="0">
+                <a:solidFill>
+                  <a:schemeClr val="tx1"/>
+                </a:solidFill>
+              </a:rPr>
+              <a:t>z = -12434 mm</a:t>
+            </a:r>
+          </a:p>
+        </p:txBody>
+      </p:sp>
+      <p:sp>
+        <p:nvSpPr>
+          <p:cNvPr id="21" name="Rectangle: Rounded Corners 20">
+            <a:extLst>
+              <a:ext uri="{FF2B5EF4-FFF2-40B4-BE49-F238E27FC236}">
+                <a16:creationId xmlns:a16="http://schemas.microsoft.com/office/drawing/2014/main" id="{D25120B7-CD7D-1D69-0AB8-7C9C80459C75}"/>
+              </a:ext>
+            </a:extLst>
+          </p:cNvPr>
+          <p:cNvSpPr/>
+          <p:nvPr/>
+        </p:nvSpPr>
+        <p:spPr>
+          <a:xfrm>
+            <a:off x="2955175" y="2152137"/>
+            <a:ext cx="1785943" cy="1074067"/>
+          </a:xfrm>
+          <a:prstGeom prst="roundRect">
+            <a:avLst/>
+          </a:prstGeom>
+          <a:noFill/>
+          <a:ln w="38100">
+            <a:solidFill>
+              <a:srgbClr val="FFC000"/>
+            </a:solidFill>
+          </a:ln>
+        </p:spPr>
+        <p:style>
+          <a:lnRef idx="2">
+            <a:schemeClr val="accent1">
+              <a:shade val="15000"/>
+            </a:schemeClr>
+          </a:lnRef>
+          <a:fillRef idx="1">
+            <a:schemeClr val="accent1"/>
+          </a:fillRef>
+          <a:effectRef idx="0">
+            <a:schemeClr val="accent1"/>
+          </a:effectRef>
+          <a:fontRef idx="minor">
+            <a:schemeClr val="lt1"/>
+          </a:fontRef>
+        </p:style>
+        <p:txBody>
+          <a:bodyPr rtlCol="0" anchor="ctr"/>
+          <a:lstStyle/>
+          <a:p>
+            <a:pPr algn="ctr"/>
+            <a:r>
+              <a:rPr lang="en-US" dirty="0">
+                <a:solidFill>
+                  <a:schemeClr val="tx1"/>
+                </a:solidFill>
+              </a:rPr>
+              <a:t>Station 2</a:t>
+            </a:r>
+          </a:p>
+          <a:p>
+            <a:pPr algn="ctr"/>
+            <a:r>
+              <a:rPr lang="it-IT" dirty="0">
+                <a:solidFill>
+                  <a:schemeClr val="tx1"/>
+                </a:solidFill>
+              </a:rPr>
+              <a:t>z = -10356 mm</a:t>
+            </a:r>
+          </a:p>
+        </p:txBody>
+      </p:sp>
+      <p:sp>
+        <p:nvSpPr>
+          <p:cNvPr id="24" name="Rectangle: Rounded Corners 23">
+            <a:extLst>
+              <a:ext uri="{FF2B5EF4-FFF2-40B4-BE49-F238E27FC236}">
+                <a16:creationId xmlns:a16="http://schemas.microsoft.com/office/drawing/2014/main" id="{58E1A454-66A3-17B6-13E9-76F57C85B558}"/>
+              </a:ext>
+            </a:extLst>
+          </p:cNvPr>
+          <p:cNvSpPr/>
+          <p:nvPr/>
+        </p:nvSpPr>
+        <p:spPr>
+          <a:xfrm>
+            <a:off x="5198795" y="2152137"/>
+            <a:ext cx="1785943" cy="1074067"/>
+          </a:xfrm>
+          <a:prstGeom prst="roundRect">
+            <a:avLst/>
+          </a:prstGeom>
+          <a:noFill/>
+          <a:ln w="38100">
+            <a:solidFill>
+              <a:srgbClr val="00B0F0"/>
+            </a:solidFill>
+          </a:ln>
+        </p:spPr>
+        <p:style>
+          <a:lnRef idx="2">
+            <a:schemeClr val="accent1">
+              <a:shade val="15000"/>
+            </a:schemeClr>
+          </a:lnRef>
+          <a:fillRef idx="1">
+            <a:schemeClr val="accent1"/>
+          </a:fillRef>
+          <a:effectRef idx="0">
+            <a:schemeClr val="accent1"/>
+          </a:effectRef>
+          <a:fontRef idx="minor">
+            <a:schemeClr val="lt1"/>
+          </a:fontRef>
+        </p:style>
+        <p:txBody>
+          <a:bodyPr rtlCol="0" anchor="ctr"/>
+          <a:lstStyle/>
+          <a:p>
+            <a:pPr algn="ctr"/>
+            <a:r>
+              <a:rPr lang="en-US" dirty="0">
+                <a:solidFill>
+                  <a:schemeClr val="tx1"/>
+                </a:solidFill>
+              </a:rPr>
+              <a:t>crystal</a:t>
+            </a:r>
+          </a:p>
+          <a:p>
+            <a:pPr algn="ctr"/>
+            <a:r>
+              <a:rPr lang="it-IT" dirty="0">
+                <a:solidFill>
+                  <a:schemeClr val="tx1"/>
+                </a:solidFill>
+              </a:rPr>
+              <a:t>z = 0 mm</a:t>
+            </a:r>
+          </a:p>
+        </p:txBody>
+      </p:sp>
+      <p:sp>
+        <p:nvSpPr>
+          <p:cNvPr id="26" name="Rectangle: Rounded Corners 25">
+            <a:extLst>
+              <a:ext uri="{FF2B5EF4-FFF2-40B4-BE49-F238E27FC236}">
+                <a16:creationId xmlns:a16="http://schemas.microsoft.com/office/drawing/2014/main" id="{AF24E37D-C093-D1EC-F9D6-3260C33D719E}"/>
+              </a:ext>
+            </a:extLst>
+          </p:cNvPr>
+          <p:cNvSpPr/>
+          <p:nvPr/>
+        </p:nvSpPr>
+        <p:spPr>
+          <a:xfrm>
+            <a:off x="7454426" y="2152137"/>
+            <a:ext cx="1785943" cy="1074067"/>
+          </a:xfrm>
+          <a:prstGeom prst="roundRect">
+            <a:avLst/>
+          </a:prstGeom>
+          <a:noFill/>
+          <a:ln w="38100">
+            <a:solidFill>
+              <a:srgbClr val="FFC000"/>
+            </a:solidFill>
+          </a:ln>
+        </p:spPr>
+        <p:style>
+          <a:lnRef idx="2">
+            <a:schemeClr val="accent1">
+              <a:shade val="15000"/>
+            </a:schemeClr>
+          </a:lnRef>
+          <a:fillRef idx="1">
+            <a:schemeClr val="accent1"/>
+          </a:fillRef>
+          <a:effectRef idx="0">
+            <a:schemeClr val="accent1"/>
+          </a:effectRef>
+          <a:fontRef idx="minor">
+            <a:schemeClr val="lt1"/>
+          </a:fontRef>
+        </p:style>
+        <p:txBody>
+          <a:bodyPr rtlCol="0" anchor="ctr"/>
+          <a:lstStyle/>
+          <a:p>
+            <a:pPr algn="ctr"/>
+            <a:r>
+              <a:rPr lang="en-US" dirty="0">
+                <a:solidFill>
+                  <a:schemeClr val="tx1"/>
+                </a:solidFill>
+              </a:rPr>
+              <a:t>Station 3</a:t>
+            </a:r>
+          </a:p>
+          <a:p>
+            <a:pPr algn="ctr"/>
+            <a:r>
+              <a:rPr lang="it-IT" dirty="0">
+                <a:solidFill>
+                  <a:schemeClr val="tx1"/>
+                </a:solidFill>
+              </a:rPr>
+              <a:t>z = 487 mm</a:t>
+            </a:r>
+          </a:p>
+        </p:txBody>
+      </p:sp>
+      <p:sp>
+        <p:nvSpPr>
+          <p:cNvPr id="28" name="Rectangle: Rounded Corners 27">
+            <a:extLst>
+              <a:ext uri="{FF2B5EF4-FFF2-40B4-BE49-F238E27FC236}">
+                <a16:creationId xmlns:a16="http://schemas.microsoft.com/office/drawing/2014/main" id="{41B532E1-DA99-182C-90E4-4DB41FC919F6}"/>
+              </a:ext>
+            </a:extLst>
+          </p:cNvPr>
+          <p:cNvSpPr/>
+          <p:nvPr/>
+        </p:nvSpPr>
+        <p:spPr>
+          <a:xfrm>
+            <a:off x="9710057" y="2152137"/>
+            <a:ext cx="1785943" cy="1074067"/>
+          </a:xfrm>
+          <a:prstGeom prst="roundRect">
+            <a:avLst/>
+          </a:prstGeom>
+          <a:noFill/>
+          <a:ln w="38100">
+            <a:solidFill>
+              <a:srgbClr val="FFC000"/>
+            </a:solidFill>
+          </a:ln>
+        </p:spPr>
+        <p:style>
+          <a:lnRef idx="2">
+            <a:schemeClr val="accent1">
+              <a:shade val="15000"/>
+            </a:schemeClr>
+          </a:lnRef>
+          <a:fillRef idx="1">
+            <a:schemeClr val="accent1"/>
+          </a:fillRef>
+          <a:effectRef idx="0">
+            <a:schemeClr val="accent1"/>
+          </a:effectRef>
+          <a:fontRef idx="minor">
+            <a:schemeClr val="lt1"/>
+          </a:fontRef>
+        </p:style>
+        <p:txBody>
+          <a:bodyPr rtlCol="0" anchor="ctr"/>
+          <a:lstStyle/>
+          <a:p>
+            <a:pPr algn="ctr"/>
+            <a:r>
+              <a:rPr lang="en-US" dirty="0">
+                <a:solidFill>
+                  <a:schemeClr val="tx1"/>
+                </a:solidFill>
+              </a:rPr>
+              <a:t>Station 4</a:t>
+            </a:r>
+          </a:p>
+          <a:p>
+            <a:pPr algn="ctr"/>
+            <a:r>
+              <a:rPr lang="it-IT" dirty="0">
+                <a:solidFill>
+                  <a:schemeClr val="tx1"/>
+                </a:solidFill>
+              </a:rPr>
+              <a:t>z = 4714 mm</a:t>
+            </a:r>
+          </a:p>
+        </p:txBody>
+      </p:sp>
+      <p:grpSp>
+        <p:nvGrpSpPr>
+          <p:cNvPr id="38" name="Group 37">
+            <a:extLst>
+              <a:ext uri="{FF2B5EF4-FFF2-40B4-BE49-F238E27FC236}">
+                <a16:creationId xmlns:a16="http://schemas.microsoft.com/office/drawing/2014/main" id="{0EEB8EA7-D22E-D56F-1E21-CA849C000DDB}"/>
+              </a:ext>
+            </a:extLst>
+          </p:cNvPr>
+          <p:cNvGrpSpPr/>
+          <p:nvPr/>
+        </p:nvGrpSpPr>
+        <p:grpSpPr>
+          <a:xfrm>
+            <a:off x="658586" y="1576920"/>
+            <a:ext cx="10930058" cy="384929"/>
+            <a:chOff x="658586" y="2575987"/>
+            <a:chExt cx="10930058" cy="384929"/>
+          </a:xfrm>
+        </p:grpSpPr>
+        <p:cxnSp>
+          <p:nvCxnSpPr>
+            <p:cNvPr id="29" name="Straight Arrow Connector 28">
+              <a:extLst>
+                <a:ext uri="{FF2B5EF4-FFF2-40B4-BE49-F238E27FC236}">
+                  <a16:creationId xmlns:a16="http://schemas.microsoft.com/office/drawing/2014/main" id="{17EC9734-F563-AD02-9A00-53DBC6E88949}"/>
+                </a:ext>
+              </a:extLst>
+            </p:cNvPr>
+            <p:cNvCxnSpPr>
+              <a:cxnSpLocks/>
+            </p:cNvCxnSpPr>
+            <p:nvPr/>
+          </p:nvCxnSpPr>
+          <p:spPr>
+            <a:xfrm>
+              <a:off x="658586" y="2960916"/>
+              <a:ext cx="10837414" cy="0"/>
+            </a:xfrm>
+            <a:prstGeom prst="straightConnector1">
+              <a:avLst/>
+            </a:prstGeom>
+            <a:ln w="38100">
+              <a:solidFill>
+                <a:schemeClr val="tx1"/>
+              </a:solidFill>
+              <a:headEnd type="none" w="med" len="med"/>
+              <a:tailEnd type="triangle" w="med" len="med"/>
+            </a:ln>
+          </p:spPr>
+          <p:style>
+            <a:lnRef idx="2">
+              <a:schemeClr val="accent1"/>
+            </a:lnRef>
+            <a:fillRef idx="0">
+              <a:schemeClr val="accent1"/>
+            </a:fillRef>
+            <a:effectRef idx="1">
+              <a:schemeClr val="accent1"/>
+            </a:effectRef>
+            <a:fontRef idx="minor">
+              <a:schemeClr val="tx1"/>
+            </a:fontRef>
+          </p:style>
+        </p:cxnSp>
+        <mc:AlternateContent xmlns:mc="http://schemas.openxmlformats.org/markup-compatibility/2006">
+          <mc:Choice xmlns:a14="http://schemas.microsoft.com/office/drawing/2010/main" Requires="a14">
+            <p:sp>
+              <p:nvSpPr>
+                <p:cNvPr id="31" name="TextBox 30">
+                  <a:extLst>
+                    <a:ext uri="{FF2B5EF4-FFF2-40B4-BE49-F238E27FC236}">
+                      <a16:creationId xmlns:a16="http://schemas.microsoft.com/office/drawing/2014/main" id="{274633E8-EDC2-1504-2368-0F6B7756A6F9}"/>
+                    </a:ext>
+                  </a:extLst>
+                </p:cNvPr>
+                <p:cNvSpPr txBox="1"/>
+                <p:nvPr/>
+              </p:nvSpPr>
+              <p:spPr>
+                <a:xfrm>
+                  <a:off x="11118956" y="2575987"/>
+                  <a:ext cx="469688" cy="369332"/>
+                </a:xfrm>
+                <a:prstGeom prst="rect">
+                  <a:avLst/>
+                </a:prstGeom>
+                <a:noFill/>
+              </p:spPr>
+              <p:txBody>
+                <a:bodyPr wrap="square" rtlCol="0">
+                  <a:spAutoFit/>
+                </a:bodyPr>
+                <a:lstStyle/>
+                <a:p>
+                  <a14:m>
+                    <m:oMathPara xmlns:m="http://schemas.openxmlformats.org/officeDocument/2006/math">
+                      <m:oMath>
+                        <m:r>
+                          <a:rPr lang="en-US" b="1" i="1" dirty="0" smtClean="0">
+                            <a:latin typeface="Cambria Math" panose="02040503050406030204" pitchFamily="18" charset="0"/>
+                          </a:rPr>
+                          <m:t>𝒛</m:t>
+                        </m:r>
+                      </m:oMath>
+                    </m:oMathPara>
+                  </a14:m>
+                  <a:endParaRPr lang="it-IT" b="1" dirty="0"/>
+                </a:p>
+              </p:txBody>
+            </p:sp>
+          </mc:Choice>
+          <mc:Fallback>
+            <p:sp>
+              <p:nvSpPr>
+                <p:cNvPr id="31" name="TextBox 30">
+                  <a:extLst>
+                    <a:ext uri="{FF2B5EF4-FFF2-40B4-BE49-F238E27FC236}">
+                      <a16:creationId xmlns:a16="http://schemas.microsoft.com/office/drawing/2014/main" id="{274633E8-EDC2-1504-2368-0F6B7756A6F9}"/>
+                    </a:ext>
+                  </a:extLst>
+                </p:cNvPr>
+                <p:cNvSpPr txBox="1">
+                  <a:spLocks noRot="1" noChangeAspect="1" noMove="1" noResize="1" noEditPoints="1" noAdjustHandles="1" noChangeArrowheads="1" noChangeShapeType="1" noTextEdit="1"/>
+                </p:cNvSpPr>
+                <p:nvPr/>
+              </p:nvSpPr>
+              <p:spPr>
+                <a:xfrm>
+                  <a:off x="11118956" y="2575987"/>
+                  <a:ext cx="469688" cy="369332"/>
+                </a:xfrm>
+                <a:prstGeom prst="rect">
+                  <a:avLst/>
+                </a:prstGeom>
+                <a:blipFill>
+                  <a:blip r:embed="rId2"/>
+                  <a:stretch>
+                    <a:fillRect/>
+                  </a:stretch>
+                </a:blipFill>
+              </p:spPr>
+              <p:txBody>
+                <a:bodyPr/>
+                <a:lstStyle/>
+                <a:p>
+                  <a:r>
+                    <a:rPr lang="it-IT">
+                      <a:noFill/>
+                    </a:rPr>
+                    <a:t> </a:t>
+                  </a:r>
+                </a:p>
+              </p:txBody>
+            </p:sp>
+          </mc:Fallback>
+        </mc:AlternateContent>
+        <p:sp>
+          <p:nvSpPr>
+            <p:cNvPr id="33" name="TextBox 32">
+              <a:extLst>
+                <a:ext uri="{FF2B5EF4-FFF2-40B4-BE49-F238E27FC236}">
+                  <a16:creationId xmlns:a16="http://schemas.microsoft.com/office/drawing/2014/main" id="{880A5DF1-743A-EA5C-EE6B-AFF0957A6FC6}"/>
+                </a:ext>
+              </a:extLst>
+            </p:cNvPr>
+            <p:cNvSpPr txBox="1"/>
+            <p:nvPr/>
+          </p:nvSpPr>
+          <p:spPr>
+            <a:xfrm>
+              <a:off x="701337" y="2575987"/>
+              <a:ext cx="4197233" cy="369332"/>
+            </a:xfrm>
+            <a:prstGeom prst="rect">
+              <a:avLst/>
+            </a:prstGeom>
+            <a:noFill/>
+          </p:spPr>
+          <p:txBody>
+            <a:bodyPr wrap="square" rtlCol="0">
+              <a:spAutoFit/>
+            </a:bodyPr>
+            <a:lstStyle/>
+            <a:p>
+              <a:pPr/>
+              <a:r>
+                <a:rPr lang="en-US" b="1" dirty="0"/>
+                <a:t>Beam direction</a:t>
+              </a:r>
+              <a:endParaRPr lang="it-IT" b="1" dirty="0"/>
+            </a:p>
+          </p:txBody>
+        </p:sp>
+      </p:grpSp>
+      <mc:AlternateContent xmlns:mc="http://schemas.openxmlformats.org/markup-compatibility/2006">
+        <mc:Choice xmlns:a14="http://schemas.microsoft.com/office/drawing/2010/main" Requires="a14">
+          <p:sp>
+            <p:nvSpPr>
+              <p:cNvPr id="35" name="Rectangle: Rounded Corners 34">
+                <a:extLst>
+                  <a:ext uri="{FF2B5EF4-FFF2-40B4-BE49-F238E27FC236}">
+                    <a16:creationId xmlns:a16="http://schemas.microsoft.com/office/drawing/2014/main" id="{1F85D0FE-C569-AA98-BFD2-570144BC2493}"/>
+                  </a:ext>
+                </a:extLst>
+              </p:cNvPr>
+              <p:cNvSpPr/>
+              <p:nvPr/>
+            </p:nvSpPr>
+            <p:spPr>
+              <a:xfrm>
+                <a:off x="658586" y="3299495"/>
+                <a:ext cx="4540209" cy="777836"/>
+              </a:xfrm>
+              <a:prstGeom prst="roundRect">
+                <a:avLst/>
+              </a:prstGeom>
+              <a:noFill/>
+              <a:ln w="38100">
+                <a:solidFill>
+                  <a:schemeClr val="accent1"/>
+                </a:solidFill>
+              </a:ln>
+            </p:spPr>
+            <p:style>
+              <a:lnRef idx="2">
+                <a:schemeClr val="accent1">
+                  <a:shade val="15000"/>
+                </a:schemeClr>
+              </a:lnRef>
+              <a:fillRef idx="1">
+                <a:schemeClr val="accent1"/>
+              </a:fillRef>
+              <a:effectRef idx="0">
+                <a:schemeClr val="accent1"/>
+              </a:effectRef>
+              <a:fontRef idx="minor">
+                <a:schemeClr val="lt1"/>
+              </a:fontRef>
+            </p:style>
+            <p:txBody>
+              <a:bodyPr rtlCol="0" anchor="ctr"/>
+              <a:lstStyle/>
+              <a:p>
+                <a:pPr algn="ctr"/>
+                <a:r>
+                  <a:rPr lang="en-US" dirty="0">
+                    <a:solidFill>
+                      <a:schemeClr val="tx1"/>
+                    </a:solidFill>
+                  </a:rPr>
+                  <a:t>Incoming arm vacuum pipe</a:t>
+                </a:r>
+              </a:p>
+              <a:p>
+                <a:pPr algn="ctr"/>
+                <a:r>
+                  <a:rPr lang="en-US" dirty="0">
+                    <a:solidFill>
+                      <a:schemeClr val="tx1"/>
+                    </a:solidFill>
+                  </a:rPr>
+                  <a:t>(minus station gaps </a:t>
+                </a:r>
+                <a14:m>
+                  <m:oMath xmlns:m="http://schemas.openxmlformats.org/officeDocument/2006/math">
+                    <m:r>
+                      <a:rPr lang="en-US" b="0" i="1" smtClean="0">
+                        <a:solidFill>
+                          <a:schemeClr val="tx1"/>
+                        </a:solidFill>
+                        <a:latin typeface="Cambria Math" panose="02040503050406030204" pitchFamily="18" charset="0"/>
+                      </a:rPr>
+                      <m:t>∼</m:t>
+                    </m:r>
+                  </m:oMath>
+                </a14:m>
+                <a:r>
+                  <a:rPr lang="en-US" dirty="0">
+                    <a:solidFill>
+                      <a:schemeClr val="tx1"/>
+                    </a:solidFill>
+                  </a:rPr>
+                  <a:t>12 m)</a:t>
+                </a:r>
+                <a:endParaRPr lang="it-IT" dirty="0">
+                  <a:solidFill>
+                    <a:schemeClr val="tx1"/>
+                  </a:solidFill>
+                </a:endParaRPr>
+              </a:p>
+            </p:txBody>
+          </p:sp>
+        </mc:Choice>
+        <mc:Fallback>
+          <p:sp>
+            <p:nvSpPr>
+              <p:cNvPr id="35" name="Rectangle: Rounded Corners 34">
+                <a:extLst>
+                  <a:ext uri="{FF2B5EF4-FFF2-40B4-BE49-F238E27FC236}">
+                    <a16:creationId xmlns:a16="http://schemas.microsoft.com/office/drawing/2014/main" id="{1F85D0FE-C569-AA98-BFD2-570144BC2493}"/>
+                  </a:ext>
+                </a:extLst>
+              </p:cNvPr>
+              <p:cNvSpPr>
+                <a:spLocks noRot="1" noChangeAspect="1" noMove="1" noResize="1" noEditPoints="1" noAdjustHandles="1" noChangeArrowheads="1" noChangeShapeType="1" noTextEdit="1"/>
+              </p:cNvSpPr>
+              <p:nvPr/>
+            </p:nvSpPr>
+            <p:spPr>
+              <a:xfrm>
+                <a:off x="658586" y="3299495"/>
+                <a:ext cx="4540209" cy="777836"/>
+              </a:xfrm>
+              <a:prstGeom prst="roundRect">
+                <a:avLst/>
+              </a:prstGeom>
+              <a:blipFill>
+                <a:blip r:embed="rId3"/>
+                <a:stretch>
+                  <a:fillRect b="-2239"/>
+                </a:stretch>
+              </a:blipFill>
+              <a:ln w="38100">
+                <a:solidFill>
+                  <a:schemeClr val="accent1"/>
+                </a:solidFill>
+              </a:ln>
+            </p:spPr>
+            <p:txBody>
+              <a:bodyPr/>
+              <a:lstStyle/>
+              <a:p>
+                <a:r>
+                  <a:rPr lang="it-IT">
+                    <a:noFill/>
+                  </a:rPr>
+                  <a:t> </a:t>
+                </a:r>
+              </a:p>
+            </p:txBody>
+          </p:sp>
+        </mc:Fallback>
+      </mc:AlternateContent>
+      <mc:AlternateContent xmlns:mc="http://schemas.openxmlformats.org/markup-compatibility/2006">
+        <mc:Choice xmlns:a14="http://schemas.microsoft.com/office/drawing/2010/main" Requires="a14">
+          <p:sp>
+            <p:nvSpPr>
+              <p:cNvPr id="37" name="Rectangle: Rounded Corners 36">
+                <a:extLst>
+                  <a:ext uri="{FF2B5EF4-FFF2-40B4-BE49-F238E27FC236}">
+                    <a16:creationId xmlns:a16="http://schemas.microsoft.com/office/drawing/2014/main" id="{11F48CD1-0863-4C8F-C0AC-DCB07C53C10B}"/>
+                  </a:ext>
+                </a:extLst>
+              </p:cNvPr>
+              <p:cNvSpPr/>
+              <p:nvPr/>
+            </p:nvSpPr>
+            <p:spPr>
+              <a:xfrm>
+                <a:off x="7454426" y="3299494"/>
+                <a:ext cx="4035281" cy="777836"/>
+              </a:xfrm>
+              <a:prstGeom prst="roundRect">
+                <a:avLst/>
+              </a:prstGeom>
+              <a:noFill/>
+              <a:ln w="38100">
+                <a:solidFill>
+                  <a:schemeClr val="accent1"/>
+                </a:solidFill>
+              </a:ln>
+            </p:spPr>
+            <p:style>
+              <a:lnRef idx="2">
+                <a:schemeClr val="accent1">
+                  <a:shade val="15000"/>
+                </a:schemeClr>
+              </a:lnRef>
+              <a:fillRef idx="1">
+                <a:schemeClr val="accent1"/>
+              </a:fillRef>
+              <a:effectRef idx="0">
+                <a:schemeClr val="accent1"/>
+              </a:effectRef>
+              <a:fontRef idx="minor">
+                <a:schemeClr val="lt1"/>
+              </a:fontRef>
+            </p:style>
+            <p:txBody>
+              <a:bodyPr rtlCol="0" anchor="ctr"/>
+              <a:lstStyle/>
+              <a:p>
+                <a:pPr algn="ctr"/>
+                <a:r>
+                  <a:rPr lang="en-US" dirty="0">
+                    <a:solidFill>
+                      <a:schemeClr val="tx1"/>
+                    </a:solidFill>
+                  </a:rPr>
+                  <a:t>Downstream arm vacuum pipe</a:t>
+                </a:r>
+              </a:p>
+              <a:p>
+                <a:pPr algn="ctr"/>
+                <a:r>
+                  <a:rPr lang="en-US" dirty="0">
+                    <a:solidFill>
+                      <a:schemeClr val="tx1"/>
+                    </a:solidFill>
+                  </a:rPr>
+                  <a:t>(between 3</a:t>
+                </a:r>
+                <a:r>
+                  <a:rPr lang="en-US" baseline="30000" dirty="0">
+                    <a:solidFill>
+                      <a:schemeClr val="tx1"/>
+                    </a:solidFill>
+                  </a:rPr>
+                  <a:t>rd</a:t>
+                </a:r>
+                <a:r>
+                  <a:rPr lang="en-US" dirty="0">
+                    <a:solidFill>
+                      <a:schemeClr val="tx1"/>
+                    </a:solidFill>
+                  </a:rPr>
+                  <a:t> and 4</a:t>
+                </a:r>
+                <a:r>
+                  <a:rPr lang="en-US" baseline="30000" dirty="0">
+                    <a:solidFill>
+                      <a:schemeClr val="tx1"/>
+                    </a:solidFill>
+                  </a:rPr>
+                  <a:t>th</a:t>
+                </a:r>
+                <a:r>
+                  <a:rPr lang="en-US" dirty="0">
+                    <a:solidFill>
+                      <a:schemeClr val="tx1"/>
+                    </a:solidFill>
+                  </a:rPr>
+                  <a:t> stations </a:t>
+                </a:r>
+                <a14:m>
+                  <m:oMath xmlns:m="http://schemas.openxmlformats.org/officeDocument/2006/math">
+                    <m:r>
+                      <a:rPr lang="en-US" b="0" i="1" smtClean="0">
+                        <a:solidFill>
+                          <a:schemeClr val="tx1"/>
+                        </a:solidFill>
+                        <a:latin typeface="Cambria Math" panose="02040503050406030204" pitchFamily="18" charset="0"/>
+                      </a:rPr>
+                      <m:t>∼</m:t>
+                    </m:r>
+                  </m:oMath>
+                </a14:m>
+                <a:r>
+                  <a:rPr lang="en-US" dirty="0">
+                    <a:solidFill>
+                      <a:schemeClr val="tx1"/>
+                    </a:solidFill>
+                  </a:rPr>
+                  <a:t> 4 m)</a:t>
+                </a:r>
+                <a:endParaRPr lang="it-IT" dirty="0">
+                  <a:solidFill>
+                    <a:schemeClr val="tx1"/>
+                  </a:solidFill>
+                </a:endParaRPr>
+              </a:p>
+            </p:txBody>
+          </p:sp>
+        </mc:Choice>
+        <mc:Fallback>
+          <p:sp>
+            <p:nvSpPr>
+              <p:cNvPr id="37" name="Rectangle: Rounded Corners 36">
+                <a:extLst>
+                  <a:ext uri="{FF2B5EF4-FFF2-40B4-BE49-F238E27FC236}">
+                    <a16:creationId xmlns:a16="http://schemas.microsoft.com/office/drawing/2014/main" id="{11F48CD1-0863-4C8F-C0AC-DCB07C53C10B}"/>
+                  </a:ext>
+                </a:extLst>
+              </p:cNvPr>
+              <p:cNvSpPr>
+                <a:spLocks noRot="1" noChangeAspect="1" noMove="1" noResize="1" noEditPoints="1" noAdjustHandles="1" noChangeArrowheads="1" noChangeShapeType="1" noTextEdit="1"/>
+              </p:cNvSpPr>
+              <p:nvPr/>
+            </p:nvSpPr>
+            <p:spPr>
+              <a:xfrm>
+                <a:off x="7454426" y="3299494"/>
+                <a:ext cx="4035281" cy="777836"/>
+              </a:xfrm>
+              <a:prstGeom prst="roundRect">
+                <a:avLst/>
+              </a:prstGeom>
+              <a:blipFill>
+                <a:blip r:embed="rId4"/>
+                <a:stretch>
+                  <a:fillRect b="-2239"/>
+                </a:stretch>
+              </a:blipFill>
+              <a:ln w="38100">
+                <a:solidFill>
+                  <a:schemeClr val="accent1"/>
+                </a:solidFill>
+              </a:ln>
+            </p:spPr>
+            <p:txBody>
+              <a:bodyPr/>
+              <a:lstStyle/>
+              <a:p>
+                <a:r>
+                  <a:rPr lang="it-IT">
+                    <a:noFill/>
+                  </a:rPr>
+                  <a:t> </a:t>
+                </a:r>
+              </a:p>
+            </p:txBody>
+          </p:sp>
+        </mc:Fallback>
+      </mc:AlternateContent>
+      <mc:AlternateContent xmlns:mc="http://schemas.openxmlformats.org/markup-compatibility/2006">
+        <mc:Choice xmlns:a14="http://schemas.microsoft.com/office/drawing/2010/main" Requires="a14">
+          <p:sp>
+            <p:nvSpPr>
+              <p:cNvPr id="39" name="TextBox 38">
+                <a:extLst>
+                  <a:ext uri="{FF2B5EF4-FFF2-40B4-BE49-F238E27FC236}">
+                    <a16:creationId xmlns:a16="http://schemas.microsoft.com/office/drawing/2014/main" id="{6EA5FB82-6DAA-1494-AFCE-FE08709CE667}"/>
+                  </a:ext>
+                </a:extLst>
+              </p:cNvPr>
+              <p:cNvSpPr txBox="1"/>
+              <p:nvPr/>
+            </p:nvSpPr>
+            <p:spPr>
+              <a:xfrm>
+                <a:off x="696000" y="4250267"/>
+                <a:ext cx="10793707" cy="923330"/>
+              </a:xfrm>
+              <a:prstGeom prst="rect">
+                <a:avLst/>
+              </a:prstGeom>
+              <a:noFill/>
+            </p:spPr>
+            <p:txBody>
+              <a:bodyPr wrap="square" rtlCol="0">
+                <a:spAutoFit/>
+              </a:bodyPr>
+              <a:lstStyle/>
+              <a:p>
+                <a:r>
+                  <a:rPr lang="en-US" dirty="0"/>
+                  <a:t>Each station:</a:t>
+                </a:r>
+              </a:p>
+              <a:p>
+                <a:r>
+                  <a:rPr lang="en-US" dirty="0"/>
+                  <a:t>Two orthogonal strip sensors, 38x38 mm</a:t>
+                </a:r>
+                <a:r>
+                  <a:rPr lang="en-US" baseline="30000" dirty="0"/>
+                  <a:t>2</a:t>
+                </a:r>
+                <a:r>
+                  <a:rPr lang="en-US" dirty="0"/>
+                  <a:t> aperture, with </a:t>
+                </a:r>
+                <a14:m>
+                  <m:oMath xmlns:m="http://schemas.openxmlformats.org/officeDocument/2006/math">
+                    <m:r>
+                      <a:rPr lang="en-US" b="0" i="1" smtClean="0">
+                        <a:latin typeface="Cambria Math" panose="02040503050406030204" pitchFamily="18" charset="0"/>
+                      </a:rPr>
+                      <m:t>∼</m:t>
+                    </m:r>
+                  </m:oMath>
+                </a14:m>
+                <a:r>
+                  <a:rPr lang="en-US" dirty="0"/>
+                  <a:t>7 um spatial resolution </a:t>
+                </a:r>
+              </a:p>
+              <a:p>
+                <a:endParaRPr lang="it-IT" dirty="0"/>
+              </a:p>
+            </p:txBody>
+          </p:sp>
+        </mc:Choice>
+        <mc:Fallback>
+          <p:sp>
+            <p:nvSpPr>
+              <p:cNvPr id="39" name="TextBox 38">
+                <a:extLst>
+                  <a:ext uri="{FF2B5EF4-FFF2-40B4-BE49-F238E27FC236}">
+                    <a16:creationId xmlns:a16="http://schemas.microsoft.com/office/drawing/2014/main" id="{6EA5FB82-6DAA-1494-AFCE-FE08709CE667}"/>
+                  </a:ext>
+                </a:extLst>
+              </p:cNvPr>
+              <p:cNvSpPr txBox="1">
+                <a:spLocks noRot="1" noChangeAspect="1" noMove="1" noResize="1" noEditPoints="1" noAdjustHandles="1" noChangeArrowheads="1" noChangeShapeType="1" noTextEdit="1"/>
+              </p:cNvSpPr>
+              <p:nvPr/>
+            </p:nvSpPr>
+            <p:spPr>
+              <a:xfrm>
+                <a:off x="696000" y="4250267"/>
+                <a:ext cx="10793707" cy="923330"/>
+              </a:xfrm>
+              <a:prstGeom prst="rect">
+                <a:avLst/>
+              </a:prstGeom>
+              <a:blipFill>
+                <a:blip r:embed="rId5"/>
+                <a:stretch>
+                  <a:fillRect l="-452" t="-2632"/>
+                </a:stretch>
+              </a:blipFill>
+            </p:spPr>
+            <p:txBody>
+              <a:bodyPr/>
+              <a:lstStyle/>
+              <a:p>
+                <a:r>
+                  <a:rPr lang="it-IT">
+                    <a:noFill/>
+                  </a:rPr>
+                  <a:t> </a:t>
+                </a:r>
+              </a:p>
+            </p:txBody>
+          </p:sp>
+        </mc:Fallback>
+      </mc:AlternateContent>
+    </p:spTree>
+    <p:extLst>
+      <p:ext uri="{BB962C8B-B14F-4D97-AF65-F5344CB8AC3E}">
+        <p14:creationId xmlns:p14="http://schemas.microsoft.com/office/powerpoint/2010/main" val="1590739078"/>
+      </p:ext>
+    </p:extLst>
+  </p:cSld>
+  <p:clrMapOvr>
+    <a:masterClrMapping/>
+  </p:clrMapOvr>
+</p:sld>
+</file>
+
+<file path=ppt/slides/slide3.xml><?xml version="1.0" encoding="utf-8"?>
 <p:sld xmlns:a="http://schemas.openxmlformats.org/drawingml/2006/main" xmlns:r="http://schemas.openxmlformats.org/officeDocument/2006/relationships" xmlns:p="http://schemas.openxmlformats.org/presentationml/2006/main">
   <p:cSld>
     <p:spTree>
@@ -3986,7 +5959,7 @@
                   <a:srgbClr val="002060"/>
                 </a:solidFill>
               </a:rPr>
-              <a:t>	1. SCHEMATIC LAYOUT</a:t>
+              <a:t>	SCHEMATIC LAYOUT</a:t>
             </a:r>
           </a:p>
         </p:txBody>
@@ -4097,7 +6070,7 @@
                   <a:srgbClr val="002060"/>
                 </a:solidFill>
               </a:rPr>
-              <a:t>2</a:t>
+              <a:t>3</a:t>
             </a:fld>
             <a:endParaRPr lang="it-IT" sz="1500" b="1" dirty="0">
               <a:solidFill>
@@ -4585,7 +6558,7 @@
 </p:sld>
 </file>
 
-<file path=ppt/slides/slide3.xml><?xml version="1.0" encoding="utf-8"?>
+<file path=ppt/slides/slide4.xml><?xml version="1.0" encoding="utf-8"?>
 <p:sld xmlns:a="http://schemas.openxmlformats.org/drawingml/2006/main" xmlns:r="http://schemas.openxmlformats.org/officeDocument/2006/relationships" xmlns:p="http://schemas.openxmlformats.org/presentationml/2006/main">
   <p:cSld>
     <p:spTree>
@@ -4593,7 +6566,7 @@
         <p:cNvPr id="1" name="">
           <a:extLst>
             <a:ext uri="{FF2B5EF4-FFF2-40B4-BE49-F238E27FC236}">
-              <a16:creationId xmlns:a16="http://schemas.microsoft.com/office/drawing/2014/main" id="{D992FD37-CEA1-C97B-49F8-A5ACF8509DE9}"/>
+              <a16:creationId xmlns:a16="http://schemas.microsoft.com/office/drawing/2014/main" id="{6D2D15EE-E0CD-DBB8-0557-41AFA45E17F4}"/>
             </a:ext>
           </a:extLst>
         </p:cNvPr>
@@ -4613,7 +6586,7 @@
           <p:cNvPr id="2" name="Titolo 1">
             <a:extLst>
               <a:ext uri="{FF2B5EF4-FFF2-40B4-BE49-F238E27FC236}">
-                <a16:creationId xmlns:a16="http://schemas.microsoft.com/office/drawing/2014/main" id="{DF4207D9-31D6-13AA-9686-A99BC85C0698}"/>
+                <a16:creationId xmlns:a16="http://schemas.microsoft.com/office/drawing/2014/main" id="{2A4CADC3-A97E-6CE9-A43A-682A34F02C75}"/>
               </a:ext>
             </a:extLst>
           </p:cNvPr>
@@ -4643,13 +6616,18 @@
           <a:lstStyle/>
           <a:p>
             <a:r>
-              <a:rPr lang="it-IT" b="1" dirty="0">
+              <a:rPr lang="en-US" b="1" dirty="0">
                 <a:solidFill>
                   <a:srgbClr val="002060"/>
                 </a:solidFill>
               </a:rPr>
-              <a:t>	BACKUP SLIDES: SCHEMATIC LAYOUT</a:t>
-            </a:r>
+              <a:t>	VACUUM PIPES</a:t>
+            </a:r>
+            <a:endParaRPr lang="it-IT" b="1" dirty="0">
+              <a:solidFill>
+                <a:srgbClr val="002060"/>
+              </a:solidFill>
+            </a:endParaRPr>
           </a:p>
         </p:txBody>
       </p:sp>
@@ -4658,7 +6636,7 @@
           <p:cNvPr id="4" name="Segnaposto data 3">
             <a:extLst>
               <a:ext uri="{FF2B5EF4-FFF2-40B4-BE49-F238E27FC236}">
-                <a16:creationId xmlns:a16="http://schemas.microsoft.com/office/drawing/2014/main" id="{52BB27CF-B6D6-60BB-5756-012FF3C191C2}"/>
+                <a16:creationId xmlns:a16="http://schemas.microsoft.com/office/drawing/2014/main" id="{8DED9B23-6341-6217-27A2-9458D68E2882}"/>
               </a:ext>
             </a:extLst>
           </p:cNvPr>
@@ -4695,7 +6673,7 @@
           <p:cNvPr id="5" name="Segnaposto piè di pagina 4">
             <a:extLst>
               <a:ext uri="{FF2B5EF4-FFF2-40B4-BE49-F238E27FC236}">
-                <a16:creationId xmlns:a16="http://schemas.microsoft.com/office/drawing/2014/main" id="{9A975C4A-14AA-0F43-ED17-1A5E9F38A183}"/>
+                <a16:creationId xmlns:a16="http://schemas.microsoft.com/office/drawing/2014/main" id="{16628363-9935-E4B6-77DD-A483B2C3DA56}"/>
               </a:ext>
             </a:extLst>
           </p:cNvPr>
@@ -4732,7 +6710,7 @@
           <p:cNvPr id="6" name="Segnaposto numero diapositiva 5">
             <a:extLst>
               <a:ext uri="{FF2B5EF4-FFF2-40B4-BE49-F238E27FC236}">
-                <a16:creationId xmlns:a16="http://schemas.microsoft.com/office/drawing/2014/main" id="{8E5EC255-139D-00EF-EB17-A47E084EED39}"/>
+                <a16:creationId xmlns:a16="http://schemas.microsoft.com/office/drawing/2014/main" id="{B7F505CC-6018-7E71-413B-1016AEE17659}"/>
               </a:ext>
             </a:extLst>
           </p:cNvPr>
@@ -4759,7 +6737,7 @@
                   <a:srgbClr val="002060"/>
                 </a:solidFill>
               </a:rPr>
-              <a:t>3</a:t>
+              <a:t>4</a:t>
             </a:fld>
             <a:endParaRPr lang="it-IT" sz="1500" b="1" dirty="0">
               <a:solidFill>
@@ -4774,7 +6752,7 @@
           <p:cNvPr id="10" name="Connettore diritto 9">
             <a:extLst>
               <a:ext uri="{FF2B5EF4-FFF2-40B4-BE49-F238E27FC236}">
-                <a16:creationId xmlns:a16="http://schemas.microsoft.com/office/drawing/2014/main" id="{04EA6396-23FD-CF61-1132-C028A5C72DD3}"/>
+                <a16:creationId xmlns:a16="http://schemas.microsoft.com/office/drawing/2014/main" id="{E8019FF7-6D4B-2DBF-09E8-CC4A5508A71A}"/>
               </a:ext>
             </a:extLst>
           </p:cNvPr>
@@ -4817,7 +6795,7 @@
           <p:cNvPr id="13" name="CasellaDiTesto 12">
             <a:extLst>
               <a:ext uri="{FF2B5EF4-FFF2-40B4-BE49-F238E27FC236}">
-                <a16:creationId xmlns:a16="http://schemas.microsoft.com/office/drawing/2014/main" id="{F9F5A786-19D6-F0D2-6BC5-A1F75F6A1E08}"/>
+                <a16:creationId xmlns:a16="http://schemas.microsoft.com/office/drawing/2014/main" id="{2A1B56BD-FD0F-1F4B-BB59-5AFD665E3673}"/>
               </a:ext>
             </a:extLst>
           </p:cNvPr>
@@ -4849,7 +6827,7 @@
           <p:cNvPr id="15" name="CasellaDiTesto 14">
             <a:extLst>
               <a:ext uri="{FF2B5EF4-FFF2-40B4-BE49-F238E27FC236}">
-                <a16:creationId xmlns:a16="http://schemas.microsoft.com/office/drawing/2014/main" id="{A2589B15-884F-747D-C0A2-2E64396A7FA9}"/>
+                <a16:creationId xmlns:a16="http://schemas.microsoft.com/office/drawing/2014/main" id="{C62BAA7C-A2B4-88F1-D5D2-96BF5F09E297}"/>
               </a:ext>
             </a:extLst>
           </p:cNvPr>
@@ -4876,40 +6854,972 @@
           </a:p>
         </p:txBody>
       </p:sp>
-      <p:pic>
-        <p:nvPicPr>
-          <p:cNvPr id="8" name="Immagine 7">
-            <a:extLst>
-              <a:ext uri="{FF2B5EF4-FFF2-40B4-BE49-F238E27FC236}">
-                <a16:creationId xmlns:a16="http://schemas.microsoft.com/office/drawing/2014/main" id="{C016E210-1458-96DF-A3AE-53C781F6FADD}"/>
-              </a:ext>
-            </a:extLst>
-          </p:cNvPr>
-          <p:cNvPicPr>
-            <a:picLocks noChangeAspect="1"/>
-          </p:cNvPicPr>
+      <p:sp>
+        <p:nvSpPr>
+          <p:cNvPr id="7" name="Content Placeholder 6">
+            <a:extLst>
+              <a:ext uri="{FF2B5EF4-FFF2-40B4-BE49-F238E27FC236}">
+                <a16:creationId xmlns:a16="http://schemas.microsoft.com/office/drawing/2014/main" id="{86625823-FC64-FF8E-0245-89EB36B66B07}"/>
+              </a:ext>
+            </a:extLst>
+          </p:cNvPr>
+          <p:cNvSpPr>
+            <a:spLocks noGrp="1"/>
+          </p:cNvSpPr>
+          <p:nvPr>
+            <p:ph idx="1"/>
+          </p:nvPr>
+        </p:nvSpPr>
+        <p:spPr/>
+        <p:txBody>
+          <a:bodyPr/>
+          <a:lstStyle/>
+          <a:p>
+            <a:r>
+              <a:rPr lang="en-US" dirty="0"/>
+              <a:t>Vacuum pipes segments fill the arm specifically to suppress MCS in air between stations, the tracker stations themselves sit in the short breaks where a pipe segment has been removed to house the plane</a:t>
+            </a:r>
+          </a:p>
+          <a:p>
+            <a:r>
+              <a:rPr lang="en-US" dirty="0"/>
+              <a:t>In a standard UA9 5-plane layout, the longest pipe sections are between plane 1-2 and 4-5</a:t>
+            </a:r>
+          </a:p>
+          <a:p>
+            <a:r>
+              <a:rPr lang="en-US" dirty="0"/>
+              <a:t>For large bending long crystals, only 4 planes are used, and the downstream is deliberately short</a:t>
+            </a:r>
+            <a:endParaRPr lang="it-IT" dirty="0"/>
+          </a:p>
+        </p:txBody>
+      </p:sp>
+    </p:spTree>
+    <p:extLst>
+      <p:ext uri="{BB962C8B-B14F-4D97-AF65-F5344CB8AC3E}">
+        <p14:creationId xmlns:p14="http://schemas.microsoft.com/office/powerpoint/2010/main" val="2956971435"/>
+      </p:ext>
+    </p:extLst>
+  </p:cSld>
+  <p:clrMapOvr>
+    <a:masterClrMapping/>
+  </p:clrMapOvr>
+</p:sld>
+</file>
+
+<file path=ppt/slides/slide5.xml><?xml version="1.0" encoding="utf-8"?>
+<p:sld xmlns:a="http://schemas.openxmlformats.org/drawingml/2006/main" xmlns:r="http://schemas.openxmlformats.org/officeDocument/2006/relationships" xmlns:p="http://schemas.openxmlformats.org/presentationml/2006/main">
+  <p:cSld>
+    <p:spTree>
+      <p:nvGrpSpPr>
+        <p:cNvPr id="1" name="">
+          <a:extLst>
+            <a:ext uri="{FF2B5EF4-FFF2-40B4-BE49-F238E27FC236}">
+              <a16:creationId xmlns:a16="http://schemas.microsoft.com/office/drawing/2014/main" id="{ACBDDD8A-C6D1-4C4B-21AC-68BD64C2A4C3}"/>
+            </a:ext>
+          </a:extLst>
+        </p:cNvPr>
+        <p:cNvGrpSpPr/>
+        <p:nvPr/>
+      </p:nvGrpSpPr>
+      <p:grpSpPr>
+        <a:xfrm>
+          <a:off x="0" y="0"/>
+          <a:ext cx="0" cy="0"/>
+          <a:chOff x="0" y="0"/>
+          <a:chExt cx="0" cy="0"/>
+        </a:xfrm>
+      </p:grpSpPr>
+      <p:sp>
+        <p:nvSpPr>
+          <p:cNvPr id="2" name="Titolo 1">
+            <a:extLst>
+              <a:ext uri="{FF2B5EF4-FFF2-40B4-BE49-F238E27FC236}">
+                <a16:creationId xmlns:a16="http://schemas.microsoft.com/office/drawing/2014/main" id="{E5CB7661-F66C-92F0-024D-6065433ED043}"/>
+              </a:ext>
+            </a:extLst>
+          </p:cNvPr>
+          <p:cNvSpPr>
+            <a:spLocks noGrp="1"/>
+          </p:cNvSpPr>
+          <p:nvPr>
+            <p:ph type="title"/>
+          </p:nvPr>
+        </p:nvSpPr>
+        <p:spPr>
+          <a:xfrm>
+            <a:off x="38100" y="69651"/>
+            <a:ext cx="12114000" cy="1153094"/>
+          </a:xfrm>
+          <a:prstGeom prst="roundRect">
+            <a:avLst>
+              <a:gd name="adj" fmla="val 36459"/>
+            </a:avLst>
+          </a:prstGeom>
+          <a:noFill/>
+        </p:spPr>
+        <p:txBody>
+          <a:bodyPr>
+            <a:normAutofit/>
+          </a:bodyPr>
+          <a:lstStyle/>
+          <a:p>
+            <a:r>
+              <a:rPr lang="en-US" b="1" dirty="0">
+                <a:solidFill>
+                  <a:srgbClr val="002060"/>
+                </a:solidFill>
+              </a:rPr>
+              <a:t>	BEAM FEATURES</a:t>
+            </a:r>
+            <a:endParaRPr lang="it-IT" b="1" dirty="0">
+              <a:solidFill>
+                <a:srgbClr val="002060"/>
+              </a:solidFill>
+            </a:endParaRPr>
+          </a:p>
+        </p:txBody>
+      </p:sp>
+      <p:sp>
+        <p:nvSpPr>
+          <p:cNvPr id="4" name="Segnaposto data 3">
+            <a:extLst>
+              <a:ext uri="{FF2B5EF4-FFF2-40B4-BE49-F238E27FC236}">
+                <a16:creationId xmlns:a16="http://schemas.microsoft.com/office/drawing/2014/main" id="{8838580B-6807-E05A-8D3F-DC1B60A6F520}"/>
+              </a:ext>
+            </a:extLst>
+          </p:cNvPr>
+          <p:cNvSpPr>
+            <a:spLocks noGrp="1"/>
+          </p:cNvSpPr>
+          <p:nvPr>
+            <p:ph type="dt" sz="half" idx="10"/>
+          </p:nvPr>
+        </p:nvSpPr>
+        <p:spPr>
+          <a:xfrm>
+            <a:off x="838200" y="6356349"/>
+            <a:ext cx="2743200" cy="432000"/>
+          </a:xfrm>
+        </p:spPr>
+        <p:txBody>
+          <a:bodyPr/>
+          <a:lstStyle/>
+          <a:p>
+            <a:r>
+              <a:rPr lang="it-IT" sz="1500" b="1" dirty="0">
+                <a:solidFill>
+                  <a:srgbClr val="002060"/>
+                </a:solidFill>
+              </a:rPr>
+              <a:t>August 2026</a:t>
+            </a:r>
+          </a:p>
+        </p:txBody>
+      </p:sp>
+      <p:sp>
+        <p:nvSpPr>
+          <p:cNvPr id="5" name="Segnaposto piè di pagina 4">
+            <a:extLst>
+              <a:ext uri="{FF2B5EF4-FFF2-40B4-BE49-F238E27FC236}">
+                <a16:creationId xmlns:a16="http://schemas.microsoft.com/office/drawing/2014/main" id="{CF18EB59-C72F-1995-49B7-68CE68FD50B2}"/>
+              </a:ext>
+            </a:extLst>
+          </p:cNvPr>
+          <p:cNvSpPr>
+            <a:spLocks noGrp="1"/>
+          </p:cNvSpPr>
+          <p:nvPr>
+            <p:ph type="ftr" sz="quarter" idx="11"/>
+          </p:nvPr>
+        </p:nvSpPr>
+        <p:spPr>
+          <a:xfrm>
+            <a:off x="0" y="6356349"/>
+            <a:ext cx="12192000" cy="432000"/>
+          </a:xfrm>
+        </p:spPr>
+        <p:txBody>
+          <a:bodyPr/>
+          <a:lstStyle/>
+          <a:p>
+            <a:r>
+              <a:rPr lang="it-IT" sz="1500" b="1" dirty="0">
+                <a:solidFill>
+                  <a:srgbClr val="002060"/>
+                </a:solidFill>
+              </a:rPr>
+              <a:t>Anna Sofia Moro</a:t>
+            </a:r>
+          </a:p>
+        </p:txBody>
+      </p:sp>
+      <p:sp>
+        <p:nvSpPr>
+          <p:cNvPr id="6" name="Segnaposto numero diapositiva 5">
+            <a:extLst>
+              <a:ext uri="{FF2B5EF4-FFF2-40B4-BE49-F238E27FC236}">
+                <a16:creationId xmlns:a16="http://schemas.microsoft.com/office/drawing/2014/main" id="{B1C4D990-6233-7F81-A0A0-A4C5601DE10C}"/>
+              </a:ext>
+            </a:extLst>
+          </p:cNvPr>
+          <p:cNvSpPr>
+            <a:spLocks noGrp="1"/>
+          </p:cNvSpPr>
+          <p:nvPr>
+            <p:ph type="sldNum" sz="quarter" idx="12"/>
+          </p:nvPr>
+        </p:nvSpPr>
+        <p:spPr>
+          <a:xfrm>
+            <a:off x="8610600" y="6356349"/>
+            <a:ext cx="2743200" cy="432000"/>
+          </a:xfrm>
+        </p:spPr>
+        <p:txBody>
+          <a:bodyPr/>
+          <a:lstStyle/>
+          <a:p>
+            <a:fld id="{0A318BD9-CA14-4A83-ACF0-03D5918EB402}" type="slidenum">
+              <a:rPr lang="it-IT" sz="1500" b="1" smtClean="0">
+                <a:solidFill>
+                  <a:srgbClr val="002060"/>
+                </a:solidFill>
+              </a:rPr>
+              <a:t>5</a:t>
+            </a:fld>
+            <a:endParaRPr lang="it-IT" sz="1500" b="1" dirty="0">
+              <a:solidFill>
+                <a:srgbClr val="002060"/>
+              </a:solidFill>
+            </a:endParaRPr>
+          </a:p>
+        </p:txBody>
+      </p:sp>
+      <p:cxnSp>
+        <p:nvCxnSpPr>
+          <p:cNvPr id="10" name="Connettore diritto 9">
+            <a:extLst>
+              <a:ext uri="{FF2B5EF4-FFF2-40B4-BE49-F238E27FC236}">
+                <a16:creationId xmlns:a16="http://schemas.microsoft.com/office/drawing/2014/main" id="{1776552E-3363-423C-88D3-0C873F65EE56}"/>
+              </a:ext>
+            </a:extLst>
+          </p:cNvPr>
+          <p:cNvCxnSpPr>
+            <a:cxnSpLocks/>
+          </p:cNvCxnSpPr>
           <p:nvPr/>
-        </p:nvPicPr>
-        <p:blipFill>
-          <a:blip r:embed="rId2"/>
-          <a:stretch>
-            <a:fillRect/>
-          </a:stretch>
-        </p:blipFill>
-        <p:spPr>
-          <a:xfrm>
-            <a:off x="443309" y="1545256"/>
-            <a:ext cx="11303581" cy="4705592"/>
+        </p:nvCxnSpPr>
+        <p:spPr>
+          <a:xfrm>
+            <a:off x="696000" y="1155368"/>
+            <a:ext cx="10800000" cy="0"/>
+          </a:xfrm>
+          <a:prstGeom prst="line">
+            <a:avLst/>
+          </a:prstGeom>
+          <a:ln w="38100">
+            <a:solidFill>
+              <a:srgbClr val="002060"/>
+            </a:solidFill>
+          </a:ln>
+        </p:spPr>
+        <p:style>
+          <a:lnRef idx="2">
+            <a:schemeClr val="accent1"/>
+          </a:lnRef>
+          <a:fillRef idx="0">
+            <a:schemeClr val="accent1"/>
+          </a:fillRef>
+          <a:effectRef idx="1">
+            <a:schemeClr val="accent1"/>
+          </a:effectRef>
+          <a:fontRef idx="minor">
+            <a:schemeClr val="tx1"/>
+          </a:fontRef>
+        </p:style>
+      </p:cxnSp>
+      <p:sp>
+        <p:nvSpPr>
+          <p:cNvPr id="13" name="CasellaDiTesto 12">
+            <a:extLst>
+              <a:ext uri="{FF2B5EF4-FFF2-40B4-BE49-F238E27FC236}">
+                <a16:creationId xmlns:a16="http://schemas.microsoft.com/office/drawing/2014/main" id="{1A3F47DD-30B7-8E4E-053E-7AE98BA8BD04}"/>
+              </a:ext>
+            </a:extLst>
+          </p:cNvPr>
+          <p:cNvSpPr txBox="1"/>
+          <p:nvPr/>
+        </p:nvSpPr>
+        <p:spPr>
+          <a:xfrm>
+            <a:off x="3048886" y="3244334"/>
+            <a:ext cx="6097772" cy="369332"/>
           </a:xfrm>
           <a:prstGeom prst="rect">
             <a:avLst/>
           </a:prstGeom>
-        </p:spPr>
-      </p:pic>
+          <a:noFill/>
+        </p:spPr>
+        <p:txBody>
+          <a:bodyPr wrap="square">
+            <a:spAutoFit/>
+          </a:bodyPr>
+          <a:lstStyle/>
+          <a:p>
+            <a:endParaRPr lang="it-IT" dirty="0"/>
+          </a:p>
+        </p:txBody>
+      </p:sp>
+      <p:sp>
+        <p:nvSpPr>
+          <p:cNvPr id="15" name="CasellaDiTesto 14">
+            <a:extLst>
+              <a:ext uri="{FF2B5EF4-FFF2-40B4-BE49-F238E27FC236}">
+                <a16:creationId xmlns:a16="http://schemas.microsoft.com/office/drawing/2014/main" id="{769BC3FE-C49F-F470-34B1-14086521AA45}"/>
+              </a:ext>
+            </a:extLst>
+          </p:cNvPr>
+          <p:cNvSpPr txBox="1"/>
+          <p:nvPr/>
+        </p:nvSpPr>
+        <p:spPr>
+          <a:xfrm>
+            <a:off x="3048886" y="3244334"/>
+            <a:ext cx="6097772" cy="369332"/>
+          </a:xfrm>
+          <a:prstGeom prst="rect">
+            <a:avLst/>
+          </a:prstGeom>
+          <a:noFill/>
+        </p:spPr>
+        <p:txBody>
+          <a:bodyPr wrap="square">
+            <a:spAutoFit/>
+          </a:bodyPr>
+          <a:lstStyle/>
+          <a:p>
+            <a:endParaRPr lang="it-IT" dirty="0"/>
+          </a:p>
+        </p:txBody>
+      </p:sp>
+      <mc:AlternateContent xmlns:mc="http://schemas.openxmlformats.org/markup-compatibility/2006">
+        <mc:Choice xmlns:a14="http://schemas.microsoft.com/office/drawing/2010/main" Requires="a14">
+          <p:sp>
+            <p:nvSpPr>
+              <p:cNvPr id="7" name="Content Placeholder 6">
+                <a:extLst>
+                  <a:ext uri="{FF2B5EF4-FFF2-40B4-BE49-F238E27FC236}">
+                    <a16:creationId xmlns:a16="http://schemas.microsoft.com/office/drawing/2014/main" id="{B7B21722-1D56-95CA-DA80-B69AA88CEE9B}"/>
+                  </a:ext>
+                </a:extLst>
+              </p:cNvPr>
+              <p:cNvSpPr>
+                <a:spLocks noGrp="1"/>
+              </p:cNvSpPr>
+              <p:nvPr>
+                <p:ph idx="1"/>
+              </p:nvPr>
+            </p:nvSpPr>
+            <p:spPr/>
+            <p:txBody>
+              <a:bodyPr/>
+              <a:lstStyle/>
+              <a:p>
+                <a:r>
+                  <a:rPr lang="en-US" dirty="0"/>
+                  <a:t>H8 secondary beamline off the SPS, driven by 400 GeV protons.</a:t>
+                </a:r>
+              </a:p>
+              <a:p>
+                <a:r>
+                  <a:rPr lang="en-US" dirty="0"/>
+                  <a:t>Beamline operates with a beryllium target, and a spectrometer selection 180 GeV hadrons (mixed 30% </a:t>
+                </a:r>
+                <a14:m>
+                  <m:oMath xmlns:m="http://schemas.openxmlformats.org/officeDocument/2006/math">
+                    <m:sSup>
+                      <m:sSupPr>
+                        <m:ctrlPr>
+                          <a:rPr lang="en-US" b="0" i="1" smtClean="0">
+                            <a:latin typeface="Cambria Math" panose="02040503050406030204" pitchFamily="18" charset="0"/>
+                          </a:rPr>
+                        </m:ctrlPr>
+                      </m:sSupPr>
+                      <m:e>
+                        <m:r>
+                          <a:rPr lang="en-US" b="0" i="1" smtClean="0">
+                            <a:latin typeface="Cambria Math" panose="02040503050406030204" pitchFamily="18" charset="0"/>
+                          </a:rPr>
+                          <m:t>𝜋</m:t>
+                        </m:r>
+                      </m:e>
+                      <m:sup>
+                        <m:r>
+                          <a:rPr lang="en-US" b="0" i="1" smtClean="0">
+                            <a:latin typeface="Cambria Math" panose="02040503050406030204" pitchFamily="18" charset="0"/>
+                          </a:rPr>
+                          <m:t>+</m:t>
+                        </m:r>
+                      </m:sup>
+                    </m:sSup>
+                  </m:oMath>
+                </a14:m>
+                <a:r>
+                  <a:rPr lang="en-US" dirty="0"/>
+                  <a:t> and 70% </a:t>
+                </a:r>
+                <a14:m>
+                  <m:oMath xmlns:m="http://schemas.openxmlformats.org/officeDocument/2006/math">
+                    <m:r>
+                      <a:rPr lang="en-US" i="1" dirty="0" smtClean="0">
+                        <a:latin typeface="Cambria Math" panose="02040503050406030204" pitchFamily="18" charset="0"/>
+                      </a:rPr>
+                      <m:t>𝑝</m:t>
+                    </m:r>
+                  </m:oMath>
+                </a14:m>
+                <a:r>
+                  <a:rPr lang="en-US" dirty="0"/>
+                  <a:t>)</a:t>
+                </a:r>
+              </a:p>
+              <a:p>
+                <a:r>
+                  <a:rPr lang="en-US" dirty="0"/>
+                  <a:t>Beam divergence: order tens of urad</a:t>
+                </a:r>
+              </a:p>
+            </p:txBody>
+          </p:sp>
+        </mc:Choice>
+        <mc:Fallback>
+          <p:sp>
+            <p:nvSpPr>
+              <p:cNvPr id="7" name="Content Placeholder 6">
+                <a:extLst>
+                  <a:ext uri="{FF2B5EF4-FFF2-40B4-BE49-F238E27FC236}">
+                    <a16:creationId xmlns:a16="http://schemas.microsoft.com/office/drawing/2014/main" id="{B7B21722-1D56-95CA-DA80-B69AA88CEE9B}"/>
+                  </a:ext>
+                </a:extLst>
+              </p:cNvPr>
+              <p:cNvSpPr>
+                <a:spLocks noGrp="1" noRot="1" noChangeAspect="1" noMove="1" noResize="1" noEditPoints="1" noAdjustHandles="1" noChangeArrowheads="1" noChangeShapeType="1" noTextEdit="1"/>
+              </p:cNvSpPr>
+              <p:nvPr>
+                <p:ph idx="1"/>
+              </p:nvPr>
+            </p:nvSpPr>
+            <p:spPr>
+              <a:blipFill>
+                <a:blip r:embed="rId3"/>
+                <a:stretch>
+                  <a:fillRect l="-1043" t="-2381"/>
+                </a:stretch>
+              </a:blipFill>
+            </p:spPr>
+            <p:txBody>
+              <a:bodyPr/>
+              <a:lstStyle/>
+              <a:p>
+                <a:r>
+                  <a:rPr lang="it-IT">
+                    <a:noFill/>
+                  </a:rPr>
+                  <a:t> </a:t>
+                </a:r>
+              </a:p>
+            </p:txBody>
+          </p:sp>
+        </mc:Fallback>
+      </mc:AlternateContent>
     </p:spTree>
     <p:extLst>
       <p:ext uri="{BB962C8B-B14F-4D97-AF65-F5344CB8AC3E}">
-        <p14:creationId xmlns:p14="http://schemas.microsoft.com/office/powerpoint/2010/main" val="375279065"/>
+        <p14:creationId xmlns:p14="http://schemas.microsoft.com/office/powerpoint/2010/main" val="746934249"/>
+      </p:ext>
+    </p:extLst>
+  </p:cSld>
+  <p:clrMapOvr>
+    <a:masterClrMapping/>
+  </p:clrMapOvr>
+</p:sld>
+</file>
+
+<file path=ppt/slides/slide6.xml><?xml version="1.0" encoding="utf-8"?>
+<p:sld xmlns:a="http://schemas.openxmlformats.org/drawingml/2006/main" xmlns:r="http://schemas.openxmlformats.org/officeDocument/2006/relationships" xmlns:p="http://schemas.openxmlformats.org/presentationml/2006/main">
+  <p:cSld>
+    <p:spTree>
+      <p:nvGrpSpPr>
+        <p:cNvPr id="1" name="">
+          <a:extLst>
+            <a:ext uri="{FF2B5EF4-FFF2-40B4-BE49-F238E27FC236}">
+              <a16:creationId xmlns:a16="http://schemas.microsoft.com/office/drawing/2014/main" id="{D9F50383-DD46-715A-2128-48FF186981EA}"/>
+            </a:ext>
+          </a:extLst>
+        </p:cNvPr>
+        <p:cNvGrpSpPr/>
+        <p:nvPr/>
+      </p:nvGrpSpPr>
+      <p:grpSpPr>
+        <a:xfrm>
+          <a:off x="0" y="0"/>
+          <a:ext cx="0" cy="0"/>
+          <a:chOff x="0" y="0"/>
+          <a:chExt cx="0" cy="0"/>
+        </a:xfrm>
+      </p:grpSpPr>
+      <p:sp>
+        <p:nvSpPr>
+          <p:cNvPr id="2" name="Titolo 1">
+            <a:extLst>
+              <a:ext uri="{FF2B5EF4-FFF2-40B4-BE49-F238E27FC236}">
+                <a16:creationId xmlns:a16="http://schemas.microsoft.com/office/drawing/2014/main" id="{4651A739-277C-08A6-191D-5D1983872BEF}"/>
+              </a:ext>
+            </a:extLst>
+          </p:cNvPr>
+          <p:cNvSpPr>
+            <a:spLocks noGrp="1"/>
+          </p:cNvSpPr>
+          <p:nvPr>
+            <p:ph type="title"/>
+          </p:nvPr>
+        </p:nvSpPr>
+        <p:spPr>
+          <a:xfrm>
+            <a:off x="38100" y="69651"/>
+            <a:ext cx="12114000" cy="1153094"/>
+          </a:xfrm>
+          <a:prstGeom prst="roundRect">
+            <a:avLst>
+              <a:gd name="adj" fmla="val 36459"/>
+            </a:avLst>
+          </a:prstGeom>
+          <a:noFill/>
+        </p:spPr>
+        <p:txBody>
+          <a:bodyPr>
+            <a:normAutofit/>
+          </a:bodyPr>
+          <a:lstStyle/>
+          <a:p>
+            <a:r>
+              <a:rPr lang="en-US" b="1" dirty="0">
+                <a:solidFill>
+                  <a:srgbClr val="002060"/>
+                </a:solidFill>
+              </a:rPr>
+              <a:t>	TRACKERS FEATURES</a:t>
+            </a:r>
+            <a:endParaRPr lang="it-IT" b="1" dirty="0">
+              <a:solidFill>
+                <a:srgbClr val="002060"/>
+              </a:solidFill>
+            </a:endParaRPr>
+          </a:p>
+        </p:txBody>
+      </p:sp>
+      <p:sp>
+        <p:nvSpPr>
+          <p:cNvPr id="4" name="Segnaposto data 3">
+            <a:extLst>
+              <a:ext uri="{FF2B5EF4-FFF2-40B4-BE49-F238E27FC236}">
+                <a16:creationId xmlns:a16="http://schemas.microsoft.com/office/drawing/2014/main" id="{30D3479C-2585-B8E0-A5BB-0AB040277FBF}"/>
+              </a:ext>
+            </a:extLst>
+          </p:cNvPr>
+          <p:cNvSpPr>
+            <a:spLocks noGrp="1"/>
+          </p:cNvSpPr>
+          <p:nvPr>
+            <p:ph type="dt" sz="half" idx="10"/>
+          </p:nvPr>
+        </p:nvSpPr>
+        <p:spPr>
+          <a:xfrm>
+            <a:off x="838200" y="6356349"/>
+            <a:ext cx="2743200" cy="432000"/>
+          </a:xfrm>
+        </p:spPr>
+        <p:txBody>
+          <a:bodyPr/>
+          <a:lstStyle/>
+          <a:p>
+            <a:r>
+              <a:rPr lang="it-IT" sz="1500" b="1" dirty="0">
+                <a:solidFill>
+                  <a:srgbClr val="002060"/>
+                </a:solidFill>
+              </a:rPr>
+              <a:t>August 2026</a:t>
+            </a:r>
+          </a:p>
+        </p:txBody>
+      </p:sp>
+      <p:sp>
+        <p:nvSpPr>
+          <p:cNvPr id="5" name="Segnaposto piè di pagina 4">
+            <a:extLst>
+              <a:ext uri="{FF2B5EF4-FFF2-40B4-BE49-F238E27FC236}">
+                <a16:creationId xmlns:a16="http://schemas.microsoft.com/office/drawing/2014/main" id="{6107868B-9838-D7BC-9B10-A13AF81F0BCB}"/>
+              </a:ext>
+            </a:extLst>
+          </p:cNvPr>
+          <p:cNvSpPr>
+            <a:spLocks noGrp="1"/>
+          </p:cNvSpPr>
+          <p:nvPr>
+            <p:ph type="ftr" sz="quarter" idx="11"/>
+          </p:nvPr>
+        </p:nvSpPr>
+        <p:spPr>
+          <a:xfrm>
+            <a:off x="0" y="6356349"/>
+            <a:ext cx="12192000" cy="432000"/>
+          </a:xfrm>
+        </p:spPr>
+        <p:txBody>
+          <a:bodyPr/>
+          <a:lstStyle/>
+          <a:p>
+            <a:r>
+              <a:rPr lang="it-IT" sz="1500" b="1" dirty="0">
+                <a:solidFill>
+                  <a:srgbClr val="002060"/>
+                </a:solidFill>
+              </a:rPr>
+              <a:t>Anna Sofia Moro</a:t>
+            </a:r>
+          </a:p>
+        </p:txBody>
+      </p:sp>
+      <p:sp>
+        <p:nvSpPr>
+          <p:cNvPr id="6" name="Segnaposto numero diapositiva 5">
+            <a:extLst>
+              <a:ext uri="{FF2B5EF4-FFF2-40B4-BE49-F238E27FC236}">
+                <a16:creationId xmlns:a16="http://schemas.microsoft.com/office/drawing/2014/main" id="{C87488A1-9867-77D0-87CB-9378E09644C8}"/>
+              </a:ext>
+            </a:extLst>
+          </p:cNvPr>
+          <p:cNvSpPr>
+            <a:spLocks noGrp="1"/>
+          </p:cNvSpPr>
+          <p:nvPr>
+            <p:ph type="sldNum" sz="quarter" idx="12"/>
+          </p:nvPr>
+        </p:nvSpPr>
+        <p:spPr>
+          <a:xfrm>
+            <a:off x="8610600" y="6356349"/>
+            <a:ext cx="2743200" cy="432000"/>
+          </a:xfrm>
+        </p:spPr>
+        <p:txBody>
+          <a:bodyPr/>
+          <a:lstStyle/>
+          <a:p>
+            <a:fld id="{0A318BD9-CA14-4A83-ACF0-03D5918EB402}" type="slidenum">
+              <a:rPr lang="it-IT" sz="1500" b="1" smtClean="0">
+                <a:solidFill>
+                  <a:srgbClr val="002060"/>
+                </a:solidFill>
+              </a:rPr>
+              <a:t>6</a:t>
+            </a:fld>
+            <a:endParaRPr lang="it-IT" sz="1500" b="1" dirty="0">
+              <a:solidFill>
+                <a:srgbClr val="002060"/>
+              </a:solidFill>
+            </a:endParaRPr>
+          </a:p>
+        </p:txBody>
+      </p:sp>
+      <p:cxnSp>
+        <p:nvCxnSpPr>
+          <p:cNvPr id="10" name="Connettore diritto 9">
+            <a:extLst>
+              <a:ext uri="{FF2B5EF4-FFF2-40B4-BE49-F238E27FC236}">
+                <a16:creationId xmlns:a16="http://schemas.microsoft.com/office/drawing/2014/main" id="{E1BFB6FC-ACD1-9489-CBAE-09ACC6237875}"/>
+              </a:ext>
+            </a:extLst>
+          </p:cNvPr>
+          <p:cNvCxnSpPr>
+            <a:cxnSpLocks/>
+          </p:cNvCxnSpPr>
+          <p:nvPr/>
+        </p:nvCxnSpPr>
+        <p:spPr>
+          <a:xfrm>
+            <a:off x="696000" y="1155368"/>
+            <a:ext cx="10800000" cy="0"/>
+          </a:xfrm>
+          <a:prstGeom prst="line">
+            <a:avLst/>
+          </a:prstGeom>
+          <a:ln w="38100">
+            <a:solidFill>
+              <a:srgbClr val="002060"/>
+            </a:solidFill>
+          </a:ln>
+        </p:spPr>
+        <p:style>
+          <a:lnRef idx="2">
+            <a:schemeClr val="accent1"/>
+          </a:lnRef>
+          <a:fillRef idx="0">
+            <a:schemeClr val="accent1"/>
+          </a:fillRef>
+          <a:effectRef idx="1">
+            <a:schemeClr val="accent1"/>
+          </a:effectRef>
+          <a:fontRef idx="minor">
+            <a:schemeClr val="tx1"/>
+          </a:fontRef>
+        </p:style>
+      </p:cxnSp>
+      <p:sp>
+        <p:nvSpPr>
+          <p:cNvPr id="13" name="CasellaDiTesto 12">
+            <a:extLst>
+              <a:ext uri="{FF2B5EF4-FFF2-40B4-BE49-F238E27FC236}">
+                <a16:creationId xmlns:a16="http://schemas.microsoft.com/office/drawing/2014/main" id="{2F6F77B2-69FB-FD69-8D20-DBCF972EE857}"/>
+              </a:ext>
+            </a:extLst>
+          </p:cNvPr>
+          <p:cNvSpPr txBox="1"/>
+          <p:nvPr/>
+        </p:nvSpPr>
+        <p:spPr>
+          <a:xfrm>
+            <a:off x="3048886" y="3244334"/>
+            <a:ext cx="6097772" cy="369332"/>
+          </a:xfrm>
+          <a:prstGeom prst="rect">
+            <a:avLst/>
+          </a:prstGeom>
+          <a:noFill/>
+        </p:spPr>
+        <p:txBody>
+          <a:bodyPr wrap="square">
+            <a:spAutoFit/>
+          </a:bodyPr>
+          <a:lstStyle/>
+          <a:p>
+            <a:endParaRPr lang="it-IT" dirty="0"/>
+          </a:p>
+        </p:txBody>
+      </p:sp>
+      <p:sp>
+        <p:nvSpPr>
+          <p:cNvPr id="15" name="CasellaDiTesto 14">
+            <a:extLst>
+              <a:ext uri="{FF2B5EF4-FFF2-40B4-BE49-F238E27FC236}">
+                <a16:creationId xmlns:a16="http://schemas.microsoft.com/office/drawing/2014/main" id="{B48D2702-5EA9-8A48-0401-110C43A95823}"/>
+              </a:ext>
+            </a:extLst>
+          </p:cNvPr>
+          <p:cNvSpPr txBox="1"/>
+          <p:nvPr/>
+        </p:nvSpPr>
+        <p:spPr>
+          <a:xfrm>
+            <a:off x="3048886" y="3244334"/>
+            <a:ext cx="6097772" cy="369332"/>
+          </a:xfrm>
+          <a:prstGeom prst="rect">
+            <a:avLst/>
+          </a:prstGeom>
+          <a:noFill/>
+        </p:spPr>
+        <p:txBody>
+          <a:bodyPr wrap="square">
+            <a:spAutoFit/>
+          </a:bodyPr>
+          <a:lstStyle/>
+          <a:p>
+            <a:endParaRPr lang="it-IT" dirty="0"/>
+          </a:p>
+        </p:txBody>
+      </p:sp>
+      <mc:AlternateContent xmlns:mc="http://schemas.openxmlformats.org/markup-compatibility/2006">
+        <mc:Choice xmlns:a14="http://schemas.microsoft.com/office/drawing/2010/main" Requires="a14">
+          <p:sp>
+            <p:nvSpPr>
+              <p:cNvPr id="7" name="Content Placeholder 6">
+                <a:extLst>
+                  <a:ext uri="{FF2B5EF4-FFF2-40B4-BE49-F238E27FC236}">
+                    <a16:creationId xmlns:a16="http://schemas.microsoft.com/office/drawing/2014/main" id="{5780F412-520D-F03F-EFCC-12EC73667D3A}"/>
+                  </a:ext>
+                </a:extLst>
+              </p:cNvPr>
+              <p:cNvSpPr>
+                <a:spLocks noGrp="1"/>
+              </p:cNvSpPr>
+              <p:nvPr>
+                <p:ph idx="1"/>
+              </p:nvPr>
+            </p:nvSpPr>
+            <p:spPr/>
+            <p:txBody>
+              <a:bodyPr>
+                <a:normAutofit/>
+              </a:bodyPr>
+              <a:lstStyle/>
+              <a:p>
+                <a:r>
+                  <a:rPr lang="en-US" dirty="0"/>
+                  <a:t>4 silicon detectors, 2 upstream and 2 downstream used to track</a:t>
+                </a:r>
+              </a:p>
+              <a:p>
+                <a:r>
+                  <a:rPr lang="en-US" dirty="0"/>
+                  <a:t>Each station: two silicon microstrip sensors (each measures position in one dimension)</a:t>
+                </a:r>
+              </a:p>
+              <a:p>
+                <a:r>
+                  <a:rPr lang="en-US" dirty="0"/>
+                  <a:t>Each sensor: </a:t>
+                </a:r>
+              </a:p>
+              <a:p>
+                <a:pPr lvl="1"/>
+                <a:r>
+                  <a:rPr lang="en-US" dirty="0"/>
+                  <a:t>Active length 98 mm</a:t>
+                </a:r>
+              </a:p>
+              <a:p>
+                <a:pPr lvl="1"/>
+                <a:r>
+                  <a:rPr lang="en-US" dirty="0"/>
+                  <a:t>639 strips on a 60 um pitch</a:t>
+                </a:r>
+              </a:p>
+              <a:p>
+                <a:pPr lvl="1"/>
+                <a:r>
+                  <a:rPr lang="en-US" dirty="0"/>
+                  <a:t>38 x 38 mm</a:t>
+                </a:r>
+                <a:r>
+                  <a:rPr lang="en-US" baseline="30000" dirty="0"/>
+                  <a:t>2</a:t>
+                </a:r>
+                <a:r>
+                  <a:rPr lang="en-US" dirty="0"/>
+                  <a:t> aperture</a:t>
+                </a:r>
+              </a:p>
+              <a:p>
+                <a:pPr lvl="1"/>
+                <a14:m>
+                  <m:oMath xmlns:m="http://schemas.openxmlformats.org/officeDocument/2006/math">
+                    <m:r>
+                      <a:rPr lang="en-US" b="0" i="1" smtClean="0">
+                        <a:latin typeface="Cambria Math" panose="02040503050406030204" pitchFamily="18" charset="0"/>
+                      </a:rPr>
+                      <m:t>∼</m:t>
+                    </m:r>
+                  </m:oMath>
+                </a14:m>
+                <a:r>
+                  <a:rPr lang="en-US" dirty="0"/>
+                  <a:t> 7 um resolution</a:t>
+                </a:r>
+              </a:p>
+              <a:p>
+                <a:pPr lvl="1"/>
+                <a:r>
+                  <a:rPr lang="en-US" dirty="0"/>
+                  <a:t>Nominal thickness 320 </a:t>
+                </a:r>
+                <a14:m>
+                  <m:oMath xmlns:m="http://schemas.openxmlformats.org/officeDocument/2006/math">
+                    <m:r>
+                      <a:rPr lang="en-US" b="0" i="1" smtClean="0">
+                        <a:latin typeface="Cambria Math" panose="02040503050406030204" pitchFamily="18" charset="0"/>
+                      </a:rPr>
+                      <m:t>±</m:t>
+                    </m:r>
+                  </m:oMath>
+                </a14:m>
+                <a:r>
+                  <a:rPr lang="en-US" dirty="0"/>
+                  <a:t> 20 um</a:t>
+                </a:r>
+              </a:p>
+              <a:p>
+                <a:pPr lvl="1"/>
+                <a:r>
+                  <a:rPr lang="en-US" dirty="0"/>
+                  <a:t>Measured thickness 328 </a:t>
+                </a:r>
+                <a14:m>
+                  <m:oMath xmlns:m="http://schemas.openxmlformats.org/officeDocument/2006/math">
+                    <m:r>
+                      <a:rPr lang="en-US" i="1">
+                        <a:latin typeface="Cambria Math" panose="02040503050406030204" pitchFamily="18" charset="0"/>
+                      </a:rPr>
+                      <m:t>±</m:t>
+                    </m:r>
+                  </m:oMath>
+                </a14:m>
+                <a:r>
+                  <a:rPr lang="en-US" dirty="0"/>
+                  <a:t> 2 um</a:t>
+                </a:r>
+              </a:p>
+            </p:txBody>
+          </p:sp>
+        </mc:Choice>
+        <mc:Fallback>
+          <p:sp>
+            <p:nvSpPr>
+              <p:cNvPr id="7" name="Content Placeholder 6">
+                <a:extLst>
+                  <a:ext uri="{FF2B5EF4-FFF2-40B4-BE49-F238E27FC236}">
+                    <a16:creationId xmlns:a16="http://schemas.microsoft.com/office/drawing/2014/main" id="{5780F412-520D-F03F-EFCC-12EC73667D3A}"/>
+                  </a:ext>
+                </a:extLst>
+              </p:cNvPr>
+              <p:cNvSpPr>
+                <a:spLocks noGrp="1" noRot="1" noChangeAspect="1" noMove="1" noResize="1" noEditPoints="1" noAdjustHandles="1" noChangeArrowheads="1" noChangeShapeType="1" noTextEdit="1"/>
+              </p:cNvSpPr>
+              <p:nvPr>
+                <p:ph idx="1"/>
+              </p:nvPr>
+            </p:nvSpPr>
+            <p:spPr>
+              <a:blipFill>
+                <a:blip r:embed="rId3"/>
+                <a:stretch>
+                  <a:fillRect l="-1043" t="-2381" b="-700"/>
+                </a:stretch>
+              </a:blipFill>
+            </p:spPr>
+            <p:txBody>
+              <a:bodyPr/>
+              <a:lstStyle/>
+              <a:p>
+                <a:r>
+                  <a:rPr lang="it-IT">
+                    <a:noFill/>
+                  </a:rPr>
+                  <a:t> </a:t>
+                </a:r>
+              </a:p>
+            </p:txBody>
+          </p:sp>
+        </mc:Fallback>
+      </mc:AlternateContent>
+    </p:spTree>
+    <p:extLst>
+      <p:ext uri="{BB962C8B-B14F-4D97-AF65-F5344CB8AC3E}">
+        <p14:creationId xmlns:p14="http://schemas.microsoft.com/office/powerpoint/2010/main" val="3387754651"/>
       </p:ext>
     </p:extLst>
   </p:cSld>
@@ -5232,4 +8142,319 @@
     </a:ext>
   </a:extLst>
 </a:theme>
+</file>
+
+<file path=ppt/theme/theme2.xml><?xml version="1.0" encoding="utf-8"?>
+<a:theme xmlns:a="http://schemas.openxmlformats.org/drawingml/2006/main" name="Office Theme">
+  <a:themeElements>
+    <a:clrScheme name="Office">
+      <a:dk1>
+        <a:sysClr val="windowText" lastClr="000000"/>
+      </a:dk1>
+      <a:lt1>
+        <a:sysClr val="window" lastClr="FFFFFF"/>
+      </a:lt1>
+      <a:dk2>
+        <a:srgbClr val="0E2841"/>
+      </a:dk2>
+      <a:lt2>
+        <a:srgbClr val="E8E8E8"/>
+      </a:lt2>
+      <a:accent1>
+        <a:srgbClr val="156082"/>
+      </a:accent1>
+      <a:accent2>
+        <a:srgbClr val="E97132"/>
+      </a:accent2>
+      <a:accent3>
+        <a:srgbClr val="196B24"/>
+      </a:accent3>
+      <a:accent4>
+        <a:srgbClr val="0F9ED5"/>
+      </a:accent4>
+      <a:accent5>
+        <a:srgbClr val="A02B93"/>
+      </a:accent5>
+      <a:accent6>
+        <a:srgbClr val="4EA72E"/>
+      </a:accent6>
+      <a:hlink>
+        <a:srgbClr val="467886"/>
+      </a:hlink>
+      <a:folHlink>
+        <a:srgbClr val="96607D"/>
+      </a:folHlink>
+    </a:clrScheme>
+    <a:fontScheme name="Office">
+      <a:majorFont>
+        <a:latin typeface="Aptos Display" panose="02110004020202020204"/>
+        <a:ea typeface=""/>
+        <a:cs typeface=""/>
+        <a:font script="Jpan" typeface="游ゴシック Light"/>
+        <a:font script="Hang" typeface="맑은 고딕"/>
+        <a:font script="Hans" typeface="等线 Light"/>
+        <a:font script="Hant" typeface="新細明體"/>
+        <a:font script="Arab" typeface="Times New Roman"/>
+        <a:font script="Hebr" typeface="Times New Roman"/>
+        <a:font script="Thai" typeface="Angsana New"/>
+        <a:font script="Ethi" typeface="Nyala"/>
+        <a:font script="Beng" typeface="Vrinda"/>
+        <a:font script="Gujr" typeface="Shruti"/>
+        <a:font script="Khmr" typeface="MoolBoran"/>
+        <a:font script="Knda" typeface="Tunga"/>
+        <a:font script="Guru" typeface="Raavi"/>
+        <a:font script="Cans" typeface="Euphemia"/>
+        <a:font script="Cher" typeface="Plantagenet Cherokee"/>
+        <a:font script="Yiii" typeface="Microsoft Yi Baiti"/>
+        <a:font script="Tibt" typeface="Microsoft Himalaya"/>
+        <a:font script="Thaa" typeface="MV Boli"/>
+        <a:font script="Deva" typeface="Mangal"/>
+        <a:font script="Telu" typeface="Gautami"/>
+        <a:font script="Taml" typeface="Latha"/>
+        <a:font script="Syrc" typeface="Estrangelo Edessa"/>
+        <a:font script="Orya" typeface="Kalinga"/>
+        <a:font script="Mlym" typeface="Kartika"/>
+        <a:font script="Laoo" typeface="DokChampa"/>
+        <a:font script="Sinh" typeface="Iskoola Pota"/>
+        <a:font script="Mong" typeface="Mongolian Baiti"/>
+        <a:font script="Viet" typeface="Times New Roman"/>
+        <a:font script="Uigh" typeface="Microsoft Uighur"/>
+        <a:font script="Geor" typeface="Sylfaen"/>
+        <a:font script="Armn" typeface="Arial"/>
+        <a:font script="Bugi" typeface="Leelawadee UI"/>
+        <a:font script="Bopo" typeface="Microsoft JhengHei"/>
+        <a:font script="Java" typeface="Javanese Text"/>
+        <a:font script="Lisu" typeface="Segoe UI"/>
+        <a:font script="Mymr" typeface="Myanmar Text"/>
+        <a:font script="Nkoo" typeface="Ebrima"/>
+        <a:font script="Olck" typeface="Nirmala UI"/>
+        <a:font script="Osma" typeface="Ebrima"/>
+        <a:font script="Phag" typeface="Phagspa"/>
+        <a:font script="Syrn" typeface="Estrangelo Edessa"/>
+        <a:font script="Syrj" typeface="Estrangelo Edessa"/>
+        <a:font script="Syre" typeface="Estrangelo Edessa"/>
+        <a:font script="Sora" typeface="Nirmala UI"/>
+        <a:font script="Tale" typeface="Microsoft Tai Le"/>
+        <a:font script="Talu" typeface="Microsoft New Tai Lue"/>
+        <a:font script="Tfng" typeface="Ebrima"/>
+      </a:majorFont>
+      <a:minorFont>
+        <a:latin typeface="Aptos" panose="02110004020202020204"/>
+        <a:ea typeface=""/>
+        <a:cs typeface=""/>
+        <a:font script="Jpan" typeface="游ゴシック"/>
+        <a:font script="Hang" typeface="맑은 고딕"/>
+        <a:font script="Hans" typeface="等线"/>
+        <a:font script="Hant" typeface="新細明體"/>
+        <a:font script="Arab" typeface="Arial"/>
+        <a:font script="Hebr" typeface="Arial"/>
+        <a:font script="Thai" typeface="Cordia New"/>
+        <a:font script="Ethi" typeface="Nyala"/>
+        <a:font script="Beng" typeface="Vrinda"/>
+        <a:font script="Gujr" typeface="Shruti"/>
+        <a:font script="Khmr" typeface="DaunPenh"/>
+        <a:font script="Knda" typeface="Tunga"/>
+        <a:font script="Guru" typeface="Raavi"/>
+        <a:font script="Cans" typeface="Euphemia"/>
+        <a:font script="Cher" typeface="Plantagenet Cherokee"/>
+        <a:font script="Yiii" typeface="Microsoft Yi Baiti"/>
+        <a:font script="Tibt" typeface="Microsoft Himalaya"/>
+        <a:font script="Thaa" typeface="MV Boli"/>
+        <a:font script="Deva" typeface="Mangal"/>
+        <a:font script="Telu" typeface="Gautami"/>
+        <a:font script="Taml" typeface="Latha"/>
+        <a:font script="Syrc" typeface="Estrangelo Edessa"/>
+        <a:font script="Orya" typeface="Kalinga"/>
+        <a:font script="Mlym" typeface="Kartika"/>
+        <a:font script="Laoo" typeface="DokChampa"/>
+        <a:font script="Sinh" typeface="Iskoola Pota"/>
+        <a:font script="Mong" typeface="Mongolian Baiti"/>
+        <a:font script="Viet" typeface="Arial"/>
+        <a:font script="Uigh" typeface="Microsoft Uighur"/>
+        <a:font script="Geor" typeface="Sylfaen"/>
+        <a:font script="Armn" typeface="Arial"/>
+        <a:font script="Bugi" typeface="Leelawadee UI"/>
+        <a:font script="Bopo" typeface="Microsoft JhengHei"/>
+        <a:font script="Java" typeface="Javanese Text"/>
+        <a:font script="Lisu" typeface="Segoe UI"/>
+        <a:font script="Mymr" typeface="Myanmar Text"/>
+        <a:font script="Nkoo" typeface="Ebrima"/>
+        <a:font script="Olck" typeface="Nirmala UI"/>
+        <a:font script="Osma" typeface="Ebrima"/>
+        <a:font script="Phag" typeface="Phagspa"/>
+        <a:font script="Syrn" typeface="Estrangelo Edessa"/>
+        <a:font script="Syrj" typeface="Estrangelo Edessa"/>
+        <a:font script="Syre" typeface="Estrangelo Edessa"/>
+        <a:font script="Sora" typeface="Nirmala UI"/>
+        <a:font script="Tale" typeface="Microsoft Tai Le"/>
+        <a:font script="Talu" typeface="Microsoft New Tai Lue"/>
+        <a:font script="Tfng" typeface="Ebrima"/>
+      </a:minorFont>
+    </a:fontScheme>
+    <a:fmtScheme name="Office">
+      <a:fillStyleLst>
+        <a:solidFill>
+          <a:schemeClr val="phClr"/>
+        </a:solidFill>
+        <a:gradFill rotWithShape="1">
+          <a:gsLst>
+            <a:gs pos="0">
+              <a:schemeClr val="phClr">
+                <a:lumMod val="110000"/>
+                <a:satMod val="105000"/>
+                <a:tint val="67000"/>
+              </a:schemeClr>
+            </a:gs>
+            <a:gs pos="50000">
+              <a:schemeClr val="phClr">
+                <a:lumMod val="105000"/>
+                <a:satMod val="103000"/>
+                <a:tint val="73000"/>
+              </a:schemeClr>
+            </a:gs>
+            <a:gs pos="100000">
+              <a:schemeClr val="phClr">
+                <a:lumMod val="105000"/>
+                <a:satMod val="109000"/>
+                <a:tint val="81000"/>
+              </a:schemeClr>
+            </a:gs>
+          </a:gsLst>
+          <a:lin ang="5400000" scaled="0"/>
+        </a:gradFill>
+        <a:gradFill rotWithShape="1">
+          <a:gsLst>
+            <a:gs pos="0">
+              <a:schemeClr val="phClr">
+                <a:satMod val="103000"/>
+                <a:lumMod val="102000"/>
+                <a:tint val="94000"/>
+              </a:schemeClr>
+            </a:gs>
+            <a:gs pos="50000">
+              <a:schemeClr val="phClr">
+                <a:satMod val="110000"/>
+                <a:lumMod val="100000"/>
+                <a:shade val="100000"/>
+              </a:schemeClr>
+            </a:gs>
+            <a:gs pos="100000">
+              <a:schemeClr val="phClr">
+                <a:lumMod val="99000"/>
+                <a:satMod val="120000"/>
+                <a:shade val="78000"/>
+              </a:schemeClr>
+            </a:gs>
+          </a:gsLst>
+          <a:lin ang="5400000" scaled="0"/>
+        </a:gradFill>
+      </a:fillStyleLst>
+      <a:lnStyleLst>
+        <a:ln w="12700" cap="flat" cmpd="sng" algn="ctr">
+          <a:solidFill>
+            <a:schemeClr val="phClr"/>
+          </a:solidFill>
+          <a:prstDash val="solid"/>
+          <a:miter lim="800000"/>
+        </a:ln>
+        <a:ln w="19050" cap="flat" cmpd="sng" algn="ctr">
+          <a:solidFill>
+            <a:schemeClr val="phClr"/>
+          </a:solidFill>
+          <a:prstDash val="solid"/>
+          <a:miter lim="800000"/>
+        </a:ln>
+        <a:ln w="25400" cap="flat" cmpd="sng" algn="ctr">
+          <a:solidFill>
+            <a:schemeClr val="phClr"/>
+          </a:solidFill>
+          <a:prstDash val="solid"/>
+          <a:miter lim="800000"/>
+        </a:ln>
+      </a:lnStyleLst>
+      <a:effectStyleLst>
+        <a:effectStyle>
+          <a:effectLst/>
+        </a:effectStyle>
+        <a:effectStyle>
+          <a:effectLst/>
+        </a:effectStyle>
+        <a:effectStyle>
+          <a:effectLst>
+            <a:outerShdw blurRad="57150" dist="19050" dir="5400000" algn="ctr" rotWithShape="0">
+              <a:srgbClr val="000000">
+                <a:alpha val="63000"/>
+              </a:srgbClr>
+            </a:outerShdw>
+          </a:effectLst>
+        </a:effectStyle>
+      </a:effectStyleLst>
+      <a:bgFillStyleLst>
+        <a:solidFill>
+          <a:schemeClr val="phClr"/>
+        </a:solidFill>
+        <a:solidFill>
+          <a:schemeClr val="phClr">
+            <a:tint val="95000"/>
+            <a:satMod val="170000"/>
+          </a:schemeClr>
+        </a:solidFill>
+        <a:gradFill rotWithShape="1">
+          <a:gsLst>
+            <a:gs pos="0">
+              <a:schemeClr val="phClr">
+                <a:tint val="93000"/>
+                <a:satMod val="150000"/>
+                <a:shade val="98000"/>
+                <a:lumMod val="102000"/>
+              </a:schemeClr>
+            </a:gs>
+            <a:gs pos="50000">
+              <a:schemeClr val="phClr">
+                <a:tint val="98000"/>
+                <a:satMod val="130000"/>
+                <a:shade val="90000"/>
+                <a:lumMod val="103000"/>
+              </a:schemeClr>
+            </a:gs>
+            <a:gs pos="100000">
+              <a:schemeClr val="phClr">
+                <a:shade val="63000"/>
+                <a:satMod val="120000"/>
+              </a:schemeClr>
+            </a:gs>
+          </a:gsLst>
+          <a:lin ang="5400000" scaled="0"/>
+        </a:gradFill>
+      </a:bgFillStyleLst>
+    </a:fmtScheme>
+  </a:themeElements>
+  <a:objectDefaults>
+    <a:lnDef>
+      <a:spPr/>
+      <a:bodyPr/>
+      <a:lstStyle/>
+      <a:style>
+        <a:lnRef idx="2">
+          <a:schemeClr val="accent1"/>
+        </a:lnRef>
+        <a:fillRef idx="0">
+          <a:schemeClr val="accent1"/>
+        </a:fillRef>
+        <a:effectRef idx="1">
+          <a:schemeClr val="accent1"/>
+        </a:effectRef>
+        <a:fontRef idx="minor">
+          <a:schemeClr val="tx1"/>
+        </a:fontRef>
+      </a:style>
+    </a:lnDef>
+  </a:objectDefaults>
+  <a:extraClrSchemeLst/>
+  <a:extLst>
+    <a:ext uri="{05A4C25C-085E-4340-85A3-A5531E510DB2}">
+      <thm15:themeFamily xmlns:thm15="http://schemas.microsoft.com/office/thememl/2012/main" name="Office Theme" id="{2E142A2C-CD16-42D6-873A-C26D2A0506FA}" vid="{1BDDFF52-6CD6-40A5-AB3C-68EB2F1E4D0A}"/>
+    </a:ext>
+  </a:extLst>
+</a:theme>
 </file>
--- a/slides/layout.pptx
+++ b/slides/layout.pptx
@@ -5244,12 +5244,130 @@
           </a:p>
         </p:txBody>
       </p:sp>
+      <p:sp>
+        <p:nvSpPr>
+          <p:cNvPr id="35" name="Rectangle: Rounded Corners 34">
+            <a:extLst>
+              <a:ext uri="{FF2B5EF4-FFF2-40B4-BE49-F238E27FC236}">
+                <a16:creationId xmlns:a16="http://schemas.microsoft.com/office/drawing/2014/main" id="{1F85D0FE-C569-AA98-BFD2-570144BC2493}"/>
+              </a:ext>
+            </a:extLst>
+          </p:cNvPr>
+          <p:cNvSpPr/>
+          <p:nvPr/>
+        </p:nvSpPr>
+        <p:spPr>
+          <a:xfrm>
+            <a:off x="2740837" y="5485255"/>
+            <a:ext cx="3060934" cy="777836"/>
+          </a:xfrm>
+          <a:prstGeom prst="roundRect">
+            <a:avLst/>
+          </a:prstGeom>
+          <a:noFill/>
+          <a:ln w="38100">
+            <a:solidFill>
+              <a:schemeClr val="accent1"/>
+            </a:solidFill>
+          </a:ln>
+        </p:spPr>
+        <p:style>
+          <a:lnRef idx="2">
+            <a:schemeClr val="accent1">
+              <a:shade val="15000"/>
+            </a:schemeClr>
+          </a:lnRef>
+          <a:fillRef idx="1">
+            <a:schemeClr val="accent1"/>
+          </a:fillRef>
+          <a:effectRef idx="0">
+            <a:schemeClr val="accent1"/>
+          </a:effectRef>
+          <a:fontRef idx="minor">
+            <a:schemeClr val="lt1"/>
+          </a:fontRef>
+        </p:style>
+        <p:txBody>
+          <a:bodyPr rtlCol="0" anchor="ctr"/>
+          <a:lstStyle/>
+          <a:p>
+            <a:pPr algn="ctr"/>
+            <a:r>
+              <a:rPr lang="en-US" dirty="0">
+                <a:solidFill>
+                  <a:schemeClr val="tx1"/>
+                </a:solidFill>
+              </a:rPr>
+              <a:t>Incoming arm vacuum pipe</a:t>
+            </a:r>
+          </a:p>
+        </p:txBody>
+      </p:sp>
+      <p:sp>
+        <p:nvSpPr>
+          <p:cNvPr id="37" name="Rectangle: Rounded Corners 36">
+            <a:extLst>
+              <a:ext uri="{FF2B5EF4-FFF2-40B4-BE49-F238E27FC236}">
+                <a16:creationId xmlns:a16="http://schemas.microsoft.com/office/drawing/2014/main" id="{11F48CD1-0863-4C8F-C0AC-DCB07C53C10B}"/>
+              </a:ext>
+            </a:extLst>
+          </p:cNvPr>
+          <p:cNvSpPr/>
+          <p:nvPr/>
+        </p:nvSpPr>
+        <p:spPr>
+          <a:xfrm>
+            <a:off x="6590985" y="5485255"/>
+            <a:ext cx="3433300" cy="777836"/>
+          </a:xfrm>
+          <a:prstGeom prst="roundRect">
+            <a:avLst/>
+          </a:prstGeom>
+          <a:noFill/>
+          <a:ln w="38100">
+            <a:solidFill>
+              <a:schemeClr val="accent1"/>
+            </a:solidFill>
+          </a:ln>
+        </p:spPr>
+        <p:style>
+          <a:lnRef idx="2">
+            <a:schemeClr val="accent1">
+              <a:shade val="15000"/>
+            </a:schemeClr>
+          </a:lnRef>
+          <a:fillRef idx="1">
+            <a:schemeClr val="accent1"/>
+          </a:fillRef>
+          <a:effectRef idx="0">
+            <a:schemeClr val="accent1"/>
+          </a:effectRef>
+          <a:fontRef idx="minor">
+            <a:schemeClr val="lt1"/>
+          </a:fontRef>
+        </p:style>
+        <p:txBody>
+          <a:bodyPr rtlCol="0" anchor="ctr"/>
+          <a:lstStyle/>
+          <a:p>
+            <a:pPr algn="ctr"/>
+            <a:r>
+              <a:rPr lang="en-US" dirty="0">
+                <a:solidFill>
+                  <a:schemeClr val="tx1"/>
+                </a:solidFill>
+              </a:rPr>
+              <a:t>Downstream arm vacuum pipe</a:t>
+            </a:r>
+          </a:p>
+        </p:txBody>
+      </p:sp>
       <p:grpSp>
         <p:nvGrpSpPr>
-          <p:cNvPr id="38" name="Group 37">
-            <a:extLst>
-              <a:ext uri="{FF2B5EF4-FFF2-40B4-BE49-F238E27FC236}">
-                <a16:creationId xmlns:a16="http://schemas.microsoft.com/office/drawing/2014/main" id="{0EEB8EA7-D22E-D56F-1E21-CA849C000DDB}"/>
+          <p:cNvPr id="44" name="Group 43">
+            <a:extLst>
+              <a:ext uri="{FF2B5EF4-FFF2-40B4-BE49-F238E27FC236}">
+                <a16:creationId xmlns:a16="http://schemas.microsoft.com/office/drawing/2014/main" id="{698D6E1D-B587-F8F6-07D7-328F0D43AA3D}"/>
               </a:ext>
             </a:extLst>
           </p:cNvPr>
@@ -5258,18 +5376,18 @@
         </p:nvGrpSpPr>
         <p:grpSpPr>
           <a:xfrm>
-            <a:off x="658586" y="1576920"/>
-            <a:ext cx="10930058" cy="384929"/>
-            <a:chOff x="658586" y="2575987"/>
-            <a:chExt cx="10930058" cy="384929"/>
+            <a:off x="401771" y="3429000"/>
+            <a:ext cx="11379989" cy="1629275"/>
+            <a:chOff x="658586" y="3936191"/>
+            <a:chExt cx="11379989" cy="1629275"/>
           </a:xfrm>
         </p:grpSpPr>
         <p:cxnSp>
           <p:nvCxnSpPr>
-            <p:cNvPr id="29" name="Straight Arrow Connector 28">
+            <p:cNvPr id="7" name="Straight Arrow Connector 6">
               <a:extLst>
                 <a:ext uri="{FF2B5EF4-FFF2-40B4-BE49-F238E27FC236}">
-                  <a16:creationId xmlns:a16="http://schemas.microsoft.com/office/drawing/2014/main" id="{17EC9734-F563-AD02-9A00-53DBC6E88949}"/>
+                  <a16:creationId xmlns:a16="http://schemas.microsoft.com/office/drawing/2014/main" id="{F79BBDFA-E4CA-D3B2-4D78-E57706BA8F27}"/>
                 </a:ext>
               </a:extLst>
             </p:cNvPr>
@@ -5280,8 +5398,8 @@
           </p:nvCxnSpPr>
           <p:spPr>
             <a:xfrm>
-              <a:off x="658586" y="2960916"/>
-              <a:ext cx="10837414" cy="0"/>
+              <a:off x="658586" y="4973562"/>
+              <a:ext cx="10800000" cy="0"/>
             </a:xfrm>
             <a:prstGeom prst="straightConnector1">
               <a:avLst/>
@@ -5291,7 +5409,7 @@
                 <a:schemeClr val="tx1"/>
               </a:solidFill>
               <a:headEnd type="none" w="med" len="med"/>
-              <a:tailEnd type="triangle" w="med" len="med"/>
+              <a:tailEnd type="arrow" w="med" len="med"/>
             </a:ln>
           </p:spPr>
           <p:style>
@@ -5309,14 +5427,500 @@
             </a:fontRef>
           </p:style>
         </p:cxnSp>
+        <p:sp>
+          <p:nvSpPr>
+            <p:cNvPr id="9" name="Rectangle: Rounded Corners 8">
+              <a:extLst>
+                <a:ext uri="{FF2B5EF4-FFF2-40B4-BE49-F238E27FC236}">
+                  <a16:creationId xmlns:a16="http://schemas.microsoft.com/office/drawing/2014/main" id="{1E4228AB-141A-A392-8988-D12EAA0C03BE}"/>
+                </a:ext>
+              </a:extLst>
+            </p:cNvPr>
+            <p:cNvSpPr/>
+            <p:nvPr/>
+          </p:nvSpPr>
+          <p:spPr>
+            <a:xfrm>
+              <a:off x="1426029" y="4434836"/>
+              <a:ext cx="174171" cy="1130630"/>
+            </a:xfrm>
+            <a:prstGeom prst="roundRect">
+              <a:avLst/>
+            </a:prstGeom>
+            <a:solidFill>
+              <a:srgbClr val="FFC000"/>
+            </a:solidFill>
+            <a:ln>
+              <a:solidFill>
+                <a:srgbClr val="FFC000"/>
+              </a:solidFill>
+            </a:ln>
+          </p:spPr>
+          <p:style>
+            <a:lnRef idx="2">
+              <a:schemeClr val="accent1">
+                <a:shade val="15000"/>
+              </a:schemeClr>
+            </a:lnRef>
+            <a:fillRef idx="1">
+              <a:schemeClr val="accent1"/>
+            </a:fillRef>
+            <a:effectRef idx="0">
+              <a:schemeClr val="accent1"/>
+            </a:effectRef>
+            <a:fontRef idx="minor">
+              <a:schemeClr val="lt1"/>
+            </a:fontRef>
+          </p:style>
+          <p:txBody>
+            <a:bodyPr rtlCol="0" anchor="ctr"/>
+            <a:lstStyle/>
+            <a:p>
+              <a:pPr algn="ctr"/>
+              <a:endParaRPr lang="it-IT"/>
+            </a:p>
+          </p:txBody>
+        </p:sp>
+        <p:sp>
+          <p:nvSpPr>
+            <p:cNvPr id="12" name="Rectangle: Rounded Corners 11">
+              <a:extLst>
+                <a:ext uri="{FF2B5EF4-FFF2-40B4-BE49-F238E27FC236}">
+                  <a16:creationId xmlns:a16="http://schemas.microsoft.com/office/drawing/2014/main" id="{3333B110-1C10-5F2F-1244-95B57A49D9C7}"/>
+                </a:ext>
+              </a:extLst>
+            </p:cNvPr>
+            <p:cNvSpPr/>
+            <p:nvPr/>
+          </p:nvSpPr>
+          <p:spPr>
+            <a:xfrm>
+              <a:off x="2367643" y="4434836"/>
+              <a:ext cx="174171" cy="1130630"/>
+            </a:xfrm>
+            <a:prstGeom prst="roundRect">
+              <a:avLst/>
+            </a:prstGeom>
+            <a:solidFill>
+              <a:srgbClr val="FFC000"/>
+            </a:solidFill>
+            <a:ln>
+              <a:solidFill>
+                <a:srgbClr val="FFC000"/>
+              </a:solidFill>
+            </a:ln>
+          </p:spPr>
+          <p:style>
+            <a:lnRef idx="2">
+              <a:schemeClr val="accent1">
+                <a:shade val="15000"/>
+              </a:schemeClr>
+            </a:lnRef>
+            <a:fillRef idx="1">
+              <a:schemeClr val="accent1"/>
+            </a:fillRef>
+            <a:effectRef idx="0">
+              <a:schemeClr val="accent1"/>
+            </a:effectRef>
+            <a:fontRef idx="minor">
+              <a:schemeClr val="lt1"/>
+            </a:fontRef>
+          </p:style>
+          <p:txBody>
+            <a:bodyPr rtlCol="0" anchor="ctr"/>
+            <a:lstStyle/>
+            <a:p>
+              <a:pPr algn="ctr"/>
+              <a:endParaRPr lang="it-IT"/>
+            </a:p>
+          </p:txBody>
+        </p:sp>
+        <p:sp>
+          <p:nvSpPr>
+            <p:cNvPr id="16" name="Rectangle: Rounded Corners 15">
+              <a:extLst>
+                <a:ext uri="{FF2B5EF4-FFF2-40B4-BE49-F238E27FC236}">
+                  <a16:creationId xmlns:a16="http://schemas.microsoft.com/office/drawing/2014/main" id="{69175891-15C6-D445-D99D-79A521952D9A}"/>
+                </a:ext>
+              </a:extLst>
+            </p:cNvPr>
+            <p:cNvSpPr/>
+            <p:nvPr/>
+          </p:nvSpPr>
+          <p:spPr>
+            <a:xfrm>
+              <a:off x="6673629" y="4434836"/>
+              <a:ext cx="174171" cy="1130630"/>
+            </a:xfrm>
+            <a:prstGeom prst="roundRect">
+              <a:avLst/>
+            </a:prstGeom>
+            <a:solidFill>
+              <a:srgbClr val="FFC000"/>
+            </a:solidFill>
+            <a:ln>
+              <a:solidFill>
+                <a:srgbClr val="FFC000"/>
+              </a:solidFill>
+            </a:ln>
+          </p:spPr>
+          <p:style>
+            <a:lnRef idx="2">
+              <a:schemeClr val="accent1">
+                <a:shade val="15000"/>
+              </a:schemeClr>
+            </a:lnRef>
+            <a:fillRef idx="1">
+              <a:schemeClr val="accent1"/>
+            </a:fillRef>
+            <a:effectRef idx="0">
+              <a:schemeClr val="accent1"/>
+            </a:effectRef>
+            <a:fontRef idx="minor">
+              <a:schemeClr val="lt1"/>
+            </a:fontRef>
+          </p:style>
+          <p:txBody>
+            <a:bodyPr rtlCol="0" anchor="ctr"/>
+            <a:lstStyle/>
+            <a:p>
+              <a:pPr algn="ctr"/>
+              <a:endParaRPr lang="it-IT"/>
+            </a:p>
+          </p:txBody>
+        </p:sp>
+        <p:sp>
+          <p:nvSpPr>
+            <p:cNvPr id="18" name="Rectangle: Rounded Corners 17">
+              <a:extLst>
+                <a:ext uri="{FF2B5EF4-FFF2-40B4-BE49-F238E27FC236}">
+                  <a16:creationId xmlns:a16="http://schemas.microsoft.com/office/drawing/2014/main" id="{61493E57-5D00-058D-B38F-4AEE81470707}"/>
+                </a:ext>
+              </a:extLst>
+            </p:cNvPr>
+            <p:cNvSpPr/>
+            <p:nvPr/>
+          </p:nvSpPr>
+          <p:spPr>
+            <a:xfrm>
+              <a:off x="8523514" y="4419238"/>
+              <a:ext cx="174171" cy="1130630"/>
+            </a:xfrm>
+            <a:prstGeom prst="roundRect">
+              <a:avLst/>
+            </a:prstGeom>
+            <a:solidFill>
+              <a:srgbClr val="FFC000"/>
+            </a:solidFill>
+            <a:ln>
+              <a:solidFill>
+                <a:srgbClr val="FFC000"/>
+              </a:solidFill>
+            </a:ln>
+          </p:spPr>
+          <p:style>
+            <a:lnRef idx="2">
+              <a:schemeClr val="accent1">
+                <a:shade val="15000"/>
+              </a:schemeClr>
+            </a:lnRef>
+            <a:fillRef idx="1">
+              <a:schemeClr val="accent1"/>
+            </a:fillRef>
+            <a:effectRef idx="0">
+              <a:schemeClr val="accent1"/>
+            </a:effectRef>
+            <a:fontRef idx="minor">
+              <a:schemeClr val="lt1"/>
+            </a:fontRef>
+          </p:style>
+          <p:txBody>
+            <a:bodyPr rtlCol="0" anchor="ctr"/>
+            <a:lstStyle/>
+            <a:p>
+              <a:pPr algn="ctr"/>
+              <a:endParaRPr lang="it-IT"/>
+            </a:p>
+          </p:txBody>
+        </p:sp>
+        <p:sp>
+          <p:nvSpPr>
+            <p:cNvPr id="20" name="Rectangle: Rounded Corners 19">
+              <a:extLst>
+                <a:ext uri="{FF2B5EF4-FFF2-40B4-BE49-F238E27FC236}">
+                  <a16:creationId xmlns:a16="http://schemas.microsoft.com/office/drawing/2014/main" id="{2F643138-287C-5536-5A0B-C75F72E12EF6}"/>
+                </a:ext>
+              </a:extLst>
+            </p:cNvPr>
+            <p:cNvSpPr/>
+            <p:nvPr/>
+          </p:nvSpPr>
+          <p:spPr>
+            <a:xfrm>
+              <a:off x="10428857" y="4434836"/>
+              <a:ext cx="174171" cy="1130630"/>
+            </a:xfrm>
+            <a:prstGeom prst="roundRect">
+              <a:avLst/>
+            </a:prstGeom>
+            <a:solidFill>
+              <a:srgbClr val="FFC000"/>
+            </a:solidFill>
+            <a:ln>
+              <a:solidFill>
+                <a:srgbClr val="FFC000"/>
+              </a:solidFill>
+            </a:ln>
+          </p:spPr>
+          <p:style>
+            <a:lnRef idx="2">
+              <a:schemeClr val="accent1">
+                <a:shade val="15000"/>
+              </a:schemeClr>
+            </a:lnRef>
+            <a:fillRef idx="1">
+              <a:schemeClr val="accent1"/>
+            </a:fillRef>
+            <a:effectRef idx="0">
+              <a:schemeClr val="accent1"/>
+            </a:effectRef>
+            <a:fontRef idx="minor">
+              <a:schemeClr val="lt1"/>
+            </a:fontRef>
+          </p:style>
+          <p:txBody>
+            <a:bodyPr rtlCol="0" anchor="ctr"/>
+            <a:lstStyle/>
+            <a:p>
+              <a:pPr algn="ctr"/>
+              <a:endParaRPr lang="it-IT"/>
+            </a:p>
+          </p:txBody>
+        </p:sp>
+        <p:sp>
+          <p:nvSpPr>
+            <p:cNvPr id="23" name="Rectangle: Rounded Corners 22">
+              <a:extLst>
+                <a:ext uri="{FF2B5EF4-FFF2-40B4-BE49-F238E27FC236}">
+                  <a16:creationId xmlns:a16="http://schemas.microsoft.com/office/drawing/2014/main" id="{D6370486-EF26-3AF2-4A68-075A7B3BC08B}"/>
+                </a:ext>
+              </a:extLst>
+            </p:cNvPr>
+            <p:cNvSpPr/>
+            <p:nvPr/>
+          </p:nvSpPr>
+          <p:spPr>
+            <a:xfrm>
+              <a:off x="2693528" y="4660626"/>
+              <a:ext cx="3419422" cy="625871"/>
+            </a:xfrm>
+            <a:prstGeom prst="roundRect">
+              <a:avLst/>
+            </a:prstGeom>
+            <a:solidFill>
+              <a:schemeClr val="accent1"/>
+            </a:solidFill>
+            <a:ln>
+              <a:solidFill>
+                <a:schemeClr val="accent1"/>
+              </a:solidFill>
+            </a:ln>
+          </p:spPr>
+          <p:style>
+            <a:lnRef idx="2">
+              <a:schemeClr val="accent1">
+                <a:shade val="15000"/>
+              </a:schemeClr>
+            </a:lnRef>
+            <a:fillRef idx="1">
+              <a:schemeClr val="accent1"/>
+            </a:fillRef>
+            <a:effectRef idx="0">
+              <a:schemeClr val="accent1"/>
+            </a:effectRef>
+            <a:fontRef idx="minor">
+              <a:schemeClr val="lt1"/>
+            </a:fontRef>
+          </p:style>
+          <p:txBody>
+            <a:bodyPr rtlCol="0" anchor="ctr"/>
+            <a:lstStyle/>
+            <a:p>
+              <a:pPr algn="ctr"/>
+              <a:endParaRPr lang="it-IT"/>
+            </a:p>
+          </p:txBody>
+        </p:sp>
+        <p:sp>
+          <p:nvSpPr>
+            <p:cNvPr id="27" name="Rectangle: Rounded Corners 26">
+              <a:extLst>
+                <a:ext uri="{FF2B5EF4-FFF2-40B4-BE49-F238E27FC236}">
+                  <a16:creationId xmlns:a16="http://schemas.microsoft.com/office/drawing/2014/main" id="{5F8ED58A-372D-827C-7F8B-F81AFE3615CA}"/>
+                </a:ext>
+              </a:extLst>
+            </p:cNvPr>
+            <p:cNvSpPr/>
+            <p:nvPr/>
+          </p:nvSpPr>
+          <p:spPr>
+            <a:xfrm>
+              <a:off x="7002266" y="4660625"/>
+              <a:ext cx="1366781" cy="625871"/>
+            </a:xfrm>
+            <a:prstGeom prst="roundRect">
+              <a:avLst/>
+            </a:prstGeom>
+            <a:solidFill>
+              <a:schemeClr val="accent1"/>
+            </a:solidFill>
+            <a:ln>
+              <a:solidFill>
+                <a:schemeClr val="accent1"/>
+              </a:solidFill>
+            </a:ln>
+          </p:spPr>
+          <p:style>
+            <a:lnRef idx="2">
+              <a:schemeClr val="accent1">
+                <a:shade val="15000"/>
+              </a:schemeClr>
+            </a:lnRef>
+            <a:fillRef idx="1">
+              <a:schemeClr val="accent1"/>
+            </a:fillRef>
+            <a:effectRef idx="0">
+              <a:schemeClr val="accent1"/>
+            </a:effectRef>
+            <a:fontRef idx="minor">
+              <a:schemeClr val="lt1"/>
+            </a:fontRef>
+          </p:style>
+          <p:txBody>
+            <a:bodyPr rtlCol="0" anchor="ctr"/>
+            <a:lstStyle/>
+            <a:p>
+              <a:pPr algn="ctr"/>
+              <a:endParaRPr lang="it-IT"/>
+            </a:p>
+          </p:txBody>
+        </p:sp>
+        <p:sp>
+          <p:nvSpPr>
+            <p:cNvPr id="32" name="Rectangle: Rounded Corners 31">
+              <a:extLst>
+                <a:ext uri="{FF2B5EF4-FFF2-40B4-BE49-F238E27FC236}">
+                  <a16:creationId xmlns:a16="http://schemas.microsoft.com/office/drawing/2014/main" id="{C76AAFBB-9626-88EA-00D6-7954A0C0AFDA}"/>
+                </a:ext>
+              </a:extLst>
+            </p:cNvPr>
+            <p:cNvSpPr/>
+            <p:nvPr/>
+          </p:nvSpPr>
+          <p:spPr>
+            <a:xfrm>
+              <a:off x="8889908" y="4660624"/>
+              <a:ext cx="1366781" cy="625871"/>
+            </a:xfrm>
+            <a:prstGeom prst="roundRect">
+              <a:avLst/>
+            </a:prstGeom>
+            <a:solidFill>
+              <a:schemeClr val="accent1"/>
+            </a:solidFill>
+            <a:ln>
+              <a:solidFill>
+                <a:schemeClr val="accent1"/>
+              </a:solidFill>
+            </a:ln>
+          </p:spPr>
+          <p:style>
+            <a:lnRef idx="2">
+              <a:schemeClr val="accent1">
+                <a:shade val="15000"/>
+              </a:schemeClr>
+            </a:lnRef>
+            <a:fillRef idx="1">
+              <a:schemeClr val="accent1"/>
+            </a:fillRef>
+            <a:effectRef idx="0">
+              <a:schemeClr val="accent1"/>
+            </a:effectRef>
+            <a:fontRef idx="minor">
+              <a:schemeClr val="lt1"/>
+            </a:fontRef>
+          </p:style>
+          <p:txBody>
+            <a:bodyPr rtlCol="0" anchor="ctr"/>
+            <a:lstStyle/>
+            <a:p>
+              <a:pPr algn="ctr"/>
+              <a:endParaRPr lang="it-IT"/>
+            </a:p>
+          </p:txBody>
+        </p:sp>
+        <p:sp>
+          <p:nvSpPr>
+            <p:cNvPr id="36" name="Rectangle: Rounded Corners 35">
+              <a:extLst>
+                <a:ext uri="{FF2B5EF4-FFF2-40B4-BE49-F238E27FC236}">
+                  <a16:creationId xmlns:a16="http://schemas.microsoft.com/office/drawing/2014/main" id="{91CB113D-C53D-FB48-569B-9ED897091C42}"/>
+                </a:ext>
+              </a:extLst>
+            </p:cNvPr>
+            <p:cNvSpPr/>
+            <p:nvPr/>
+          </p:nvSpPr>
+          <p:spPr>
+            <a:xfrm>
+              <a:off x="6306204" y="4604500"/>
+              <a:ext cx="174171" cy="760103"/>
+            </a:xfrm>
+            <a:prstGeom prst="roundRect">
+              <a:avLst/>
+            </a:prstGeom>
+            <a:solidFill>
+              <a:schemeClr val="accent4"/>
+            </a:solidFill>
+            <a:ln>
+              <a:solidFill>
+                <a:schemeClr val="accent4"/>
+              </a:solidFill>
+            </a:ln>
+          </p:spPr>
+          <p:style>
+            <a:lnRef idx="2">
+              <a:schemeClr val="accent1">
+                <a:shade val="15000"/>
+              </a:schemeClr>
+            </a:lnRef>
+            <a:fillRef idx="1">
+              <a:schemeClr val="accent1"/>
+            </a:fillRef>
+            <a:effectRef idx="0">
+              <a:schemeClr val="accent1"/>
+            </a:effectRef>
+            <a:fontRef idx="minor">
+              <a:schemeClr val="lt1"/>
+            </a:fontRef>
+          </p:style>
+          <p:txBody>
+            <a:bodyPr rtlCol="0" anchor="ctr"/>
+            <a:lstStyle/>
+            <a:p>
+              <a:pPr algn="ctr"/>
+              <a:endParaRPr lang="it-IT"/>
+            </a:p>
+          </p:txBody>
+        </p:sp>
         <mc:AlternateContent xmlns:mc="http://schemas.openxmlformats.org/markup-compatibility/2006">
           <mc:Choice xmlns:a14="http://schemas.microsoft.com/office/drawing/2010/main" Requires="a14">
             <p:sp>
               <p:nvSpPr>
-                <p:cNvPr id="31" name="TextBox 30">
+                <p:cNvPr id="41" name="TextBox 40">
                   <a:extLst>
                     <a:ext uri="{FF2B5EF4-FFF2-40B4-BE49-F238E27FC236}">
-                      <a16:creationId xmlns:a16="http://schemas.microsoft.com/office/drawing/2014/main" id="{274633E8-EDC2-1504-2368-0F6B7756A6F9}"/>
+                      <a16:creationId xmlns:a16="http://schemas.microsoft.com/office/drawing/2014/main" id="{5F3A5ED9-9156-7D0A-A69C-C5BC6E44CFAA}"/>
                     </a:ext>
                   </a:extLst>
                 </p:cNvPr>
@@ -5325,7 +5929,7 @@
               </p:nvSpPr>
               <p:spPr>
                 <a:xfrm>
-                  <a:off x="11118956" y="2575987"/>
+                  <a:off x="11118956" y="4475958"/>
                   <a:ext cx="469688" cy="369332"/>
                 </a:xfrm>
                 <a:prstGeom prst="rect">
@@ -5339,6 +5943,7 @@
                 </a:bodyPr>
                 <a:lstStyle/>
                 <a:p>
+                  <a:pPr/>
                   <a14:m>
                     <m:oMathPara xmlns:m="http://schemas.openxmlformats.org/officeDocument/2006/math">
                       <m:oMath>
@@ -5359,10 +5964,10 @@
           <mc:Fallback>
             <p:sp>
               <p:nvSpPr>
-                <p:cNvPr id="31" name="TextBox 30">
+                <p:cNvPr id="41" name="TextBox 40">
                   <a:extLst>
                     <a:ext uri="{FF2B5EF4-FFF2-40B4-BE49-F238E27FC236}">
-                      <a16:creationId xmlns:a16="http://schemas.microsoft.com/office/drawing/2014/main" id="{274633E8-EDC2-1504-2368-0F6B7756A6F9}"/>
+                      <a16:creationId xmlns:a16="http://schemas.microsoft.com/office/drawing/2014/main" id="{5F3A5ED9-9156-7D0A-A69C-C5BC6E44CFAA}"/>
                     </a:ext>
                   </a:extLst>
                 </p:cNvPr>
@@ -5373,7 +5978,7 @@
               </p:nvSpPr>
               <p:spPr>
                 <a:xfrm>
-                  <a:off x="11118956" y="2575987"/>
+                  <a:off x="11118956" y="4475958"/>
                   <a:ext cx="469688" cy="369332"/>
                 </a:xfrm>
                 <a:prstGeom prst="rect">
@@ -5403,10 +6008,10 @@
         </mc:AlternateContent>
         <p:sp>
           <p:nvSpPr>
-            <p:cNvPr id="33" name="TextBox 32">
+            <p:cNvPr id="43" name="TextBox 42">
               <a:extLst>
                 <a:ext uri="{FF2B5EF4-FFF2-40B4-BE49-F238E27FC236}">
-                  <a16:creationId xmlns:a16="http://schemas.microsoft.com/office/drawing/2014/main" id="{880A5DF1-743A-EA5C-EE6B-AFF0957A6FC6}"/>
+                  <a16:creationId xmlns:a16="http://schemas.microsoft.com/office/drawing/2014/main" id="{39685CF0-FAD7-F521-35BA-EFA05D5DB957}"/>
                 </a:ext>
               </a:extLst>
             </p:cNvPr>
@@ -5415,8 +6020,8 @@
           </p:nvSpPr>
           <p:spPr>
             <a:xfrm>
-              <a:off x="701337" y="2575987"/>
-              <a:ext cx="4197233" cy="369332"/>
+              <a:off x="10671794" y="3936191"/>
+              <a:ext cx="1366781" cy="646331"/>
             </a:xfrm>
             <a:prstGeom prst="rect">
               <a:avLst/>
@@ -5429,460 +6034,399 @@
             </a:bodyPr>
             <a:lstStyle/>
             <a:p>
-              <a:pPr/>
+              <a:pPr algn="ctr"/>
               <a:r>
                 <a:rPr lang="en-US" b="1" dirty="0"/>
-                <a:t>Beam direction</a:t>
+                <a:t>Beam</a:t>
+              </a:r>
+            </a:p>
+            <a:p>
+              <a:pPr algn="ctr"/>
+              <a:r>
+                <a:rPr lang="en-US" b="1" dirty="0"/>
+                <a:t>direction</a:t>
               </a:r>
               <a:endParaRPr lang="it-IT" b="1" dirty="0"/>
             </a:p>
           </p:txBody>
         </p:sp>
       </p:grpSp>
-      <mc:AlternateContent xmlns:mc="http://schemas.openxmlformats.org/markup-compatibility/2006">
-        <mc:Choice xmlns:a14="http://schemas.microsoft.com/office/drawing/2010/main" Requires="a14">
-          <p:sp>
-            <p:nvSpPr>
-              <p:cNvPr id="35" name="Rectangle: Rounded Corners 34">
-                <a:extLst>
-                  <a:ext uri="{FF2B5EF4-FFF2-40B4-BE49-F238E27FC236}">
-                    <a16:creationId xmlns:a16="http://schemas.microsoft.com/office/drawing/2014/main" id="{1F85D0FE-C569-AA98-BFD2-570144BC2493}"/>
-                  </a:ext>
-                </a:extLst>
-              </p:cNvPr>
-              <p:cNvSpPr/>
-              <p:nvPr/>
-            </p:nvSpPr>
-            <p:spPr>
-              <a:xfrm>
-                <a:off x="658586" y="3299495"/>
-                <a:ext cx="4540209" cy="777836"/>
-              </a:xfrm>
-              <a:prstGeom prst="roundRect">
-                <a:avLst/>
-              </a:prstGeom>
-              <a:noFill/>
-              <a:ln w="38100">
-                <a:solidFill>
-                  <a:schemeClr val="accent1"/>
-                </a:solidFill>
-              </a:ln>
-            </p:spPr>
-            <p:style>
-              <a:lnRef idx="2">
-                <a:schemeClr val="accent1">
-                  <a:shade val="15000"/>
-                </a:schemeClr>
-              </a:lnRef>
-              <a:fillRef idx="1">
-                <a:schemeClr val="accent1"/>
-              </a:fillRef>
-              <a:effectRef idx="0">
-                <a:schemeClr val="accent1"/>
-              </a:effectRef>
-              <a:fontRef idx="minor">
-                <a:schemeClr val="lt1"/>
-              </a:fontRef>
-            </p:style>
-            <p:txBody>
-              <a:bodyPr rtlCol="0" anchor="ctr"/>
-              <a:lstStyle/>
-              <a:p>
-                <a:pPr algn="ctr"/>
-                <a:r>
-                  <a:rPr lang="en-US" dirty="0">
-                    <a:solidFill>
-                      <a:schemeClr val="tx1"/>
-                    </a:solidFill>
-                  </a:rPr>
-                  <a:t>Incoming arm vacuum pipe</a:t>
-                </a:r>
-              </a:p>
-              <a:p>
-                <a:pPr algn="ctr"/>
-                <a:r>
-                  <a:rPr lang="en-US" dirty="0">
-                    <a:solidFill>
-                      <a:schemeClr val="tx1"/>
-                    </a:solidFill>
-                  </a:rPr>
-                  <a:t>(minus station gaps </a:t>
-                </a:r>
-                <a14:m>
-                  <m:oMath xmlns:m="http://schemas.openxmlformats.org/officeDocument/2006/math">
-                    <m:r>
-                      <a:rPr lang="en-US" b="0" i="1" smtClean="0">
-                        <a:solidFill>
-                          <a:schemeClr val="tx1"/>
-                        </a:solidFill>
-                        <a:latin typeface="Cambria Math" panose="02040503050406030204" pitchFamily="18" charset="0"/>
-                      </a:rPr>
-                      <m:t>∼</m:t>
-                    </m:r>
-                  </m:oMath>
-                </a14:m>
-                <a:r>
-                  <a:rPr lang="en-US" dirty="0">
-                    <a:solidFill>
-                      <a:schemeClr val="tx1"/>
-                    </a:solidFill>
-                  </a:rPr>
-                  <a:t>12 m)</a:t>
-                </a:r>
-                <a:endParaRPr lang="it-IT" dirty="0">
-                  <a:solidFill>
-                    <a:schemeClr val="tx1"/>
-                  </a:solidFill>
-                </a:endParaRPr>
-              </a:p>
-            </p:txBody>
-          </p:sp>
-        </mc:Choice>
-        <mc:Fallback>
-          <p:sp>
-            <p:nvSpPr>
-              <p:cNvPr id="35" name="Rectangle: Rounded Corners 34">
-                <a:extLst>
-                  <a:ext uri="{FF2B5EF4-FFF2-40B4-BE49-F238E27FC236}">
-                    <a16:creationId xmlns:a16="http://schemas.microsoft.com/office/drawing/2014/main" id="{1F85D0FE-C569-AA98-BFD2-570144BC2493}"/>
-                  </a:ext>
-                </a:extLst>
-              </p:cNvPr>
-              <p:cNvSpPr>
-                <a:spLocks noRot="1" noChangeAspect="1" noMove="1" noResize="1" noEditPoints="1" noAdjustHandles="1" noChangeArrowheads="1" noChangeShapeType="1" noTextEdit="1"/>
-              </p:cNvSpPr>
-              <p:nvPr/>
-            </p:nvSpPr>
-            <p:spPr>
-              <a:xfrm>
-                <a:off x="658586" y="3299495"/>
-                <a:ext cx="4540209" cy="777836"/>
-              </a:xfrm>
-              <a:prstGeom prst="roundRect">
-                <a:avLst/>
-              </a:prstGeom>
-              <a:blipFill>
-                <a:blip r:embed="rId3"/>
-                <a:stretch>
-                  <a:fillRect b="-2239"/>
-                </a:stretch>
-              </a:blipFill>
-              <a:ln w="38100">
-                <a:solidFill>
-                  <a:schemeClr val="accent1"/>
-                </a:solidFill>
-              </a:ln>
-            </p:spPr>
-            <p:txBody>
-              <a:bodyPr/>
-              <a:lstStyle/>
-              <a:p>
-                <a:r>
-                  <a:rPr lang="it-IT">
-                    <a:noFill/>
-                  </a:rPr>
-                  <a:t> </a:t>
-                </a:r>
-              </a:p>
-            </p:txBody>
-          </p:sp>
-        </mc:Fallback>
-      </mc:AlternateContent>
-      <mc:AlternateContent xmlns:mc="http://schemas.openxmlformats.org/markup-compatibility/2006">
-        <mc:Choice xmlns:a14="http://schemas.microsoft.com/office/drawing/2010/main" Requires="a14">
-          <p:sp>
-            <p:nvSpPr>
-              <p:cNvPr id="37" name="Rectangle: Rounded Corners 36">
-                <a:extLst>
-                  <a:ext uri="{FF2B5EF4-FFF2-40B4-BE49-F238E27FC236}">
-                    <a16:creationId xmlns:a16="http://schemas.microsoft.com/office/drawing/2014/main" id="{11F48CD1-0863-4C8F-C0AC-DCB07C53C10B}"/>
-                  </a:ext>
-                </a:extLst>
-              </p:cNvPr>
-              <p:cNvSpPr/>
-              <p:nvPr/>
-            </p:nvSpPr>
-            <p:spPr>
-              <a:xfrm>
-                <a:off x="7454426" y="3299494"/>
-                <a:ext cx="4035281" cy="777836"/>
-              </a:xfrm>
-              <a:prstGeom prst="roundRect">
-                <a:avLst/>
-              </a:prstGeom>
-              <a:noFill/>
-              <a:ln w="38100">
-                <a:solidFill>
-                  <a:schemeClr val="accent1"/>
-                </a:solidFill>
-              </a:ln>
-            </p:spPr>
-            <p:style>
-              <a:lnRef idx="2">
-                <a:schemeClr val="accent1">
-                  <a:shade val="15000"/>
-                </a:schemeClr>
-              </a:lnRef>
-              <a:fillRef idx="1">
-                <a:schemeClr val="accent1"/>
-              </a:fillRef>
-              <a:effectRef idx="0">
-                <a:schemeClr val="accent1"/>
-              </a:effectRef>
-              <a:fontRef idx="minor">
-                <a:schemeClr val="lt1"/>
-              </a:fontRef>
-            </p:style>
-            <p:txBody>
-              <a:bodyPr rtlCol="0" anchor="ctr"/>
-              <a:lstStyle/>
-              <a:p>
-                <a:pPr algn="ctr"/>
-                <a:r>
-                  <a:rPr lang="en-US" dirty="0">
-                    <a:solidFill>
-                      <a:schemeClr val="tx1"/>
-                    </a:solidFill>
-                  </a:rPr>
-                  <a:t>Downstream arm vacuum pipe</a:t>
-                </a:r>
-              </a:p>
-              <a:p>
-                <a:pPr algn="ctr"/>
-                <a:r>
-                  <a:rPr lang="en-US" dirty="0">
-                    <a:solidFill>
-                      <a:schemeClr val="tx1"/>
-                    </a:solidFill>
-                  </a:rPr>
-                  <a:t>(between 3</a:t>
-                </a:r>
-                <a:r>
-                  <a:rPr lang="en-US" baseline="30000" dirty="0">
-                    <a:solidFill>
-                      <a:schemeClr val="tx1"/>
-                    </a:solidFill>
-                  </a:rPr>
-                  <a:t>rd</a:t>
-                </a:r>
-                <a:r>
-                  <a:rPr lang="en-US" dirty="0">
-                    <a:solidFill>
-                      <a:schemeClr val="tx1"/>
-                    </a:solidFill>
-                  </a:rPr>
-                  <a:t> and 4</a:t>
-                </a:r>
-                <a:r>
-                  <a:rPr lang="en-US" baseline="30000" dirty="0">
-                    <a:solidFill>
-                      <a:schemeClr val="tx1"/>
-                    </a:solidFill>
-                  </a:rPr>
-                  <a:t>th</a:t>
-                </a:r>
-                <a:r>
-                  <a:rPr lang="en-US" dirty="0">
-                    <a:solidFill>
-                      <a:schemeClr val="tx1"/>
-                    </a:solidFill>
-                  </a:rPr>
-                  <a:t> stations </a:t>
-                </a:r>
-                <a14:m>
-                  <m:oMath xmlns:m="http://schemas.openxmlformats.org/officeDocument/2006/math">
-                    <m:r>
-                      <a:rPr lang="en-US" b="0" i="1" smtClean="0">
-                        <a:solidFill>
-                          <a:schemeClr val="tx1"/>
-                        </a:solidFill>
-                        <a:latin typeface="Cambria Math" panose="02040503050406030204" pitchFamily="18" charset="0"/>
-                      </a:rPr>
-                      <m:t>∼</m:t>
-                    </m:r>
-                  </m:oMath>
-                </a14:m>
-                <a:r>
-                  <a:rPr lang="en-US" dirty="0">
-                    <a:solidFill>
-                      <a:schemeClr val="tx1"/>
-                    </a:solidFill>
-                  </a:rPr>
-                  <a:t> 4 m)</a:t>
-                </a:r>
-                <a:endParaRPr lang="it-IT" dirty="0">
-                  <a:solidFill>
-                    <a:schemeClr val="tx1"/>
-                  </a:solidFill>
-                </a:endParaRPr>
-              </a:p>
-            </p:txBody>
-          </p:sp>
-        </mc:Choice>
-        <mc:Fallback>
-          <p:sp>
-            <p:nvSpPr>
-              <p:cNvPr id="37" name="Rectangle: Rounded Corners 36">
-                <a:extLst>
-                  <a:ext uri="{FF2B5EF4-FFF2-40B4-BE49-F238E27FC236}">
-                    <a16:creationId xmlns:a16="http://schemas.microsoft.com/office/drawing/2014/main" id="{11F48CD1-0863-4C8F-C0AC-DCB07C53C10B}"/>
-                  </a:ext>
-                </a:extLst>
-              </p:cNvPr>
-              <p:cNvSpPr>
-                <a:spLocks noRot="1" noChangeAspect="1" noMove="1" noResize="1" noEditPoints="1" noAdjustHandles="1" noChangeArrowheads="1" noChangeShapeType="1" noTextEdit="1"/>
-              </p:cNvSpPr>
-              <p:nvPr/>
-            </p:nvSpPr>
-            <p:spPr>
-              <a:xfrm>
-                <a:off x="7454426" y="3299494"/>
-                <a:ext cx="4035281" cy="777836"/>
-              </a:xfrm>
-              <a:prstGeom prst="roundRect">
-                <a:avLst/>
-              </a:prstGeom>
-              <a:blipFill>
-                <a:blip r:embed="rId4"/>
-                <a:stretch>
-                  <a:fillRect b="-2239"/>
-                </a:stretch>
-              </a:blipFill>
-              <a:ln w="38100">
-                <a:solidFill>
-                  <a:schemeClr val="accent1"/>
-                </a:solidFill>
-              </a:ln>
-            </p:spPr>
-            <p:txBody>
-              <a:bodyPr/>
-              <a:lstStyle/>
-              <a:p>
-                <a:r>
-                  <a:rPr lang="it-IT">
-                    <a:noFill/>
-                  </a:rPr>
-                  <a:t> </a:t>
-                </a:r>
-              </a:p>
-            </p:txBody>
-          </p:sp>
-        </mc:Fallback>
-      </mc:AlternateContent>
-      <mc:AlternateContent xmlns:mc="http://schemas.openxmlformats.org/markup-compatibility/2006">
-        <mc:Choice xmlns:a14="http://schemas.microsoft.com/office/drawing/2010/main" Requires="a14">
-          <p:sp>
-            <p:nvSpPr>
-              <p:cNvPr id="39" name="TextBox 38">
-                <a:extLst>
-                  <a:ext uri="{FF2B5EF4-FFF2-40B4-BE49-F238E27FC236}">
-                    <a16:creationId xmlns:a16="http://schemas.microsoft.com/office/drawing/2014/main" id="{6EA5FB82-6DAA-1494-AFCE-FE08709CE667}"/>
-                  </a:ext>
-                </a:extLst>
-              </p:cNvPr>
-              <p:cNvSpPr txBox="1"/>
-              <p:nvPr/>
-            </p:nvSpPr>
-            <p:spPr>
-              <a:xfrm>
-                <a:off x="696000" y="4250267"/>
-                <a:ext cx="10793707" cy="923330"/>
-              </a:xfrm>
-              <a:prstGeom prst="rect">
-                <a:avLst/>
-              </a:prstGeom>
-              <a:noFill/>
-            </p:spPr>
-            <p:txBody>
-              <a:bodyPr wrap="square" rtlCol="0">
-                <a:spAutoFit/>
-              </a:bodyPr>
-              <a:lstStyle/>
-              <a:p>
-                <a:r>
-                  <a:rPr lang="en-US" dirty="0"/>
-                  <a:t>Each station:</a:t>
-                </a:r>
-              </a:p>
-              <a:p>
-                <a:r>
-                  <a:rPr lang="en-US" dirty="0"/>
-                  <a:t>Two orthogonal strip sensors, 38x38 mm</a:t>
-                </a:r>
-                <a:r>
-                  <a:rPr lang="en-US" baseline="30000" dirty="0"/>
-                  <a:t>2</a:t>
-                </a:r>
-                <a:r>
-                  <a:rPr lang="en-US" dirty="0"/>
-                  <a:t> aperture, with </a:t>
-                </a:r>
-                <a14:m>
-                  <m:oMath xmlns:m="http://schemas.openxmlformats.org/officeDocument/2006/math">
-                    <m:r>
-                      <a:rPr lang="en-US" b="0" i="1" smtClean="0">
-                        <a:latin typeface="Cambria Math" panose="02040503050406030204" pitchFamily="18" charset="0"/>
-                      </a:rPr>
-                      <m:t>∼</m:t>
-                    </m:r>
-                  </m:oMath>
-                </a14:m>
-                <a:r>
-                  <a:rPr lang="en-US" dirty="0"/>
-                  <a:t>7 um spatial resolution </a:t>
-                </a:r>
-              </a:p>
-              <a:p>
-                <a:endParaRPr lang="it-IT" dirty="0"/>
-              </a:p>
-            </p:txBody>
-          </p:sp>
-        </mc:Choice>
-        <mc:Fallback>
-          <p:sp>
-            <p:nvSpPr>
-              <p:cNvPr id="39" name="TextBox 38">
-                <a:extLst>
-                  <a:ext uri="{FF2B5EF4-FFF2-40B4-BE49-F238E27FC236}">
-                    <a16:creationId xmlns:a16="http://schemas.microsoft.com/office/drawing/2014/main" id="{6EA5FB82-6DAA-1494-AFCE-FE08709CE667}"/>
-                  </a:ext>
-                </a:extLst>
-              </p:cNvPr>
-              <p:cNvSpPr txBox="1">
-                <a:spLocks noRot="1" noChangeAspect="1" noMove="1" noResize="1" noEditPoints="1" noAdjustHandles="1" noChangeArrowheads="1" noChangeShapeType="1" noTextEdit="1"/>
-              </p:cNvSpPr>
-              <p:nvPr/>
-            </p:nvSpPr>
-            <p:spPr>
-              <a:xfrm>
-                <a:off x="696000" y="4250267"/>
-                <a:ext cx="10793707" cy="923330"/>
-              </a:xfrm>
-              <a:prstGeom prst="rect">
-                <a:avLst/>
-              </a:prstGeom>
-              <a:blipFill>
-                <a:blip r:embed="rId5"/>
-                <a:stretch>
-                  <a:fillRect l="-452" t="-2632"/>
-                </a:stretch>
-              </a:blipFill>
-            </p:spPr>
-            <p:txBody>
-              <a:bodyPr/>
-              <a:lstStyle/>
-              <a:p>
-                <a:r>
-                  <a:rPr lang="it-IT">
-                    <a:noFill/>
-                  </a:rPr>
-                  <a:t> </a:t>
-                </a:r>
-              </a:p>
-            </p:txBody>
-          </p:sp>
-        </mc:Fallback>
-      </mc:AlternateContent>
+      <p:cxnSp>
+        <p:nvCxnSpPr>
+          <p:cNvPr id="45" name="Straight Arrow Connector 44">
+            <a:extLst>
+              <a:ext uri="{FF2B5EF4-FFF2-40B4-BE49-F238E27FC236}">
+                <a16:creationId xmlns:a16="http://schemas.microsoft.com/office/drawing/2014/main" id="{C911A1F4-B289-588A-B70F-96D16C169526}"/>
+              </a:ext>
+            </a:extLst>
+          </p:cNvPr>
+          <p:cNvCxnSpPr>
+            <a:cxnSpLocks/>
+            <a:stCxn id="3" idx="2"/>
+          </p:cNvCxnSpPr>
+          <p:nvPr/>
+        </p:nvCxnSpPr>
+        <p:spPr>
+          <a:xfrm flipH="1">
+            <a:off x="1343385" y="3226204"/>
+            <a:ext cx="245587" cy="648264"/>
+          </a:xfrm>
+          <a:prstGeom prst="straightConnector1">
+            <a:avLst/>
+          </a:prstGeom>
+          <a:ln w="38100">
+            <a:solidFill>
+              <a:srgbClr val="FFC000"/>
+            </a:solidFill>
+            <a:headEnd type="none" w="med" len="med"/>
+            <a:tailEnd type="arrow" w="med" len="med"/>
+          </a:ln>
+        </p:spPr>
+        <p:style>
+          <a:lnRef idx="2">
+            <a:schemeClr val="accent1"/>
+          </a:lnRef>
+          <a:fillRef idx="0">
+            <a:schemeClr val="accent1"/>
+          </a:fillRef>
+          <a:effectRef idx="1">
+            <a:schemeClr val="accent1"/>
+          </a:effectRef>
+          <a:fontRef idx="minor">
+            <a:schemeClr val="tx1"/>
+          </a:fontRef>
+        </p:style>
+      </p:cxnSp>
+      <p:cxnSp>
+        <p:nvCxnSpPr>
+          <p:cNvPr id="48" name="Straight Arrow Connector 47">
+            <a:extLst>
+              <a:ext uri="{FF2B5EF4-FFF2-40B4-BE49-F238E27FC236}">
+                <a16:creationId xmlns:a16="http://schemas.microsoft.com/office/drawing/2014/main" id="{3EFCAA7B-A105-9BD4-26F9-87F74BD84BA6}"/>
+              </a:ext>
+            </a:extLst>
+          </p:cNvPr>
+          <p:cNvCxnSpPr>
+            <a:cxnSpLocks/>
+            <a:stCxn id="21" idx="2"/>
+          </p:cNvCxnSpPr>
+          <p:nvPr/>
+        </p:nvCxnSpPr>
+        <p:spPr>
+          <a:xfrm flipH="1">
+            <a:off x="2304387" y="3226204"/>
+            <a:ext cx="1543760" cy="682008"/>
+          </a:xfrm>
+          <a:prstGeom prst="straightConnector1">
+            <a:avLst/>
+          </a:prstGeom>
+          <a:ln w="38100">
+            <a:solidFill>
+              <a:srgbClr val="FFC000"/>
+            </a:solidFill>
+            <a:headEnd type="none" w="med" len="med"/>
+            <a:tailEnd type="arrow" w="med" len="med"/>
+          </a:ln>
+        </p:spPr>
+        <p:style>
+          <a:lnRef idx="2">
+            <a:schemeClr val="accent1"/>
+          </a:lnRef>
+          <a:fillRef idx="0">
+            <a:schemeClr val="accent1"/>
+          </a:fillRef>
+          <a:effectRef idx="1">
+            <a:schemeClr val="accent1"/>
+          </a:effectRef>
+          <a:fontRef idx="minor">
+            <a:schemeClr val="tx1"/>
+          </a:fontRef>
+        </p:style>
+      </p:cxnSp>
+      <p:cxnSp>
+        <p:nvCxnSpPr>
+          <p:cNvPr id="53" name="Straight Arrow Connector 52">
+            <a:extLst>
+              <a:ext uri="{FF2B5EF4-FFF2-40B4-BE49-F238E27FC236}">
+                <a16:creationId xmlns:a16="http://schemas.microsoft.com/office/drawing/2014/main" id="{74280D7C-DDF6-8D3E-F022-6E7B9DC26AAD}"/>
+              </a:ext>
+            </a:extLst>
+          </p:cNvPr>
+          <p:cNvCxnSpPr>
+            <a:cxnSpLocks/>
+            <a:stCxn id="26" idx="2"/>
+          </p:cNvCxnSpPr>
+          <p:nvPr/>
+        </p:nvCxnSpPr>
+        <p:spPr>
+          <a:xfrm flipH="1">
+            <a:off x="6641286" y="3226204"/>
+            <a:ext cx="1706112" cy="682008"/>
+          </a:xfrm>
+          <a:prstGeom prst="straightConnector1">
+            <a:avLst/>
+          </a:prstGeom>
+          <a:ln w="38100">
+            <a:solidFill>
+              <a:srgbClr val="FFC000"/>
+            </a:solidFill>
+            <a:headEnd type="none" w="med" len="med"/>
+            <a:tailEnd type="arrow" w="med" len="med"/>
+          </a:ln>
+        </p:spPr>
+        <p:style>
+          <a:lnRef idx="2">
+            <a:schemeClr val="accent1"/>
+          </a:lnRef>
+          <a:fillRef idx="0">
+            <a:schemeClr val="accent1"/>
+          </a:fillRef>
+          <a:effectRef idx="1">
+            <a:schemeClr val="accent1"/>
+          </a:effectRef>
+          <a:fontRef idx="minor">
+            <a:schemeClr val="tx1"/>
+          </a:fontRef>
+        </p:style>
+      </p:cxnSp>
+      <p:cxnSp>
+        <p:nvCxnSpPr>
+          <p:cNvPr id="56" name="Straight Arrow Connector 55">
+            <a:extLst>
+              <a:ext uri="{FF2B5EF4-FFF2-40B4-BE49-F238E27FC236}">
+                <a16:creationId xmlns:a16="http://schemas.microsoft.com/office/drawing/2014/main" id="{13D2C29E-3B28-1C80-FF69-A3D86852808D}"/>
+              </a:ext>
+            </a:extLst>
+          </p:cNvPr>
+          <p:cNvCxnSpPr>
+            <a:cxnSpLocks/>
+            <a:stCxn id="28" idx="2"/>
+          </p:cNvCxnSpPr>
+          <p:nvPr/>
+        </p:nvCxnSpPr>
+        <p:spPr>
+          <a:xfrm flipH="1">
+            <a:off x="8501440" y="3226204"/>
+            <a:ext cx="2101589" cy="668000"/>
+          </a:xfrm>
+          <a:prstGeom prst="straightConnector1">
+            <a:avLst/>
+          </a:prstGeom>
+          <a:ln w="38100">
+            <a:solidFill>
+              <a:srgbClr val="FFC000"/>
+            </a:solidFill>
+            <a:headEnd type="none" w="med" len="med"/>
+            <a:tailEnd type="arrow" w="med" len="med"/>
+          </a:ln>
+        </p:spPr>
+        <p:style>
+          <a:lnRef idx="2">
+            <a:schemeClr val="accent1"/>
+          </a:lnRef>
+          <a:fillRef idx="0">
+            <a:schemeClr val="accent1"/>
+          </a:fillRef>
+          <a:effectRef idx="1">
+            <a:schemeClr val="accent1"/>
+          </a:effectRef>
+          <a:fontRef idx="minor">
+            <a:schemeClr val="tx1"/>
+          </a:fontRef>
+        </p:style>
+      </p:cxnSp>
+      <p:cxnSp>
+        <p:nvCxnSpPr>
+          <p:cNvPr id="58" name="Straight Arrow Connector 57">
+            <a:extLst>
+              <a:ext uri="{FF2B5EF4-FFF2-40B4-BE49-F238E27FC236}">
+                <a16:creationId xmlns:a16="http://schemas.microsoft.com/office/drawing/2014/main" id="{32AA7C04-B2FD-28B1-8D71-C8503B04E3DF}"/>
+              </a:ext>
+            </a:extLst>
+          </p:cNvPr>
+          <p:cNvCxnSpPr>
+            <a:cxnSpLocks/>
+            <a:stCxn id="24" idx="2"/>
+          </p:cNvCxnSpPr>
+          <p:nvPr/>
+        </p:nvCxnSpPr>
+        <p:spPr>
+          <a:xfrm>
+            <a:off x="6091767" y="3226204"/>
+            <a:ext cx="44707" cy="804116"/>
+          </a:xfrm>
+          <a:prstGeom prst="straightConnector1">
+            <a:avLst/>
+          </a:prstGeom>
+          <a:ln w="38100">
+            <a:solidFill>
+              <a:schemeClr val="accent4"/>
+            </a:solidFill>
+            <a:headEnd type="none" w="med" len="med"/>
+            <a:tailEnd type="arrow" w="med" len="med"/>
+          </a:ln>
+        </p:spPr>
+        <p:style>
+          <a:lnRef idx="2">
+            <a:schemeClr val="accent1"/>
+          </a:lnRef>
+          <a:fillRef idx="0">
+            <a:schemeClr val="accent1"/>
+          </a:fillRef>
+          <a:effectRef idx="1">
+            <a:schemeClr val="accent1"/>
+          </a:effectRef>
+          <a:fontRef idx="minor">
+            <a:schemeClr val="tx1"/>
+          </a:fontRef>
+        </p:style>
+      </p:cxnSp>
+      <p:cxnSp>
+        <p:nvCxnSpPr>
+          <p:cNvPr id="62" name="Straight Arrow Connector 61">
+            <a:extLst>
+              <a:ext uri="{FF2B5EF4-FFF2-40B4-BE49-F238E27FC236}">
+                <a16:creationId xmlns:a16="http://schemas.microsoft.com/office/drawing/2014/main" id="{B8004C26-DF47-9F1B-D130-5B1428BFD5FC}"/>
+              </a:ext>
+            </a:extLst>
+          </p:cNvPr>
+          <p:cNvCxnSpPr>
+            <a:cxnSpLocks/>
+            <a:stCxn id="35" idx="0"/>
+          </p:cNvCxnSpPr>
+          <p:nvPr/>
+        </p:nvCxnSpPr>
+        <p:spPr>
+          <a:xfrm flipH="1" flipV="1">
+            <a:off x="4215144" y="4877687"/>
+            <a:ext cx="56160" cy="607568"/>
+          </a:xfrm>
+          <a:prstGeom prst="straightConnector1">
+            <a:avLst/>
+          </a:prstGeom>
+          <a:ln w="38100">
+            <a:solidFill>
+              <a:schemeClr val="accent1"/>
+            </a:solidFill>
+            <a:headEnd type="none" w="med" len="med"/>
+            <a:tailEnd type="arrow" w="med" len="med"/>
+          </a:ln>
+        </p:spPr>
+        <p:style>
+          <a:lnRef idx="2">
+            <a:schemeClr val="accent1"/>
+          </a:lnRef>
+          <a:fillRef idx="0">
+            <a:schemeClr val="accent1"/>
+          </a:fillRef>
+          <a:effectRef idx="1">
+            <a:schemeClr val="accent1"/>
+          </a:effectRef>
+          <a:fontRef idx="minor">
+            <a:schemeClr val="tx1"/>
+          </a:fontRef>
+        </p:style>
+      </p:cxnSp>
+      <p:cxnSp>
+        <p:nvCxnSpPr>
+          <p:cNvPr id="65" name="Straight Arrow Connector 64">
+            <a:extLst>
+              <a:ext uri="{FF2B5EF4-FFF2-40B4-BE49-F238E27FC236}">
+                <a16:creationId xmlns:a16="http://schemas.microsoft.com/office/drawing/2014/main" id="{B5C40DD8-C829-9CAC-EC85-0076DC92B1F1}"/>
+              </a:ext>
+            </a:extLst>
+          </p:cNvPr>
+          <p:cNvCxnSpPr>
+            <a:cxnSpLocks/>
+            <a:stCxn id="37" idx="0"/>
+          </p:cNvCxnSpPr>
+          <p:nvPr/>
+        </p:nvCxnSpPr>
+        <p:spPr>
+          <a:xfrm flipH="1" flipV="1">
+            <a:off x="7586432" y="4833761"/>
+            <a:ext cx="721203" cy="651494"/>
+          </a:xfrm>
+          <a:prstGeom prst="straightConnector1">
+            <a:avLst/>
+          </a:prstGeom>
+          <a:ln w="38100">
+            <a:solidFill>
+              <a:schemeClr val="accent1"/>
+            </a:solidFill>
+            <a:headEnd type="none" w="med" len="med"/>
+            <a:tailEnd type="arrow" w="med" len="med"/>
+          </a:ln>
+        </p:spPr>
+        <p:style>
+          <a:lnRef idx="2">
+            <a:schemeClr val="accent1"/>
+          </a:lnRef>
+          <a:fillRef idx="0">
+            <a:schemeClr val="accent1"/>
+          </a:fillRef>
+          <a:effectRef idx="1">
+            <a:schemeClr val="accent1"/>
+          </a:effectRef>
+          <a:fontRef idx="minor">
+            <a:schemeClr val="tx1"/>
+          </a:fontRef>
+        </p:style>
+      </p:cxnSp>
+      <p:sp>
+        <p:nvSpPr>
+          <p:cNvPr id="68" name="Multiplication Sign 67">
+            <a:extLst>
+              <a:ext uri="{FF2B5EF4-FFF2-40B4-BE49-F238E27FC236}">
+                <a16:creationId xmlns:a16="http://schemas.microsoft.com/office/drawing/2014/main" id="{8B2EEA5D-539D-88EE-986F-D678DEE81F59}"/>
+              </a:ext>
+            </a:extLst>
+          </p:cNvPr>
+          <p:cNvSpPr/>
+          <p:nvPr/>
+        </p:nvSpPr>
+        <p:spPr>
+          <a:xfrm>
+            <a:off x="7859306" y="3536407"/>
+            <a:ext cx="3354933" cy="1874954"/>
+          </a:xfrm>
+          <a:prstGeom prst="mathMultiply">
+            <a:avLst>
+              <a:gd name="adj1" fmla="val 6683"/>
+            </a:avLst>
+          </a:prstGeom>
+          <a:solidFill>
+            <a:schemeClr val="tx1"/>
+          </a:solidFill>
+          <a:ln>
+            <a:noFill/>
+          </a:ln>
+        </p:spPr>
+        <p:style>
+          <a:lnRef idx="2">
+            <a:schemeClr val="accent1">
+              <a:shade val="15000"/>
+            </a:schemeClr>
+          </a:lnRef>
+          <a:fillRef idx="1">
+            <a:schemeClr val="accent1"/>
+          </a:fillRef>
+          <a:effectRef idx="0">
+            <a:schemeClr val="accent1"/>
+          </a:effectRef>
+          <a:fontRef idx="minor">
+            <a:schemeClr val="lt1"/>
+          </a:fontRef>
+        </p:style>
+        <p:txBody>
+          <a:bodyPr rtlCol="0" anchor="ctr"/>
+          <a:lstStyle/>
+          <a:p>
+            <a:pPr algn="ctr"/>
+            <a:endParaRPr lang="it-IT"/>
+          </a:p>
+        </p:txBody>
+      </p:sp>
     </p:spTree>
     <p:extLst>
       <p:ext uri="{BB962C8B-B14F-4D97-AF65-F5344CB8AC3E}">
@@ -6189,10 +6733,10 @@
       </p:sp>
       <p:pic>
         <p:nvPicPr>
-          <p:cNvPr id="7" name="Immagine 6">
-            <a:extLst>
-              <a:ext uri="{FF2B5EF4-FFF2-40B4-BE49-F238E27FC236}">
-                <a16:creationId xmlns:a16="http://schemas.microsoft.com/office/drawing/2014/main" id="{3F38F614-6004-D72E-11CB-6711FB5ABE56}"/>
+          <p:cNvPr id="8" name="Immagine 7">
+            <a:extLst>
+              <a:ext uri="{FF2B5EF4-FFF2-40B4-BE49-F238E27FC236}">
+                <a16:creationId xmlns:a16="http://schemas.microsoft.com/office/drawing/2014/main" id="{8C19DACC-8BF8-944F-AFBE-0BF9ECAB5793}"/>
               </a:ext>
             </a:extLst>
           </p:cNvPr>
@@ -6209,342 +6753,30 @@
               </a:ext>
             </a:extLst>
           </a:blip>
-          <a:srcRect/>
-          <a:stretch/>
-        </p:blipFill>
-        <p:spPr>
-          <a:xfrm>
-            <a:off x="1899247" y="1546325"/>
-            <a:ext cx="8757821" cy="4165439"/>
-          </a:xfrm>
-          <a:prstGeom prst="rect">
-            <a:avLst/>
-          </a:prstGeom>
-        </p:spPr>
-      </p:pic>
-      <p:sp>
-        <p:nvSpPr>
-          <p:cNvPr id="14" name="CasellaDiTesto 13">
-            <a:extLst>
-              <a:ext uri="{FF2B5EF4-FFF2-40B4-BE49-F238E27FC236}">
-                <a16:creationId xmlns:a16="http://schemas.microsoft.com/office/drawing/2014/main" id="{8761CFF4-1AA7-7DBA-C7AD-C4C417735B36}"/>
-              </a:ext>
-            </a:extLst>
-          </p:cNvPr>
-          <p:cNvSpPr txBox="1"/>
-          <p:nvPr/>
-        </p:nvSpPr>
-        <p:spPr>
-          <a:xfrm>
-            <a:off x="2819400" y="1671629"/>
-            <a:ext cx="679450" cy="400110"/>
-          </a:xfrm>
-          <a:prstGeom prst="rect">
-            <a:avLst/>
-          </a:prstGeom>
-          <a:noFill/>
-        </p:spPr>
-        <p:txBody>
-          <a:bodyPr wrap="square" rtlCol="0">
-            <a:spAutoFit/>
-          </a:bodyPr>
-          <a:lstStyle/>
-          <a:p>
-            <a:pPr algn="ctr"/>
-            <a:r>
-              <a:rPr lang="it-IT" sz="2000" b="1" dirty="0"/>
-              <a:t>T1</a:t>
-            </a:r>
-          </a:p>
-        </p:txBody>
-      </p:sp>
-      <p:sp>
-        <p:nvSpPr>
-          <p:cNvPr id="17" name="CasellaDiTesto 16">
-            <a:extLst>
-              <a:ext uri="{FF2B5EF4-FFF2-40B4-BE49-F238E27FC236}">
-                <a16:creationId xmlns:a16="http://schemas.microsoft.com/office/drawing/2014/main" id="{D3769F19-49FA-6A86-4E43-EE9B9FCF5335}"/>
-              </a:ext>
-            </a:extLst>
-          </p:cNvPr>
-          <p:cNvSpPr txBox="1"/>
-          <p:nvPr/>
-        </p:nvSpPr>
-        <p:spPr>
-          <a:xfrm>
-            <a:off x="3498850" y="1671629"/>
-            <a:ext cx="679450" cy="400110"/>
-          </a:xfrm>
-          <a:prstGeom prst="rect">
-            <a:avLst/>
-          </a:prstGeom>
-          <a:noFill/>
-        </p:spPr>
-        <p:txBody>
-          <a:bodyPr wrap="square" rtlCol="0">
-            <a:spAutoFit/>
-          </a:bodyPr>
-          <a:lstStyle/>
-          <a:p>
-            <a:pPr algn="ctr"/>
-            <a:r>
-              <a:rPr lang="it-IT" sz="2000" b="1" dirty="0"/>
-              <a:t>T2</a:t>
-            </a:r>
-          </a:p>
-        </p:txBody>
-      </p:sp>
-      <p:sp>
-        <p:nvSpPr>
-          <p:cNvPr id="19" name="CasellaDiTesto 18">
-            <a:extLst>
-              <a:ext uri="{FF2B5EF4-FFF2-40B4-BE49-F238E27FC236}">
-                <a16:creationId xmlns:a16="http://schemas.microsoft.com/office/drawing/2014/main" id="{E6613190-54C0-7766-BE53-A88A0928D029}"/>
-              </a:ext>
-            </a:extLst>
-          </p:cNvPr>
-          <p:cNvSpPr txBox="1"/>
-          <p:nvPr/>
-        </p:nvSpPr>
-        <p:spPr>
-          <a:xfrm>
-            <a:off x="6146800" y="1671629"/>
-            <a:ext cx="679450" cy="400110"/>
-          </a:xfrm>
-          <a:prstGeom prst="rect">
-            <a:avLst/>
-          </a:prstGeom>
-          <a:noFill/>
-        </p:spPr>
-        <p:txBody>
-          <a:bodyPr wrap="square" rtlCol="0">
-            <a:spAutoFit/>
-          </a:bodyPr>
-          <a:lstStyle/>
-          <a:p>
-            <a:pPr algn="ctr"/>
-            <a:r>
-              <a:rPr lang="it-IT" sz="2000" b="1" dirty="0"/>
-              <a:t>T3</a:t>
-            </a:r>
-          </a:p>
-        </p:txBody>
-      </p:sp>
-      <p:sp>
-        <p:nvSpPr>
-          <p:cNvPr id="21" name="CasellaDiTesto 20">
-            <a:extLst>
-              <a:ext uri="{FF2B5EF4-FFF2-40B4-BE49-F238E27FC236}">
-                <a16:creationId xmlns:a16="http://schemas.microsoft.com/office/drawing/2014/main" id="{91ABB6A2-0253-F61C-3A3B-B5D48ED67530}"/>
-              </a:ext>
-            </a:extLst>
-          </p:cNvPr>
-          <p:cNvSpPr txBox="1"/>
-          <p:nvPr/>
-        </p:nvSpPr>
-        <p:spPr>
-          <a:xfrm>
-            <a:off x="8455025" y="1671629"/>
-            <a:ext cx="679450" cy="400110"/>
-          </a:xfrm>
-          <a:prstGeom prst="rect">
-            <a:avLst/>
-          </a:prstGeom>
-          <a:noFill/>
-        </p:spPr>
-        <p:txBody>
-          <a:bodyPr wrap="square" rtlCol="0">
-            <a:spAutoFit/>
-          </a:bodyPr>
-          <a:lstStyle/>
-          <a:p>
-            <a:pPr algn="ctr"/>
-            <a:r>
-              <a:rPr lang="it-IT" sz="2000" b="1" dirty="0"/>
-              <a:t>C4</a:t>
-            </a:r>
-          </a:p>
-        </p:txBody>
-      </p:sp>
-      <p:sp>
-        <p:nvSpPr>
-          <p:cNvPr id="23" name="CasellaDiTesto 22">
-            <a:extLst>
-              <a:ext uri="{FF2B5EF4-FFF2-40B4-BE49-F238E27FC236}">
-                <a16:creationId xmlns:a16="http://schemas.microsoft.com/office/drawing/2014/main" id="{5EF31BC2-B06C-C19F-8B82-234E7051B99F}"/>
-              </a:ext>
-            </a:extLst>
-          </p:cNvPr>
-          <p:cNvSpPr txBox="1"/>
-          <p:nvPr/>
-        </p:nvSpPr>
-        <p:spPr>
-          <a:xfrm>
-            <a:off x="4914900" y="4911565"/>
-            <a:ext cx="1047750" cy="400110"/>
-          </a:xfrm>
-          <a:prstGeom prst="rect">
-            <a:avLst/>
-          </a:prstGeom>
-          <a:noFill/>
-        </p:spPr>
-        <p:txBody>
-          <a:bodyPr wrap="square" rtlCol="0">
-            <a:spAutoFit/>
-          </a:bodyPr>
-          <a:lstStyle/>
-          <a:p>
-            <a:pPr algn="ctr"/>
-            <a:r>
-              <a:rPr lang="it-IT" sz="2000" b="1" dirty="0" err="1">
-                <a:solidFill>
-                  <a:srgbClr val="FFC000"/>
-                </a:solidFill>
-              </a:rPr>
-              <a:t>crystal</a:t>
-            </a:r>
-            <a:endParaRPr lang="it-IT" sz="2000" b="1" dirty="0">
-              <a:solidFill>
-                <a:srgbClr val="FFC000"/>
-              </a:solidFill>
-            </a:endParaRPr>
-          </a:p>
-        </p:txBody>
-      </p:sp>
-      <p:sp>
-        <p:nvSpPr>
-          <p:cNvPr id="25" name="CasellaDiTesto 24">
-            <a:extLst>
-              <a:ext uri="{FF2B5EF4-FFF2-40B4-BE49-F238E27FC236}">
-                <a16:creationId xmlns:a16="http://schemas.microsoft.com/office/drawing/2014/main" id="{DC516CBA-691F-320E-81BE-67B07E92F0CB}"/>
-              </a:ext>
-            </a:extLst>
-          </p:cNvPr>
-          <p:cNvSpPr txBox="1"/>
-          <p:nvPr/>
-        </p:nvSpPr>
-        <p:spPr>
-          <a:xfrm>
-            <a:off x="10402009" y="4315824"/>
-            <a:ext cx="679450" cy="369332"/>
-          </a:xfrm>
-          <a:prstGeom prst="rect">
-            <a:avLst/>
-          </a:prstGeom>
-          <a:noFill/>
-        </p:spPr>
-        <p:txBody>
-          <a:bodyPr wrap="square" rtlCol="0">
-            <a:spAutoFit/>
-          </a:bodyPr>
-          <a:lstStyle/>
-          <a:p>
-            <a:pPr algn="ctr"/>
-            <a:r>
-              <a:rPr lang="it-IT" dirty="0"/>
-              <a:t>[m]</a:t>
-            </a:r>
-          </a:p>
-        </p:txBody>
-      </p:sp>
-      <p:pic>
-        <p:nvPicPr>
-          <p:cNvPr id="8" name="Immagine 7">
-            <a:extLst>
-              <a:ext uri="{FF2B5EF4-FFF2-40B4-BE49-F238E27FC236}">
-                <a16:creationId xmlns:a16="http://schemas.microsoft.com/office/drawing/2014/main" id="{8C19DACC-8BF8-944F-AFBE-0BF9ECAB5793}"/>
-              </a:ext>
-            </a:extLst>
-          </p:cNvPr>
-          <p:cNvPicPr>
-            <a:picLocks noChangeAspect="1"/>
-          </p:cNvPicPr>
-          <p:nvPr/>
-        </p:nvPicPr>
-        <p:blipFill>
-          <a:blip r:embed="rId3">
-            <a:extLst>
-              <a:ext uri="{28A0092B-C50C-407E-A947-70E740481C1C}">
-                <a14:useLocalDpi xmlns:a14="http://schemas.microsoft.com/office/drawing/2010/main" val="0"/>
-              </a:ext>
-            </a:extLst>
-          </a:blip>
           <a:stretch>
             <a:fillRect/>
           </a:stretch>
         </p:blipFill>
         <p:spPr>
           <a:xfrm>
-            <a:off x="8945151" y="151052"/>
-            <a:ext cx="3098753" cy="1585607"/>
-          </a:xfrm>
-          <a:prstGeom prst="roundRect">
-            <a:avLst>
-              <a:gd name="adj" fmla="val 16667"/>
-            </a:avLst>
+            <a:off x="1595100" y="1486933"/>
+            <a:ext cx="9000000" cy="4605228"/>
+          </a:xfrm>
+          <a:prstGeom prst="rect">
+            <a:avLst/>
           </a:prstGeom>
-          <a:ln w="38100">
-            <a:solidFill>
-              <a:srgbClr val="FFC000"/>
-            </a:solidFill>
+          <a:solidFill>
+            <a:srgbClr val="FFFFFF">
+              <a:shade val="85000"/>
+            </a:srgbClr>
+          </a:solidFill>
+          <a:ln w="88900" cap="sq">
+            <a:noFill/>
+            <a:miter lim="800000"/>
           </a:ln>
           <a:effectLst/>
         </p:spPr>
       </p:pic>
-      <p:sp>
-        <p:nvSpPr>
-          <p:cNvPr id="11" name="Arco 10">
-            <a:extLst>
-              <a:ext uri="{FF2B5EF4-FFF2-40B4-BE49-F238E27FC236}">
-                <a16:creationId xmlns:a16="http://schemas.microsoft.com/office/drawing/2014/main" id="{10E620A4-10A1-BF2A-CF11-1DF7063FF5AD}"/>
-              </a:ext>
-            </a:extLst>
-          </p:cNvPr>
-          <p:cNvSpPr/>
-          <p:nvPr/>
-        </p:nvSpPr>
-        <p:spPr>
-          <a:xfrm rot="5881670">
-            <a:off x="1003504" y="-5711251"/>
-            <a:ext cx="6975242" cy="13219817"/>
-          </a:xfrm>
-          <a:prstGeom prst="arc">
-            <a:avLst>
-              <a:gd name="adj1" fmla="val 16162446"/>
-              <a:gd name="adj2" fmla="val 19464192"/>
-            </a:avLst>
-          </a:prstGeom>
-          <a:ln w="38100">
-            <a:solidFill>
-              <a:srgbClr val="FFC000"/>
-            </a:solidFill>
-            <a:headEnd type="none" w="med" len="med"/>
-            <a:tailEnd type="arrow" w="med" len="med"/>
-          </a:ln>
-        </p:spPr>
-        <p:style>
-          <a:lnRef idx="2">
-            <a:schemeClr val="accent1"/>
-          </a:lnRef>
-          <a:fillRef idx="0">
-            <a:schemeClr val="accent1"/>
-          </a:fillRef>
-          <a:effectRef idx="1">
-            <a:schemeClr val="accent1"/>
-          </a:effectRef>
-          <a:fontRef idx="minor">
-            <a:schemeClr val="tx1"/>
-          </a:fontRef>
-        </p:style>
-        <p:txBody>
-          <a:bodyPr rtlCol="0" anchor="ctr"/>
-          <a:lstStyle/>
-          <a:p>
-            <a:pPr algn="ctr"/>
-            <a:endParaRPr lang="it-IT"/>
-          </a:p>
-        </p:txBody>
-      </p:sp>
     </p:spTree>
     <p:extLst>
       <p:ext uri="{BB962C8B-B14F-4D97-AF65-F5344CB8AC3E}">
@@ -7235,7 +7467,7 @@
               <a:p>
                 <a:r>
                   <a:rPr lang="en-US" dirty="0"/>
-                  <a:t>Beamline operates with a beryllium target, and a spectrometer selection 180 GeV hadrons (mixed 30% </a:t>
+                  <a:t>Beamline operates with a target, and a spectrometer selection 180 GeV hadrons (mixed 30% </a:t>
                 </a:r>
                 <a14:m>
                   <m:oMath xmlns:m="http://schemas.openxmlformats.org/officeDocument/2006/math">
@@ -7283,6 +7515,20 @@
                 <a:r>
                   <a:rPr lang="en-US" dirty="0"/>
                   <a:t>)</a:t>
+                </a:r>
+              </a:p>
+              <a:p>
+                <a:pPr lvl="1"/>
+                <a:r>
+                  <a:rPr lang="en-US" dirty="0"/>
+                  <a:t>Target material: beryllium</a:t>
+                </a:r>
+              </a:p>
+              <a:p>
+                <a:pPr lvl="1"/>
+                <a:r>
+                  <a:rPr lang="en-US" dirty="0"/>
+                  <a:t>Target thickness</a:t>
                 </a:r>
               </a:p>
               <a:p>
@@ -7661,7 +7907,12 @@
                 <p:ph idx="1"/>
               </p:nvPr>
             </p:nvSpPr>
-            <p:spPr/>
+            <p:spPr>
+              <a:xfrm>
+                <a:off x="838200" y="1222745"/>
+                <a:ext cx="10515600" cy="4954218"/>
+              </a:xfrm>
+            </p:spPr>
             <p:txBody>
               <a:bodyPr>
                 <a:normAutofit/>
@@ -7696,8 +7947,13 @@
                 <a:pPr lvl="1"/>
                 <a:r>
                   <a:rPr lang="en-US" dirty="0"/>
-                  <a:t>639 strips on a 60 um pitch</a:t>
+                  <a:t>639 strips on a 60 um pitch </a:t>
                 </a:r>
+                <a:r>
+                  <a:rPr lang="en-US"/>
+                  <a:t>and … um width</a:t>
+                </a:r>
+                <a:endParaRPr lang="en-US" dirty="0"/>
               </a:p>
               <a:p>
                 <a:pPr lvl="1"/>
@@ -7794,10 +8050,14 @@
               </p:nvPr>
             </p:nvSpPr>
             <p:spPr>
+              <a:xfrm>
+                <a:off x="838200" y="1222745"/>
+                <a:ext cx="10515600" cy="4954218"/>
+              </a:xfrm>
               <a:blipFill>
                 <a:blip r:embed="rId3"/>
                 <a:stretch>
-                  <a:fillRect l="-1043" t="-2381" b="-700"/>
+                  <a:fillRect l="-1043" t="-2217"/>
                 </a:stretch>
               </a:blipFill>
             </p:spPr>
